--- a/PRomop_Developer_Guide.pptx
+++ b/PRomop_Developer_Guide.pptx
@@ -7,6 +7,7 @@
   <p:sldIdLst>
     <p:sldId id="256" r:id="rId7"/>
     <p:sldId id="257" r:id="rId9"/>
+    <p:sldId id="283" r:id="rId35"/>
     <p:sldId id="258" r:id="rId10"/>
     <p:sldId id="259" r:id="rId11"/>
     <p:sldId id="260" r:id="rId12"/>
@@ -18,12 +19,14 @@
     <p:sldId id="266" r:id="rId18"/>
     <p:sldId id="267" r:id="rId19"/>
     <p:sldId id="268" r:id="rId20"/>
+    <p:sldId id="284" r:id="rId36"/>
     <p:sldId id="269" r:id="rId21"/>
     <p:sldId id="270" r:id="rId22"/>
     <p:sldId id="271" r:id="rId23"/>
     <p:sldId id="272" r:id="rId24"/>
     <p:sldId id="273" r:id="rId25"/>
     <p:sldId id="274" r:id="rId26"/>
+    <p:sldId id="285" r:id="rId37"/>
     <p:sldId id="275" r:id="rId27"/>
     <p:sldId id="276" r:id="rId28"/>
     <p:sldId id="277" r:id="rId29"/>
@@ -2128,6 +2131,146 @@
 </p:notes>
 </file>
 
+<file path=ppt/notesSlides/notesSlide28.xml><?xml version="1.0" encoding="utf-8"?>
+<p:notes xmlns:a="http://schemas.openxmlformats.org/drawingml/2006/main" xmlns:p="http://schemas.openxmlformats.org/presentationml/2006/main" xmlns:r="http://schemas.openxmlformats.org/officeDocument/2006/relationships">
+  <p:cSld>
+    <p:spTree>
+      <p:nvGrpSpPr>
+        <p:cNvPr id="1" name=""/>
+        <p:cNvGrpSpPr/>
+        <p:nvPr/>
+      </p:nvGrpSpPr>
+      <p:grpSpPr>
+        <a:xfrm>
+          <a:off x="0" y="0"/>
+          <a:ext cx="0" cy="0"/>
+          <a:chOff x="0" y="0"/>
+          <a:chExt cx="0" cy="0"/>
+        </a:xfrm>
+      </p:grpSpPr>
+      <p:sp>
+        <p:nvSpPr>
+          <p:cNvPr id="2" name="Slide Image Placeholder 1"/>
+          <p:cNvSpPr>
+            <a:spLocks noGrp="1"/>
+          </p:cNvSpPr>
+          <p:nvPr>
+            <p:ph type="sldImg" idx="2"/>
+          </p:nvPr>
+        </p:nvSpPr>
+        <p:spPr/>
+      </p:sp>
+      <p:sp>
+        <p:nvSpPr>
+          <p:cNvPr id="3" name="Notes Placeholder 2"/>
+          <p:cNvSpPr>
+            <a:spLocks noGrp="1"/>
+          </p:cNvSpPr>
+          <p:nvPr>
+            <p:ph type="body" idx="3" sz="quarter"/>
+          </p:nvPr>
+        </p:nvSpPr>
+        <p:spPr/>
+        <p:txBody>
+          <a:bodyPr/>
+          <a:lstStyle/>
+          <a:p>
+            <a:r>
+              <a:t>Architecture artwork reproduced from https://phrame.org/#architecture, retrieved 2026-09-14. PHRAME / HealthKey, Inc. Source SVG embedded with a high-resolution PNG fallback. Diagram describes the wider PHRAME ecosystem; source labels do not establish endpoint support in this repository. Follow the linked PRomop API contracts for integration behavior.</a:t>
+            </a:r>
+          </a:p>
+        </p:txBody>
+      </p:sp>
+      <p:sp>
+        <p:nvSpPr>
+          <p:cNvPr id="4" name="Slide Number Placeholder 3"/>
+          <p:cNvSpPr>
+            <a:spLocks noGrp="1"/>
+          </p:cNvSpPr>
+          <p:nvPr>
+            <p:ph type="sldNum" idx="5" sz="quarter"/>
+          </p:nvPr>
+        </p:nvSpPr>
+        <p:spPr/>
+      </p:sp>
+    </p:spTree>
+  </p:cSld>
+  <p:clrMapOvr>
+    <a:masterClrMapping/>
+  </p:clrMapOvr>
+</p:notes>
+</file>
+
+<file path=ppt/notesSlides/notesSlide29.xml><?xml version="1.0" encoding="utf-8"?>
+<p:notes xmlns:a="http://schemas.openxmlformats.org/drawingml/2006/main" xmlns:p="http://schemas.openxmlformats.org/presentationml/2006/main" xmlns:r="http://schemas.openxmlformats.org/officeDocument/2006/relationships">
+  <p:cSld>
+    <p:spTree>
+      <p:nvGrpSpPr>
+        <p:cNvPr id="1" name=""/>
+        <p:cNvGrpSpPr/>
+        <p:nvPr/>
+      </p:nvGrpSpPr>
+      <p:grpSpPr>
+        <a:xfrm>
+          <a:off x="0" y="0"/>
+          <a:ext cx="0" cy="0"/>
+          <a:chOff x="0" y="0"/>
+          <a:chExt cx="0" cy="0"/>
+        </a:xfrm>
+      </p:grpSpPr>
+      <p:sp>
+        <p:nvSpPr>
+          <p:cNvPr id="2" name="Slide Image Placeholder 1"/>
+          <p:cNvSpPr>
+            <a:spLocks noGrp="1"/>
+          </p:cNvSpPr>
+          <p:nvPr>
+            <p:ph type="sldImg" idx="2"/>
+          </p:nvPr>
+        </p:nvSpPr>
+        <p:spPr/>
+      </p:sp>
+      <p:sp>
+        <p:nvSpPr>
+          <p:cNvPr id="3" name="Notes Placeholder 2"/>
+          <p:cNvSpPr>
+            <a:spLocks noGrp="1"/>
+          </p:cNvSpPr>
+          <p:nvPr>
+            <p:ph type="body" idx="3" sz="quarter"/>
+          </p:nvPr>
+        </p:nvSpPr>
+        <p:spPr/>
+        <p:txBody>
+          <a:bodyPr/>
+          <a:lstStyle/>
+          <a:p>
+            <a:r>
+              <a:t>Architecture artwork reproduced from https://phrame.org/#architecture, retrieved 2026-09-14. PHRAME / HealthKey, Inc. Source SVG embedded with a high-resolution PNG fallback. Diagram describes the wider PHRAME ecosystem; source labels do not establish endpoint support in this repository. Follow the linked PRomop API contracts for integration behavior.</a:t>
+            </a:r>
+          </a:p>
+        </p:txBody>
+      </p:sp>
+      <p:sp>
+        <p:nvSpPr>
+          <p:cNvPr id="4" name="Slide Number Placeholder 3"/>
+          <p:cNvSpPr>
+            <a:spLocks noGrp="1"/>
+          </p:cNvSpPr>
+          <p:nvPr>
+            <p:ph type="sldNum" idx="5" sz="quarter"/>
+          </p:nvPr>
+        </p:nvSpPr>
+        <p:spPr/>
+      </p:sp>
+    </p:spTree>
+  </p:cSld>
+  <p:clrMapOvr>
+    <a:masterClrMapping/>
+  </p:clrMapOvr>
+</p:notes>
+</file>
+
 <file path=ppt/notesSlides/notesSlide3.xml><?xml version="1.0" encoding="utf-8"?>
 <p:notes xmlns:a="http://schemas.openxmlformats.org/drawingml/2006/main" xmlns:p="http://schemas.openxmlformats.org/presentationml/2006/main" xmlns:r="http://schemas.openxmlformats.org/officeDocument/2006/relationships">
   <p:cSld>
@@ -2186,6 +2329,76 @@
           <a:p>
             <a:r>
               <a:t>https://github.com/healthkey-ai/promop/blob/dev/docs/code-mapping-api.md</a:t>
+            </a:r>
+          </a:p>
+        </p:txBody>
+      </p:sp>
+      <p:sp>
+        <p:nvSpPr>
+          <p:cNvPr id="4" name="Slide Number Placeholder 3"/>
+          <p:cNvSpPr>
+            <a:spLocks noGrp="1"/>
+          </p:cNvSpPr>
+          <p:nvPr>
+            <p:ph type="sldNum" idx="5" sz="quarter"/>
+          </p:nvPr>
+        </p:nvSpPr>
+        <p:spPr/>
+      </p:sp>
+    </p:spTree>
+  </p:cSld>
+  <p:clrMapOvr>
+    <a:masterClrMapping/>
+  </p:clrMapOvr>
+</p:notes>
+</file>
+
+<file path=ppt/notesSlides/notesSlide30.xml><?xml version="1.0" encoding="utf-8"?>
+<p:notes xmlns:a="http://schemas.openxmlformats.org/drawingml/2006/main" xmlns:p="http://schemas.openxmlformats.org/presentationml/2006/main" xmlns:r="http://schemas.openxmlformats.org/officeDocument/2006/relationships">
+  <p:cSld>
+    <p:spTree>
+      <p:nvGrpSpPr>
+        <p:cNvPr id="1" name=""/>
+        <p:cNvGrpSpPr/>
+        <p:nvPr/>
+      </p:nvGrpSpPr>
+      <p:grpSpPr>
+        <a:xfrm>
+          <a:off x="0" y="0"/>
+          <a:ext cx="0" cy="0"/>
+          <a:chOff x="0" y="0"/>
+          <a:chExt cx="0" cy="0"/>
+        </a:xfrm>
+      </p:grpSpPr>
+      <p:sp>
+        <p:nvSpPr>
+          <p:cNvPr id="2" name="Slide Image Placeholder 1"/>
+          <p:cNvSpPr>
+            <a:spLocks noGrp="1"/>
+          </p:cNvSpPr>
+          <p:nvPr>
+            <p:ph type="sldImg" idx="2"/>
+          </p:nvPr>
+        </p:nvSpPr>
+        <p:spPr/>
+      </p:sp>
+      <p:sp>
+        <p:nvSpPr>
+          <p:cNvPr id="3" name="Notes Placeholder 2"/>
+          <p:cNvSpPr>
+            <a:spLocks noGrp="1"/>
+          </p:cNvSpPr>
+          <p:nvPr>
+            <p:ph type="body" idx="3" sz="quarter"/>
+          </p:nvPr>
+        </p:nvSpPr>
+        <p:spPr/>
+        <p:txBody>
+          <a:bodyPr/>
+          <a:lstStyle/>
+          <a:p>
+            <a:r>
+              <a:t>Architecture artwork reproduced from https://phrame.org/#architecture, retrieved 2026-09-14. PHRAME / HealthKey, Inc. Source SVG embedded with a high-resolution PNG fallback. Diagram describes the wider PHRAME ecosystem; source labels do not establish endpoint support in this repository. Follow the linked PRomop API contracts for integration behavior.</a:t>
             </a:r>
           </a:p>
         </p:txBody>
@@ -5707,7 +5920,7 @@
             <a:avLst/>
           </a:prstGeom>
           <a:solidFill>
-            <a:srgbClr val="007F80"/>
+            <a:srgbClr val="4A6650"/>
           </a:solidFill>
           <a:ln>
             <a:noFill/>
@@ -5744,7 +5957,7 @@
         <p:spPr>
           <a:xfrm>
             <a:off x="594360" y="274320"/>
-            <a:ext cx="10972800" cy="274320"/>
+            <a:ext cx="9601200" cy="274320"/>
           </a:xfrm>
           <a:prstGeom prst="rect">
             <a:avLst/>
@@ -5763,7 +5976,7 @@
               </a:spcAft>
               <a:defRPr sz="1100" b="1">
                 <a:solidFill>
-                  <a:srgbClr val="007F80"/>
+                  <a:srgbClr val="4A6650"/>
                 </a:solidFill>
                 <a:latin typeface="Arial"/>
               </a:defRPr>
@@ -5782,8 +5995,8 @@
         </p:nvSpPr>
         <p:spPr>
           <a:xfrm>
-            <a:off x="594360" y="777240"/>
-            <a:ext cx="10972800" cy="914400"/>
+            <a:off x="1874519" y="941832"/>
+            <a:ext cx="9601200" cy="914400"/>
           </a:xfrm>
           <a:prstGeom prst="rect">
             <a:avLst/>
@@ -5802,7 +6015,7 @@
               </a:spcAft>
               <a:defRPr sz="3100" b="1">
                 <a:solidFill>
-                  <a:srgbClr val="142C43"/>
+                  <a:srgbClr val="2A2E2A"/>
                 </a:solidFill>
                 <a:latin typeface="Arial"/>
               </a:defRPr>
@@ -5828,7 +6041,7 @@
             <a:avLst/>
           </a:prstGeom>
           <a:solidFill>
-            <a:srgbClr val="D7E1E7"/>
+            <a:srgbClr val="C9BFB0"/>
           </a:solidFill>
           <a:ln>
             <a:noFill/>
@@ -5884,7 +6097,7 @@
               </a:spcAft>
               <a:defRPr sz="1000" b="0">
                 <a:solidFill>
-                  <a:srgbClr val="52677A"/>
+                  <a:srgbClr val="656B63"/>
                 </a:solidFill>
                 <a:latin typeface="Arial"/>
               </a:defRPr>
@@ -5923,7 +6136,7 @@
               </a:spcAft>
               <a:defRPr sz="1000" b="0">
                 <a:solidFill>
-                  <a:srgbClr val="007F80"/>
+                  <a:srgbClr val="4A6650"/>
                 </a:solidFill>
                 <a:latin typeface="Arial"/>
               </a:defRPr>
@@ -5965,7 +6178,7 @@
               </a:spcAft>
               <a:defRPr sz="1000" b="0">
                 <a:solidFill>
-                  <a:srgbClr val="52677A"/>
+                  <a:srgbClr val="656B63"/>
                 </a:solidFill>
                 <a:latin typeface="Arial"/>
               </a:defRPr>
@@ -6004,7 +6217,7 @@
               </a:spcAft>
               <a:defRPr sz="3600" b="1">
                 <a:solidFill>
-                  <a:srgbClr val="142C43"/>
+                  <a:srgbClr val="2A2E2A"/>
                 </a:solidFill>
                 <a:latin typeface="Arial"/>
               </a:defRPr>
@@ -6020,7 +6233,7 @@
               </a:spcAft>
               <a:defRPr sz="3600" b="1">
                 <a:solidFill>
-                  <a:srgbClr val="142C43"/>
+                  <a:srgbClr val="2A2E2A"/>
                 </a:solidFill>
                 <a:latin typeface="Arial"/>
               </a:defRPr>
@@ -6059,7 +6272,7 @@
               </a:spcAft>
               <a:defRPr sz="2300" b="0">
                 <a:solidFill>
-                  <a:srgbClr val="24394B"/>
+                  <a:srgbClr val="2A2E2A"/>
                 </a:solidFill>
                 <a:latin typeface="Arial"/>
               </a:defRPr>
@@ -6075,7 +6288,7 @@
               </a:spcAft>
               <a:defRPr sz="2300" b="0">
                 <a:solidFill>
-                  <a:srgbClr val="24394B"/>
+                  <a:srgbClr val="2A2E2A"/>
                 </a:solidFill>
                 <a:latin typeface="Arial"/>
               </a:defRPr>
@@ -6101,7 +6314,7 @@
             <a:avLst/>
           </a:prstGeom>
           <a:solidFill>
-            <a:srgbClr val="EFF5F7"/>
+            <a:srgbClr val="F5F0EA"/>
           </a:solidFill>
           <a:ln>
             <a:noFill/>
@@ -6157,7 +6370,7 @@
               </a:spcAft>
               <a:defRPr sz="1700" b="1">
                 <a:solidFill>
-                  <a:srgbClr val="007F80"/>
+                  <a:srgbClr val="4A6650"/>
                 </a:solidFill>
                 <a:latin typeface="Arial"/>
               </a:defRPr>
@@ -6168,6 +6381,36 @@
           </a:p>
         </p:txBody>
       </p:sp>
+      <p:pic>
+        <p:nvPicPr>
+          <p:cNvPr id="13" name="PRomop logo" descr="PRomop logo"/>
+          <p:cNvPicPr>
+            <a:picLocks noChangeAspect="1"/>
+          </p:cNvPicPr>
+          <p:nvPr/>
+        </p:nvPicPr>
+        <p:blipFill>
+          <a:blip r:embed="rId4">
+            <a:extLst>
+              <a:ext uri="{96DAC541-7B7A-43D3-8B79-37D633B846F1}">
+                <ns0:svgBlip xmlns:ns0="http://schemas.microsoft.com/office/drawing/2016/SVG/main" r:embed="rId5"/>
+              </a:ext>
+            </a:extLst>
+          </a:blip>
+          <a:stretch>
+            <a:fillRect/>
+          </a:stretch>
+        </p:blipFill>
+        <p:spPr>
+          <a:xfrm>
+            <a:off x="612648" y="768096"/>
+            <a:ext cx="1051560" cy="962581"/>
+          </a:xfrm>
+          <a:prstGeom prst="rect">
+            <a:avLst/>
+          </a:prstGeom>
+        </p:spPr>
+      </p:pic>
     </p:spTree>
   </p:cSld>
   <p:clrMapOvr>
@@ -6209,7 +6452,7 @@
             <a:avLst/>
           </a:prstGeom>
           <a:solidFill>
-            <a:srgbClr val="007F80"/>
+            <a:srgbClr val="4A6650"/>
           </a:solidFill>
           <a:ln>
             <a:noFill/>
@@ -6246,7 +6489,7 @@
         <p:spPr>
           <a:xfrm>
             <a:off x="594360" y="274320"/>
-            <a:ext cx="10972800" cy="274320"/>
+            <a:ext cx="9601200" cy="274320"/>
           </a:xfrm>
           <a:prstGeom prst="rect">
             <a:avLst/>
@@ -6265,7 +6508,7 @@
               </a:spcAft>
               <a:defRPr sz="1100" b="1">
                 <a:solidFill>
-                  <a:srgbClr val="007F80"/>
+                  <a:srgbClr val="4A6650"/>
                 </a:solidFill>
                 <a:latin typeface="Arial"/>
               </a:defRPr>
@@ -6304,7 +6547,7 @@
               </a:spcAft>
               <a:defRPr sz="3100" b="1">
                 <a:solidFill>
-                  <a:srgbClr val="142C43"/>
+                  <a:srgbClr val="2A2E2A"/>
                 </a:solidFill>
                 <a:latin typeface="Arial"/>
               </a:defRPr>
@@ -6330,7 +6573,7 @@
             <a:avLst/>
           </a:prstGeom>
           <a:solidFill>
-            <a:srgbClr val="D7E1E7"/>
+            <a:srgbClr val="C9BFB0"/>
           </a:solidFill>
           <a:ln>
             <a:noFill/>
@@ -6386,7 +6629,7 @@
               </a:spcAft>
               <a:defRPr sz="1000" b="0">
                 <a:solidFill>
-                  <a:srgbClr val="52677A"/>
+                  <a:srgbClr val="656B63"/>
                 </a:solidFill>
                 <a:latin typeface="Arial"/>
               </a:defRPr>
@@ -6425,7 +6668,7 @@
               </a:spcAft>
               <a:defRPr sz="1000" b="0">
                 <a:solidFill>
-                  <a:srgbClr val="007F80"/>
+                  <a:srgbClr val="4A6650"/>
                 </a:solidFill>
                 <a:latin typeface="Arial"/>
               </a:defRPr>
@@ -6467,7 +6710,7 @@
               </a:spcAft>
               <a:defRPr sz="1000" b="0">
                 <a:solidFill>
-                  <a:srgbClr val="007F80"/>
+                  <a:srgbClr val="4A6650"/>
                 </a:solidFill>
                 <a:latin typeface="Arial"/>
               </a:defRPr>
@@ -6509,13 +6752,13 @@
               </a:spcAft>
               <a:defRPr sz="1000" b="0">
                 <a:solidFill>
-                  <a:srgbClr val="52677A"/>
-                </a:solidFill>
-                <a:latin typeface="Arial"/>
-              </a:defRPr>
-            </a:pPr>
-            <a:r>
-              <a:t>10</a:t>
+                  <a:srgbClr val="656B63"/>
+                </a:solidFill>
+                <a:latin typeface="Arial"/>
+              </a:defRPr>
+            </a:pPr>
+            <a:r>
+              <a:t>11</a:t>
             </a:r>
           </a:p>
         </p:txBody>
@@ -6535,7 +6778,7 @@
             <a:avLst/>
           </a:prstGeom>
           <a:solidFill>
-            <a:srgbClr val="EFF5F7"/>
+            <a:srgbClr val="F5F0EA"/>
           </a:solidFill>
           <a:ln>
             <a:noFill/>
@@ -6591,7 +6834,7 @@
               </a:spcAft>
               <a:defRPr sz="1900" b="1">
                 <a:solidFill>
-                  <a:srgbClr val="007F80"/>
+                  <a:srgbClr val="4A6650"/>
                 </a:solidFill>
                 <a:latin typeface="Arial"/>
               </a:defRPr>
@@ -6630,7 +6873,7 @@
               </a:spcAft>
               <a:defRPr sz="1900" b="0">
                 <a:solidFill>
-                  <a:srgbClr val="24394B"/>
+                  <a:srgbClr val="2A2E2A"/>
                 </a:solidFill>
                 <a:latin typeface="Arial"/>
               </a:defRPr>
@@ -6712,7 +6955,7 @@
               </a:spcAft>
               <a:defRPr sz="1900" b="1">
                 <a:solidFill>
-                  <a:srgbClr val="007F80"/>
+                  <a:srgbClr val="4A6650"/>
                 </a:solidFill>
                 <a:latin typeface="Arial"/>
               </a:defRPr>
@@ -6751,7 +6994,7 @@
               </a:spcAft>
               <a:defRPr sz="1900" b="0">
                 <a:solidFill>
-                  <a:srgbClr val="24394B"/>
+                  <a:srgbClr val="2A2E2A"/>
                 </a:solidFill>
                 <a:latin typeface="Arial"/>
               </a:defRPr>
@@ -6777,7 +7020,7 @@
             <a:avLst/>
           </a:prstGeom>
           <a:solidFill>
-            <a:srgbClr val="EFF5F7"/>
+            <a:srgbClr val="F5F0EA"/>
           </a:solidFill>
           <a:ln>
             <a:noFill/>
@@ -6833,7 +7076,7 @@
               </a:spcAft>
               <a:defRPr sz="1900" b="1">
                 <a:solidFill>
-                  <a:srgbClr val="007F80"/>
+                  <a:srgbClr val="4A6650"/>
                 </a:solidFill>
                 <a:latin typeface="Arial"/>
               </a:defRPr>
@@ -6872,7 +7115,7 @@
               </a:spcAft>
               <a:defRPr sz="1900" b="0">
                 <a:solidFill>
-                  <a:srgbClr val="24394B"/>
+                  <a:srgbClr val="2A2E2A"/>
                 </a:solidFill>
                 <a:latin typeface="Arial"/>
               </a:defRPr>
@@ -6954,7 +7197,7 @@
               </a:spcAft>
               <a:defRPr sz="1900" b="1">
                 <a:solidFill>
-                  <a:srgbClr val="007F80"/>
+                  <a:srgbClr val="4A6650"/>
                 </a:solidFill>
                 <a:latin typeface="Arial"/>
               </a:defRPr>
@@ -6993,7 +7236,7 @@
               </a:spcAft>
               <a:defRPr sz="1900" b="0">
                 <a:solidFill>
-                  <a:srgbClr val="24394B"/>
+                  <a:srgbClr val="2A2E2A"/>
                 </a:solidFill>
                 <a:latin typeface="Arial"/>
               </a:defRPr>
@@ -7019,7 +7262,7 @@
             <a:avLst/>
           </a:prstGeom>
           <a:solidFill>
-            <a:srgbClr val="EFF5F7"/>
+            <a:srgbClr val="F5F0EA"/>
           </a:solidFill>
           <a:ln>
             <a:noFill/>
@@ -7075,7 +7318,7 @@
               </a:spcAft>
               <a:defRPr sz="1900" b="1">
                 <a:solidFill>
-                  <a:srgbClr val="007F80"/>
+                  <a:srgbClr val="4A6650"/>
                 </a:solidFill>
                 <a:latin typeface="Arial"/>
               </a:defRPr>
@@ -7114,7 +7357,7 @@
               </a:spcAft>
               <a:defRPr sz="1900" b="0">
                 <a:solidFill>
-                  <a:srgbClr val="24394B"/>
+                  <a:srgbClr val="2A2E2A"/>
                 </a:solidFill>
                 <a:latin typeface="Arial"/>
               </a:defRPr>
@@ -7125,6 +7368,36 @@
           </a:p>
         </p:txBody>
       </p:sp>
+      <p:pic>
+        <p:nvPicPr>
+          <p:cNvPr id="25" name="PRomop logo" descr="PRomop logo"/>
+          <p:cNvPicPr>
+            <a:picLocks noChangeAspect="1"/>
+          </p:cNvPicPr>
+          <p:nvPr/>
+        </p:nvPicPr>
+        <p:blipFill>
+          <a:blip r:embed="rId5">
+            <a:extLst>
+              <a:ext uri="{96DAC541-7B7A-43D3-8B79-37D633B846F1}">
+                <ns0:svgBlip xmlns:ns0="http://schemas.microsoft.com/office/drawing/2016/SVG/main" r:embed="rId6"/>
+              </a:ext>
+            </a:extLst>
+          </a:blip>
+          <a:stretch>
+            <a:fillRect/>
+          </a:stretch>
+        </p:blipFill>
+        <p:spPr>
+          <a:xfrm>
+            <a:off x="10917936" y="201168"/>
+            <a:ext cx="640080" cy="585919"/>
+          </a:xfrm>
+          <a:prstGeom prst="rect">
+            <a:avLst/>
+          </a:prstGeom>
+        </p:spPr>
+      </p:pic>
     </p:spTree>
   </p:cSld>
   <p:clrMapOvr>
@@ -7166,7 +7439,7 @@
             <a:avLst/>
           </a:prstGeom>
           <a:solidFill>
-            <a:srgbClr val="007F80"/>
+            <a:srgbClr val="4A6650"/>
           </a:solidFill>
           <a:ln>
             <a:noFill/>
@@ -7203,7 +7476,7 @@
         <p:spPr>
           <a:xfrm>
             <a:off x="594360" y="274320"/>
-            <a:ext cx="10972800" cy="274320"/>
+            <a:ext cx="9601200" cy="274320"/>
           </a:xfrm>
           <a:prstGeom prst="rect">
             <a:avLst/>
@@ -7222,7 +7495,7 @@
               </a:spcAft>
               <a:defRPr sz="1100" b="1">
                 <a:solidFill>
-                  <a:srgbClr val="007F80"/>
+                  <a:srgbClr val="4A6650"/>
                 </a:solidFill>
                 <a:latin typeface="Arial"/>
               </a:defRPr>
@@ -7261,7 +7534,7 @@
               </a:spcAft>
               <a:defRPr sz="3100" b="1">
                 <a:solidFill>
-                  <a:srgbClr val="142C43"/>
+                  <a:srgbClr val="2A2E2A"/>
                 </a:solidFill>
                 <a:latin typeface="Arial"/>
               </a:defRPr>
@@ -7287,7 +7560,7 @@
             <a:avLst/>
           </a:prstGeom>
           <a:solidFill>
-            <a:srgbClr val="D7E1E7"/>
+            <a:srgbClr val="C9BFB0"/>
           </a:solidFill>
           <a:ln>
             <a:noFill/>
@@ -7343,7 +7616,7 @@
               </a:spcAft>
               <a:defRPr sz="1000" b="0">
                 <a:solidFill>
-                  <a:srgbClr val="52677A"/>
+                  <a:srgbClr val="656B63"/>
                 </a:solidFill>
                 <a:latin typeface="Arial"/>
               </a:defRPr>
@@ -7382,7 +7655,7 @@
               </a:spcAft>
               <a:defRPr sz="1000" b="0">
                 <a:solidFill>
-                  <a:srgbClr val="007F80"/>
+                  <a:srgbClr val="4A6650"/>
                 </a:solidFill>
                 <a:latin typeface="Arial"/>
               </a:defRPr>
@@ -7424,7 +7697,7 @@
               </a:spcAft>
               <a:defRPr sz="1000" b="0">
                 <a:solidFill>
-                  <a:srgbClr val="007F80"/>
+                  <a:srgbClr val="4A6650"/>
                 </a:solidFill>
                 <a:latin typeface="Arial"/>
               </a:defRPr>
@@ -7466,13 +7739,13 @@
               </a:spcAft>
               <a:defRPr sz="1000" b="0">
                 <a:solidFill>
-                  <a:srgbClr val="52677A"/>
-                </a:solidFill>
-                <a:latin typeface="Arial"/>
-              </a:defRPr>
-            </a:pPr>
-            <a:r>
-              <a:t>11</a:t>
+                  <a:srgbClr val="656B63"/>
+                </a:solidFill>
+                <a:latin typeface="Arial"/>
+              </a:defRPr>
+            </a:pPr>
+            <a:r>
+              <a:t>12</a:t>
             </a:r>
           </a:p>
         </p:txBody>
@@ -7492,7 +7765,7 @@
             <a:avLst/>
           </a:prstGeom>
           <a:solidFill>
-            <a:srgbClr val="142C43"/>
+            <a:srgbClr val="2A2E2A"/>
           </a:solidFill>
           <a:ln>
             <a:noFill/>
@@ -7680,7 +7953,7 @@
               </a:spcAft>
               <a:defRPr sz="2200" b="1">
                 <a:solidFill>
-                  <a:srgbClr val="007F80"/>
+                  <a:srgbClr val="4A6650"/>
                 </a:solidFill>
                 <a:latin typeface="Arial"/>
               </a:defRPr>
@@ -7719,7 +7992,7 @@
               </a:spcAft>
               <a:defRPr sz="2000" b="0">
                 <a:solidFill>
-                  <a:srgbClr val="24394B"/>
+                  <a:srgbClr val="2A2E2A"/>
                 </a:solidFill>
                 <a:latin typeface="Arial"/>
               </a:defRPr>
@@ -7735,7 +8008,7 @@
               </a:spcAft>
               <a:defRPr sz="2000" b="0">
                 <a:solidFill>
-                  <a:srgbClr val="24394B"/>
+                  <a:srgbClr val="2A2E2A"/>
                 </a:solidFill>
                 <a:latin typeface="Arial"/>
               </a:defRPr>
@@ -7751,7 +8024,7 @@
               </a:spcAft>
               <a:defRPr sz="2000" b="0">
                 <a:solidFill>
-                  <a:srgbClr val="24394B"/>
+                  <a:srgbClr val="2A2E2A"/>
                 </a:solidFill>
                 <a:latin typeface="Arial"/>
               </a:defRPr>
@@ -7762,6 +8035,36 @@
           </a:p>
         </p:txBody>
       </p:sp>
+      <p:pic>
+        <p:nvPicPr>
+          <p:cNvPr id="14" name="PRomop logo" descr="PRomop logo"/>
+          <p:cNvPicPr>
+            <a:picLocks noChangeAspect="1"/>
+          </p:cNvPicPr>
+          <p:nvPr/>
+        </p:nvPicPr>
+        <p:blipFill>
+          <a:blip r:embed="rId5">
+            <a:extLst>
+              <a:ext uri="{96DAC541-7B7A-43D3-8B79-37D633B846F1}">
+                <ns0:svgBlip xmlns:ns0="http://schemas.microsoft.com/office/drawing/2016/SVG/main" r:embed="rId6"/>
+              </a:ext>
+            </a:extLst>
+          </a:blip>
+          <a:stretch>
+            <a:fillRect/>
+          </a:stretch>
+        </p:blipFill>
+        <p:spPr>
+          <a:xfrm>
+            <a:off x="10917936" y="201168"/>
+            <a:ext cx="640080" cy="585919"/>
+          </a:xfrm>
+          <a:prstGeom prst="rect">
+            <a:avLst/>
+          </a:prstGeom>
+        </p:spPr>
+      </p:pic>
     </p:spTree>
   </p:cSld>
   <p:clrMapOvr>
@@ -7803,7 +8106,7 @@
             <a:avLst/>
           </a:prstGeom>
           <a:solidFill>
-            <a:srgbClr val="007F80"/>
+            <a:srgbClr val="4A6650"/>
           </a:solidFill>
           <a:ln>
             <a:noFill/>
@@ -7840,7 +8143,7 @@
         <p:spPr>
           <a:xfrm>
             <a:off x="594360" y="274320"/>
-            <a:ext cx="10972800" cy="274320"/>
+            <a:ext cx="9601200" cy="274320"/>
           </a:xfrm>
           <a:prstGeom prst="rect">
             <a:avLst/>
@@ -7859,7 +8162,7 @@
               </a:spcAft>
               <a:defRPr sz="1100" b="1">
                 <a:solidFill>
-                  <a:srgbClr val="007F80"/>
+                  <a:srgbClr val="4A6650"/>
                 </a:solidFill>
                 <a:latin typeface="Arial"/>
               </a:defRPr>
@@ -7898,7 +8201,7 @@
               </a:spcAft>
               <a:defRPr sz="3100" b="1">
                 <a:solidFill>
-                  <a:srgbClr val="142C43"/>
+                  <a:srgbClr val="2A2E2A"/>
                 </a:solidFill>
                 <a:latin typeface="Arial"/>
               </a:defRPr>
@@ -7924,7 +8227,7 @@
             <a:avLst/>
           </a:prstGeom>
           <a:solidFill>
-            <a:srgbClr val="D7E1E7"/>
+            <a:srgbClr val="C9BFB0"/>
           </a:solidFill>
           <a:ln>
             <a:noFill/>
@@ -7980,7 +8283,7 @@
               </a:spcAft>
               <a:defRPr sz="1000" b="0">
                 <a:solidFill>
-                  <a:srgbClr val="52677A"/>
+                  <a:srgbClr val="656B63"/>
                 </a:solidFill>
                 <a:latin typeface="Arial"/>
               </a:defRPr>
@@ -8019,7 +8322,7 @@
               </a:spcAft>
               <a:defRPr sz="1000" b="0">
                 <a:solidFill>
-                  <a:srgbClr val="007F80"/>
+                  <a:srgbClr val="4A6650"/>
                 </a:solidFill>
                 <a:latin typeface="Arial"/>
               </a:defRPr>
@@ -8061,13 +8364,13 @@
               </a:spcAft>
               <a:defRPr sz="1000" b="0">
                 <a:solidFill>
-                  <a:srgbClr val="52677A"/>
-                </a:solidFill>
-                <a:latin typeface="Arial"/>
-              </a:defRPr>
-            </a:pPr>
-            <a:r>
-              <a:t>12</a:t>
+                  <a:srgbClr val="656B63"/>
+                </a:solidFill>
+                <a:latin typeface="Arial"/>
+              </a:defRPr>
+            </a:pPr>
+            <a:r>
+              <a:t>13</a:t>
             </a:r>
           </a:p>
         </p:txBody>
@@ -8087,7 +8390,7 @@
             <a:avLst/>
           </a:prstGeom>
           <a:solidFill>
-            <a:srgbClr val="EFF5F7"/>
+            <a:srgbClr val="F5F0EA"/>
           </a:solidFill>
           <a:ln>
             <a:noFill/>
@@ -8143,7 +8446,7 @@
               </a:spcAft>
               <a:defRPr sz="2200" b="1">
                 <a:solidFill>
-                  <a:srgbClr val="007F80"/>
+                  <a:srgbClr val="4A6650"/>
                 </a:solidFill>
                 <a:latin typeface="Arial"/>
               </a:defRPr>
@@ -8182,7 +8485,7 @@
               </a:spcAft>
               <a:defRPr sz="2100" b="0">
                 <a:solidFill>
-                  <a:srgbClr val="24394B"/>
+                  <a:srgbClr val="2A2E2A"/>
                 </a:solidFill>
                 <a:latin typeface="Arial"/>
               </a:defRPr>
@@ -8198,7 +8501,7 @@
               </a:spcAft>
               <a:defRPr sz="2100" b="0">
                 <a:solidFill>
-                  <a:srgbClr val="24394B"/>
+                  <a:srgbClr val="2A2E2A"/>
                 </a:solidFill>
                 <a:latin typeface="Arial"/>
               </a:defRPr>
@@ -8214,7 +8517,7 @@
               </a:spcAft>
               <a:defRPr sz="2100" b="0">
                 <a:solidFill>
-                  <a:srgbClr val="24394B"/>
+                  <a:srgbClr val="2A2E2A"/>
                 </a:solidFill>
                 <a:latin typeface="Arial"/>
               </a:defRPr>
@@ -8230,7 +8533,7 @@
               </a:spcAft>
               <a:defRPr sz="2100" b="0">
                 <a:solidFill>
-                  <a:srgbClr val="24394B"/>
+                  <a:srgbClr val="2A2E2A"/>
                 </a:solidFill>
                 <a:latin typeface="Arial"/>
               </a:defRPr>
@@ -8256,7 +8559,7 @@
             <a:avLst/>
           </a:prstGeom>
           <a:solidFill>
-            <a:srgbClr val="EFF5F7"/>
+            <a:srgbClr val="F5F0EA"/>
           </a:solidFill>
           <a:ln>
             <a:noFill/>
@@ -8312,7 +8615,7 @@
               </a:spcAft>
               <a:defRPr sz="2200" b="1">
                 <a:solidFill>
-                  <a:srgbClr val="007F80"/>
+                  <a:srgbClr val="4A6650"/>
                 </a:solidFill>
                 <a:latin typeface="Arial"/>
               </a:defRPr>
@@ -8351,7 +8654,7 @@
               </a:spcAft>
               <a:defRPr sz="2100" b="0">
                 <a:solidFill>
-                  <a:srgbClr val="24394B"/>
+                  <a:srgbClr val="2A2E2A"/>
                 </a:solidFill>
                 <a:latin typeface="Arial"/>
               </a:defRPr>
@@ -8367,7 +8670,7 @@
               </a:spcAft>
               <a:defRPr sz="2100" b="0">
                 <a:solidFill>
-                  <a:srgbClr val="24394B"/>
+                  <a:srgbClr val="2A2E2A"/>
                 </a:solidFill>
                 <a:latin typeface="Arial"/>
               </a:defRPr>
@@ -8383,7 +8686,7 @@
               </a:spcAft>
               <a:defRPr sz="2100" b="0">
                 <a:solidFill>
-                  <a:srgbClr val="24394B"/>
+                  <a:srgbClr val="2A2E2A"/>
                 </a:solidFill>
                 <a:latin typeface="Arial"/>
               </a:defRPr>
@@ -8399,7 +8702,7 @@
               </a:spcAft>
               <a:defRPr sz="2100" b="0">
                 <a:solidFill>
-                  <a:srgbClr val="24394B"/>
+                  <a:srgbClr val="2A2E2A"/>
                 </a:solidFill>
                 <a:latin typeface="Arial"/>
               </a:defRPr>
@@ -8410,6 +8713,36 @@
           </a:p>
         </p:txBody>
       </p:sp>
+      <p:pic>
+        <p:nvPicPr>
+          <p:cNvPr id="15" name="PRomop logo" descr="PRomop logo"/>
+          <p:cNvPicPr>
+            <a:picLocks noChangeAspect="1"/>
+          </p:cNvPicPr>
+          <p:nvPr/>
+        </p:nvPicPr>
+        <p:blipFill>
+          <a:blip r:embed="rId4">
+            <a:extLst>
+              <a:ext uri="{96DAC541-7B7A-43D3-8B79-37D633B846F1}">
+                <ns0:svgBlip xmlns:ns0="http://schemas.microsoft.com/office/drawing/2016/SVG/main" r:embed="rId5"/>
+              </a:ext>
+            </a:extLst>
+          </a:blip>
+          <a:stretch>
+            <a:fillRect/>
+          </a:stretch>
+        </p:blipFill>
+        <p:spPr>
+          <a:xfrm>
+            <a:off x="10917936" y="201168"/>
+            <a:ext cx="640080" cy="585919"/>
+          </a:xfrm>
+          <a:prstGeom prst="rect">
+            <a:avLst/>
+          </a:prstGeom>
+        </p:spPr>
+      </p:pic>
     </p:spTree>
   </p:cSld>
   <p:clrMapOvr>
@@ -8451,7 +8784,7 @@
             <a:avLst/>
           </a:prstGeom>
           <a:solidFill>
-            <a:srgbClr val="007F80"/>
+            <a:srgbClr val="4A6650"/>
           </a:solidFill>
           <a:ln>
             <a:noFill/>
@@ -8488,7 +8821,7 @@
         <p:spPr>
           <a:xfrm>
             <a:off x="594360" y="274320"/>
-            <a:ext cx="10972800" cy="274320"/>
+            <a:ext cx="9601200" cy="274320"/>
           </a:xfrm>
           <a:prstGeom prst="rect">
             <a:avLst/>
@@ -8507,7 +8840,7 @@
               </a:spcAft>
               <a:defRPr sz="1100" b="1">
                 <a:solidFill>
-                  <a:srgbClr val="007F80"/>
+                  <a:srgbClr val="4A6650"/>
                 </a:solidFill>
                 <a:latin typeface="Arial"/>
               </a:defRPr>
@@ -8546,7 +8879,7 @@
               </a:spcAft>
               <a:defRPr sz="3100" b="1">
                 <a:solidFill>
-                  <a:srgbClr val="142C43"/>
+                  <a:srgbClr val="2A2E2A"/>
                 </a:solidFill>
                 <a:latin typeface="Arial"/>
               </a:defRPr>
@@ -8572,7 +8905,7 @@
             <a:avLst/>
           </a:prstGeom>
           <a:solidFill>
-            <a:srgbClr val="D7E1E7"/>
+            <a:srgbClr val="C9BFB0"/>
           </a:solidFill>
           <a:ln>
             <a:noFill/>
@@ -8628,7 +8961,7 @@
               </a:spcAft>
               <a:defRPr sz="1000" b="0">
                 <a:solidFill>
-                  <a:srgbClr val="52677A"/>
+                  <a:srgbClr val="656B63"/>
                 </a:solidFill>
                 <a:latin typeface="Arial"/>
               </a:defRPr>
@@ -8667,7 +9000,7 @@
               </a:spcAft>
               <a:defRPr sz="1000" b="0">
                 <a:solidFill>
-                  <a:srgbClr val="007F80"/>
+                  <a:srgbClr val="4A6650"/>
                 </a:solidFill>
                 <a:latin typeface="Arial"/>
               </a:defRPr>
@@ -8709,7 +9042,7 @@
               </a:spcAft>
               <a:defRPr sz="1000" b="0">
                 <a:solidFill>
-                  <a:srgbClr val="007F80"/>
+                  <a:srgbClr val="4A6650"/>
                 </a:solidFill>
                 <a:latin typeface="Arial"/>
               </a:defRPr>
@@ -8751,13 +9084,13 @@
               </a:spcAft>
               <a:defRPr sz="1000" b="0">
                 <a:solidFill>
-                  <a:srgbClr val="52677A"/>
-                </a:solidFill>
-                <a:latin typeface="Arial"/>
-              </a:defRPr>
-            </a:pPr>
-            <a:r>
-              <a:t>13</a:t>
+                  <a:srgbClr val="656B63"/>
+                </a:solidFill>
+                <a:latin typeface="Arial"/>
+              </a:defRPr>
+            </a:pPr>
+            <a:r>
+              <a:t>14</a:t>
             </a:r>
           </a:p>
         </p:txBody>
@@ -8777,7 +9110,7 @@
             <a:avLst/>
           </a:prstGeom>
           <a:solidFill>
-            <a:srgbClr val="EFF5F7"/>
+            <a:srgbClr val="F5F0EA"/>
           </a:solidFill>
           <a:ln>
             <a:noFill/>
@@ -8833,7 +9166,7 @@
               </a:spcAft>
               <a:defRPr sz="2200" b="1">
                 <a:solidFill>
-                  <a:srgbClr val="007F80"/>
+                  <a:srgbClr val="4A6650"/>
                 </a:solidFill>
                 <a:latin typeface="Arial"/>
               </a:defRPr>
@@ -8872,7 +9205,7 @@
               </a:spcAft>
               <a:defRPr sz="2100" b="0">
                 <a:solidFill>
-                  <a:srgbClr val="24394B"/>
+                  <a:srgbClr val="2A2E2A"/>
                 </a:solidFill>
                 <a:latin typeface="Arial"/>
               </a:defRPr>
@@ -8888,7 +9221,7 @@
               </a:spcAft>
               <a:defRPr sz="2100" b="0">
                 <a:solidFill>
-                  <a:srgbClr val="24394B"/>
+                  <a:srgbClr val="2A2E2A"/>
                 </a:solidFill>
                 <a:latin typeface="Arial"/>
               </a:defRPr>
@@ -8904,7 +9237,7 @@
               </a:spcAft>
               <a:defRPr sz="2100" b="0">
                 <a:solidFill>
-                  <a:srgbClr val="24394B"/>
+                  <a:srgbClr val="2A2E2A"/>
                 </a:solidFill>
                 <a:latin typeface="Arial"/>
               </a:defRPr>
@@ -8930,7 +9263,7 @@
             <a:avLst/>
           </a:prstGeom>
           <a:solidFill>
-            <a:srgbClr val="EFF5F7"/>
+            <a:srgbClr val="F5F0EA"/>
           </a:solidFill>
           <a:ln>
             <a:noFill/>
@@ -8986,7 +9319,7 @@
               </a:spcAft>
               <a:defRPr sz="2200" b="1">
                 <a:solidFill>
-                  <a:srgbClr val="007F80"/>
+                  <a:srgbClr val="4A6650"/>
                 </a:solidFill>
                 <a:latin typeface="Arial"/>
               </a:defRPr>
@@ -9025,7 +9358,7 @@
               </a:spcAft>
               <a:defRPr sz="2100" b="0">
                 <a:solidFill>
-                  <a:srgbClr val="24394B"/>
+                  <a:srgbClr val="2A2E2A"/>
                 </a:solidFill>
                 <a:latin typeface="Arial"/>
               </a:defRPr>
@@ -9041,7 +9374,7 @@
               </a:spcAft>
               <a:defRPr sz="2100" b="0">
                 <a:solidFill>
-                  <a:srgbClr val="24394B"/>
+                  <a:srgbClr val="2A2E2A"/>
                 </a:solidFill>
                 <a:latin typeface="Arial"/>
               </a:defRPr>
@@ -9057,7 +9390,7 @@
               </a:spcAft>
               <a:defRPr sz="2100" b="0">
                 <a:solidFill>
-                  <a:srgbClr val="24394B"/>
+                  <a:srgbClr val="2A2E2A"/>
                 </a:solidFill>
                 <a:latin typeface="Arial"/>
               </a:defRPr>
@@ -9068,6 +9401,36 @@
           </a:p>
         </p:txBody>
       </p:sp>
+      <p:pic>
+        <p:nvPicPr>
+          <p:cNvPr id="16" name="PRomop logo" descr="PRomop logo"/>
+          <p:cNvPicPr>
+            <a:picLocks noChangeAspect="1"/>
+          </p:cNvPicPr>
+          <p:nvPr/>
+        </p:nvPicPr>
+        <p:blipFill>
+          <a:blip r:embed="rId5">
+            <a:extLst>
+              <a:ext uri="{96DAC541-7B7A-43D3-8B79-37D633B846F1}">
+                <ns0:svgBlip xmlns:ns0="http://schemas.microsoft.com/office/drawing/2016/SVG/main" r:embed="rId6"/>
+              </a:ext>
+            </a:extLst>
+          </a:blip>
+          <a:stretch>
+            <a:fillRect/>
+          </a:stretch>
+        </p:blipFill>
+        <p:spPr>
+          <a:xfrm>
+            <a:off x="10917936" y="201168"/>
+            <a:ext cx="640080" cy="585919"/>
+          </a:xfrm>
+          <a:prstGeom prst="rect">
+            <a:avLst/>
+          </a:prstGeom>
+        </p:spPr>
+      </p:pic>
     </p:spTree>
   </p:cSld>
   <p:clrMapOvr>
@@ -9109,7 +9472,7 @@
             <a:avLst/>
           </a:prstGeom>
           <a:solidFill>
-            <a:srgbClr val="007F80"/>
+            <a:srgbClr val="4A6650"/>
           </a:solidFill>
           <a:ln>
             <a:noFill/>
@@ -9146,7 +9509,7 @@
         <p:spPr>
           <a:xfrm>
             <a:off x="594360" y="274320"/>
-            <a:ext cx="10972800" cy="274320"/>
+            <a:ext cx="9601200" cy="274320"/>
           </a:xfrm>
           <a:prstGeom prst="rect">
             <a:avLst/>
@@ -9165,7 +9528,7 @@
               </a:spcAft>
               <a:defRPr sz="1100" b="1">
                 <a:solidFill>
-                  <a:srgbClr val="007F80"/>
+                  <a:srgbClr val="4A6650"/>
                 </a:solidFill>
                 <a:latin typeface="Arial"/>
               </a:defRPr>
@@ -9204,7 +9567,7 @@
               </a:spcAft>
               <a:defRPr sz="3100" b="1">
                 <a:solidFill>
-                  <a:srgbClr val="142C43"/>
+                  <a:srgbClr val="2A2E2A"/>
                 </a:solidFill>
                 <a:latin typeface="Arial"/>
               </a:defRPr>
@@ -9230,7 +9593,7 @@
             <a:avLst/>
           </a:prstGeom>
           <a:solidFill>
-            <a:srgbClr val="D7E1E7"/>
+            <a:srgbClr val="C9BFB0"/>
           </a:solidFill>
           <a:ln>
             <a:noFill/>
@@ -9286,7 +9649,7 @@
               </a:spcAft>
               <a:defRPr sz="1000" b="0">
                 <a:solidFill>
-                  <a:srgbClr val="52677A"/>
+                  <a:srgbClr val="656B63"/>
                 </a:solidFill>
                 <a:latin typeface="Arial"/>
               </a:defRPr>
@@ -9325,7 +9688,7 @@
               </a:spcAft>
               <a:defRPr sz="1000" b="0">
                 <a:solidFill>
-                  <a:srgbClr val="007F80"/>
+                  <a:srgbClr val="4A6650"/>
                 </a:solidFill>
                 <a:latin typeface="Arial"/>
               </a:defRPr>
@@ -9367,7 +9730,7 @@
               </a:spcAft>
               <a:defRPr sz="1000" b="0">
                 <a:solidFill>
-                  <a:srgbClr val="007F80"/>
+                  <a:srgbClr val="4A6650"/>
                 </a:solidFill>
                 <a:latin typeface="Arial"/>
               </a:defRPr>
@@ -9409,13 +9772,13 @@
               </a:spcAft>
               <a:defRPr sz="1000" b="0">
                 <a:solidFill>
-                  <a:srgbClr val="52677A"/>
-                </a:solidFill>
-                <a:latin typeface="Arial"/>
-              </a:defRPr>
-            </a:pPr>
-            <a:r>
-              <a:t>14</a:t>
+                  <a:srgbClr val="656B63"/>
+                </a:solidFill>
+                <a:latin typeface="Arial"/>
+              </a:defRPr>
+            </a:pPr>
+            <a:r>
+              <a:t>16</a:t>
             </a:r>
           </a:p>
         </p:txBody>
@@ -9435,7 +9798,7 @@
             <a:avLst/>
           </a:prstGeom>
           <a:solidFill>
-            <a:srgbClr val="EFF5F7"/>
+            <a:srgbClr val="F5F0EA"/>
           </a:solidFill>
           <a:ln>
             <a:noFill/>
@@ -9491,7 +9854,7 @@
               </a:spcAft>
               <a:defRPr sz="2200" b="1">
                 <a:solidFill>
-                  <a:srgbClr val="007F80"/>
+                  <a:srgbClr val="4A6650"/>
                 </a:solidFill>
                 <a:latin typeface="Arial"/>
               </a:defRPr>
@@ -9530,7 +9893,7 @@
               </a:spcAft>
               <a:defRPr sz="2100" b="0">
                 <a:solidFill>
-                  <a:srgbClr val="24394B"/>
+                  <a:srgbClr val="2A2E2A"/>
                 </a:solidFill>
                 <a:latin typeface="Arial"/>
               </a:defRPr>
@@ -9546,7 +9909,7 @@
               </a:spcAft>
               <a:defRPr sz="2100" b="0">
                 <a:solidFill>
-                  <a:srgbClr val="24394B"/>
+                  <a:srgbClr val="2A2E2A"/>
                 </a:solidFill>
                 <a:latin typeface="Arial"/>
               </a:defRPr>
@@ -9562,7 +9925,7 @@
               </a:spcAft>
               <a:defRPr sz="2100" b="0">
                 <a:solidFill>
-                  <a:srgbClr val="24394B"/>
+                  <a:srgbClr val="2A2E2A"/>
                 </a:solidFill>
                 <a:latin typeface="Arial"/>
               </a:defRPr>
@@ -9588,7 +9951,7 @@
             <a:avLst/>
           </a:prstGeom>
           <a:solidFill>
-            <a:srgbClr val="EFF5F7"/>
+            <a:srgbClr val="F5F0EA"/>
           </a:solidFill>
           <a:ln>
             <a:noFill/>
@@ -9644,7 +10007,7 @@
               </a:spcAft>
               <a:defRPr sz="2200" b="1">
                 <a:solidFill>
-                  <a:srgbClr val="007F80"/>
+                  <a:srgbClr val="4A6650"/>
                 </a:solidFill>
                 <a:latin typeface="Arial"/>
               </a:defRPr>
@@ -9683,7 +10046,7 @@
               </a:spcAft>
               <a:defRPr sz="2100" b="0">
                 <a:solidFill>
-                  <a:srgbClr val="24394B"/>
+                  <a:srgbClr val="2A2E2A"/>
                 </a:solidFill>
                 <a:latin typeface="Arial"/>
               </a:defRPr>
@@ -9699,7 +10062,7 @@
               </a:spcAft>
               <a:defRPr sz="2100" b="0">
                 <a:solidFill>
-                  <a:srgbClr val="24394B"/>
+                  <a:srgbClr val="2A2E2A"/>
                 </a:solidFill>
                 <a:latin typeface="Arial"/>
               </a:defRPr>
@@ -9715,7 +10078,7 @@
               </a:spcAft>
               <a:defRPr sz="2100" b="0">
                 <a:solidFill>
-                  <a:srgbClr val="24394B"/>
+                  <a:srgbClr val="2A2E2A"/>
                 </a:solidFill>
                 <a:latin typeface="Arial"/>
               </a:defRPr>
@@ -9726,6 +10089,36 @@
           </a:p>
         </p:txBody>
       </p:sp>
+      <p:pic>
+        <p:nvPicPr>
+          <p:cNvPr id="16" name="PRomop logo" descr="PRomop logo"/>
+          <p:cNvPicPr>
+            <a:picLocks noChangeAspect="1"/>
+          </p:cNvPicPr>
+          <p:nvPr/>
+        </p:nvPicPr>
+        <p:blipFill>
+          <a:blip r:embed="rId5">
+            <a:extLst>
+              <a:ext uri="{96DAC541-7B7A-43D3-8B79-37D633B846F1}">
+                <ns0:svgBlip xmlns:ns0="http://schemas.microsoft.com/office/drawing/2016/SVG/main" r:embed="rId6"/>
+              </a:ext>
+            </a:extLst>
+          </a:blip>
+          <a:stretch>
+            <a:fillRect/>
+          </a:stretch>
+        </p:blipFill>
+        <p:spPr>
+          <a:xfrm>
+            <a:off x="10917936" y="201168"/>
+            <a:ext cx="640080" cy="585919"/>
+          </a:xfrm>
+          <a:prstGeom prst="rect">
+            <a:avLst/>
+          </a:prstGeom>
+        </p:spPr>
+      </p:pic>
     </p:spTree>
   </p:cSld>
   <p:clrMapOvr>
@@ -9767,7 +10160,7 @@
             <a:avLst/>
           </a:prstGeom>
           <a:solidFill>
-            <a:srgbClr val="007F80"/>
+            <a:srgbClr val="4A6650"/>
           </a:solidFill>
           <a:ln>
             <a:noFill/>
@@ -9804,7 +10197,7 @@
         <p:spPr>
           <a:xfrm>
             <a:off x="594360" y="274320"/>
-            <a:ext cx="10972800" cy="274320"/>
+            <a:ext cx="9601200" cy="274320"/>
           </a:xfrm>
           <a:prstGeom prst="rect">
             <a:avLst/>
@@ -9823,7 +10216,7 @@
               </a:spcAft>
               <a:defRPr sz="1100" b="1">
                 <a:solidFill>
-                  <a:srgbClr val="007F80"/>
+                  <a:srgbClr val="4A6650"/>
                 </a:solidFill>
                 <a:latin typeface="Arial"/>
               </a:defRPr>
@@ -9862,7 +10255,7 @@
               </a:spcAft>
               <a:defRPr sz="3100" b="1">
                 <a:solidFill>
-                  <a:srgbClr val="142C43"/>
+                  <a:srgbClr val="2A2E2A"/>
                 </a:solidFill>
                 <a:latin typeface="Arial"/>
               </a:defRPr>
@@ -9888,7 +10281,7 @@
             <a:avLst/>
           </a:prstGeom>
           <a:solidFill>
-            <a:srgbClr val="D7E1E7"/>
+            <a:srgbClr val="C9BFB0"/>
           </a:solidFill>
           <a:ln>
             <a:noFill/>
@@ -9944,7 +10337,7 @@
               </a:spcAft>
               <a:defRPr sz="1000" b="0">
                 <a:solidFill>
-                  <a:srgbClr val="52677A"/>
+                  <a:srgbClr val="656B63"/>
                 </a:solidFill>
                 <a:latin typeface="Arial"/>
               </a:defRPr>
@@ -9983,7 +10376,7 @@
               </a:spcAft>
               <a:defRPr sz="1000" b="0">
                 <a:solidFill>
-                  <a:srgbClr val="007F80"/>
+                  <a:srgbClr val="4A6650"/>
                 </a:solidFill>
                 <a:latin typeface="Arial"/>
               </a:defRPr>
@@ -10025,7 +10418,7 @@
               </a:spcAft>
               <a:defRPr sz="1000" b="0">
                 <a:solidFill>
-                  <a:srgbClr val="007F80"/>
+                  <a:srgbClr val="4A6650"/>
                 </a:solidFill>
                 <a:latin typeface="Arial"/>
               </a:defRPr>
@@ -10067,13 +10460,13 @@
               </a:spcAft>
               <a:defRPr sz="1000" b="0">
                 <a:solidFill>
-                  <a:srgbClr val="52677A"/>
-                </a:solidFill>
-                <a:latin typeface="Arial"/>
-              </a:defRPr>
-            </a:pPr>
-            <a:r>
-              <a:t>15</a:t>
+                  <a:srgbClr val="656B63"/>
+                </a:solidFill>
+                <a:latin typeface="Arial"/>
+              </a:defRPr>
+            </a:pPr>
+            <a:r>
+              <a:t>17</a:t>
             </a:r>
           </a:p>
         </p:txBody>
@@ -10093,7 +10486,7 @@
             <a:avLst/>
           </a:prstGeom>
           <a:solidFill>
-            <a:srgbClr val="142C43"/>
+            <a:srgbClr val="2A2E2A"/>
           </a:solidFill>
           <a:ln>
             <a:noFill/>
@@ -10377,7 +10770,7 @@
               </a:spcAft>
               <a:defRPr sz="2200" b="1">
                 <a:solidFill>
-                  <a:srgbClr val="007F80"/>
+                  <a:srgbClr val="4A6650"/>
                 </a:solidFill>
                 <a:latin typeface="Arial"/>
               </a:defRPr>
@@ -10416,7 +10809,7 @@
               </a:spcAft>
               <a:defRPr sz="2000" b="0">
                 <a:solidFill>
-                  <a:srgbClr val="24394B"/>
+                  <a:srgbClr val="2A2E2A"/>
                 </a:solidFill>
                 <a:latin typeface="Arial"/>
               </a:defRPr>
@@ -10432,7 +10825,7 @@
               </a:spcAft>
               <a:defRPr sz="2000" b="0">
                 <a:solidFill>
-                  <a:srgbClr val="24394B"/>
+                  <a:srgbClr val="2A2E2A"/>
                 </a:solidFill>
                 <a:latin typeface="Arial"/>
               </a:defRPr>
@@ -10448,7 +10841,7 @@
               </a:spcAft>
               <a:defRPr sz="2000" b="0">
                 <a:solidFill>
-                  <a:srgbClr val="24394B"/>
+                  <a:srgbClr val="2A2E2A"/>
                 </a:solidFill>
                 <a:latin typeface="Arial"/>
               </a:defRPr>
@@ -10459,6 +10852,36 @@
           </a:p>
         </p:txBody>
       </p:sp>
+      <p:pic>
+        <p:nvPicPr>
+          <p:cNvPr id="14" name="PRomop logo" descr="PRomop logo"/>
+          <p:cNvPicPr>
+            <a:picLocks noChangeAspect="1"/>
+          </p:cNvPicPr>
+          <p:nvPr/>
+        </p:nvPicPr>
+        <p:blipFill>
+          <a:blip r:embed="rId5">
+            <a:extLst>
+              <a:ext uri="{96DAC541-7B7A-43D3-8B79-37D633B846F1}">
+                <ns0:svgBlip xmlns:ns0="http://schemas.microsoft.com/office/drawing/2016/SVG/main" r:embed="rId6"/>
+              </a:ext>
+            </a:extLst>
+          </a:blip>
+          <a:stretch>
+            <a:fillRect/>
+          </a:stretch>
+        </p:blipFill>
+        <p:spPr>
+          <a:xfrm>
+            <a:off x="10917936" y="201168"/>
+            <a:ext cx="640080" cy="585919"/>
+          </a:xfrm>
+          <a:prstGeom prst="rect">
+            <a:avLst/>
+          </a:prstGeom>
+        </p:spPr>
+      </p:pic>
     </p:spTree>
   </p:cSld>
   <p:clrMapOvr>
@@ -10500,7 +10923,7 @@
             <a:avLst/>
           </a:prstGeom>
           <a:solidFill>
-            <a:srgbClr val="007F80"/>
+            <a:srgbClr val="4A6650"/>
           </a:solidFill>
           <a:ln>
             <a:noFill/>
@@ -10537,7 +10960,7 @@
         <p:spPr>
           <a:xfrm>
             <a:off x="594360" y="274320"/>
-            <a:ext cx="10972800" cy="274320"/>
+            <a:ext cx="9601200" cy="274320"/>
           </a:xfrm>
           <a:prstGeom prst="rect">
             <a:avLst/>
@@ -10556,7 +10979,7 @@
               </a:spcAft>
               <a:defRPr sz="1100" b="1">
                 <a:solidFill>
-                  <a:srgbClr val="007F80"/>
+                  <a:srgbClr val="4A6650"/>
                 </a:solidFill>
                 <a:latin typeface="Arial"/>
               </a:defRPr>
@@ -10595,7 +11018,7 @@
               </a:spcAft>
               <a:defRPr sz="3100" b="1">
                 <a:solidFill>
-                  <a:srgbClr val="142C43"/>
+                  <a:srgbClr val="2A2E2A"/>
                 </a:solidFill>
                 <a:latin typeface="Arial"/>
               </a:defRPr>
@@ -10621,7 +11044,7 @@
             <a:avLst/>
           </a:prstGeom>
           <a:solidFill>
-            <a:srgbClr val="D7E1E7"/>
+            <a:srgbClr val="C9BFB0"/>
           </a:solidFill>
           <a:ln>
             <a:noFill/>
@@ -10677,7 +11100,7 @@
               </a:spcAft>
               <a:defRPr sz="1000" b="0">
                 <a:solidFill>
-                  <a:srgbClr val="52677A"/>
+                  <a:srgbClr val="656B63"/>
                 </a:solidFill>
                 <a:latin typeface="Arial"/>
               </a:defRPr>
@@ -10716,7 +11139,7 @@
               </a:spcAft>
               <a:defRPr sz="1000" b="0">
                 <a:solidFill>
-                  <a:srgbClr val="007F80"/>
+                  <a:srgbClr val="4A6650"/>
                 </a:solidFill>
                 <a:latin typeface="Arial"/>
               </a:defRPr>
@@ -10758,13 +11181,13 @@
               </a:spcAft>
               <a:defRPr sz="1000" b="0">
                 <a:solidFill>
-                  <a:srgbClr val="52677A"/>
-                </a:solidFill>
-                <a:latin typeface="Arial"/>
-              </a:defRPr>
-            </a:pPr>
-            <a:r>
-              <a:t>16</a:t>
+                  <a:srgbClr val="656B63"/>
+                </a:solidFill>
+                <a:latin typeface="Arial"/>
+              </a:defRPr>
+            </a:pPr>
+            <a:r>
+              <a:t>18</a:t>
             </a:r>
           </a:p>
         </p:txBody>
@@ -10784,7 +11207,7 @@
             <a:avLst/>
           </a:prstGeom>
           <a:solidFill>
-            <a:srgbClr val="142C43"/>
+            <a:srgbClr val="2A2E2A"/>
           </a:solidFill>
           <a:ln>
             <a:noFill/>
@@ -11020,7 +11443,7 @@
               </a:spcAft>
               <a:defRPr sz="2200" b="1">
                 <a:solidFill>
-                  <a:srgbClr val="007F80"/>
+                  <a:srgbClr val="4A6650"/>
                 </a:solidFill>
                 <a:latin typeface="Arial"/>
               </a:defRPr>
@@ -11059,7 +11482,7 @@
               </a:spcAft>
               <a:defRPr sz="2000" b="0">
                 <a:solidFill>
-                  <a:srgbClr val="24394B"/>
+                  <a:srgbClr val="2A2E2A"/>
                 </a:solidFill>
                 <a:latin typeface="Arial"/>
               </a:defRPr>
@@ -11075,7 +11498,7 @@
               </a:spcAft>
               <a:defRPr sz="2000" b="0">
                 <a:solidFill>
-                  <a:srgbClr val="24394B"/>
+                  <a:srgbClr val="2A2E2A"/>
                 </a:solidFill>
                 <a:latin typeface="Arial"/>
               </a:defRPr>
@@ -11091,7 +11514,7 @@
               </a:spcAft>
               <a:defRPr sz="2000" b="0">
                 <a:solidFill>
-                  <a:srgbClr val="24394B"/>
+                  <a:srgbClr val="2A2E2A"/>
                 </a:solidFill>
                 <a:latin typeface="Arial"/>
               </a:defRPr>
@@ -11102,6 +11525,36 @@
           </a:p>
         </p:txBody>
       </p:sp>
+      <p:pic>
+        <p:nvPicPr>
+          <p:cNvPr id="13" name="PRomop logo" descr="PRomop logo"/>
+          <p:cNvPicPr>
+            <a:picLocks noChangeAspect="1"/>
+          </p:cNvPicPr>
+          <p:nvPr/>
+        </p:nvPicPr>
+        <p:blipFill>
+          <a:blip r:embed="rId4">
+            <a:extLst>
+              <a:ext uri="{96DAC541-7B7A-43D3-8B79-37D633B846F1}">
+                <ns0:svgBlip xmlns:ns0="http://schemas.microsoft.com/office/drawing/2016/SVG/main" r:embed="rId5"/>
+              </a:ext>
+            </a:extLst>
+          </a:blip>
+          <a:stretch>
+            <a:fillRect/>
+          </a:stretch>
+        </p:blipFill>
+        <p:spPr>
+          <a:xfrm>
+            <a:off x="10917936" y="201168"/>
+            <a:ext cx="640080" cy="585919"/>
+          </a:xfrm>
+          <a:prstGeom prst="rect">
+            <a:avLst/>
+          </a:prstGeom>
+        </p:spPr>
+      </p:pic>
     </p:spTree>
   </p:cSld>
   <p:clrMapOvr>
@@ -11143,7 +11596,7 @@
             <a:avLst/>
           </a:prstGeom>
           <a:solidFill>
-            <a:srgbClr val="007F80"/>
+            <a:srgbClr val="4A6650"/>
           </a:solidFill>
           <a:ln>
             <a:noFill/>
@@ -11180,7 +11633,7 @@
         <p:spPr>
           <a:xfrm>
             <a:off x="594360" y="274320"/>
-            <a:ext cx="10972800" cy="274320"/>
+            <a:ext cx="9601200" cy="274320"/>
           </a:xfrm>
           <a:prstGeom prst="rect">
             <a:avLst/>
@@ -11199,7 +11652,7 @@
               </a:spcAft>
               <a:defRPr sz="1100" b="1">
                 <a:solidFill>
-                  <a:srgbClr val="007F80"/>
+                  <a:srgbClr val="4A6650"/>
                 </a:solidFill>
                 <a:latin typeface="Arial"/>
               </a:defRPr>
@@ -11238,7 +11691,7 @@
               </a:spcAft>
               <a:defRPr sz="3100" b="1">
                 <a:solidFill>
-                  <a:srgbClr val="142C43"/>
+                  <a:srgbClr val="2A2E2A"/>
                 </a:solidFill>
                 <a:latin typeface="Arial"/>
               </a:defRPr>
@@ -11264,7 +11717,7 @@
             <a:avLst/>
           </a:prstGeom>
           <a:solidFill>
-            <a:srgbClr val="D7E1E7"/>
+            <a:srgbClr val="C9BFB0"/>
           </a:solidFill>
           <a:ln>
             <a:noFill/>
@@ -11320,7 +11773,7 @@
               </a:spcAft>
               <a:defRPr sz="1000" b="0">
                 <a:solidFill>
-                  <a:srgbClr val="52677A"/>
+                  <a:srgbClr val="656B63"/>
                 </a:solidFill>
                 <a:latin typeface="Arial"/>
               </a:defRPr>
@@ -11359,7 +11812,7 @@
               </a:spcAft>
               <a:defRPr sz="1000" b="0">
                 <a:solidFill>
-                  <a:srgbClr val="007F80"/>
+                  <a:srgbClr val="4A6650"/>
                 </a:solidFill>
                 <a:latin typeface="Arial"/>
               </a:defRPr>
@@ -11401,7 +11854,7 @@
               </a:spcAft>
               <a:defRPr sz="1000" b="0">
                 <a:solidFill>
-                  <a:srgbClr val="007F80"/>
+                  <a:srgbClr val="4A6650"/>
                 </a:solidFill>
                 <a:latin typeface="Arial"/>
               </a:defRPr>
@@ -11443,13 +11896,13 @@
               </a:spcAft>
               <a:defRPr sz="1000" b="0">
                 <a:solidFill>
-                  <a:srgbClr val="52677A"/>
-                </a:solidFill>
-                <a:latin typeface="Arial"/>
-              </a:defRPr>
-            </a:pPr>
-            <a:r>
-              <a:t>17</a:t>
+                  <a:srgbClr val="656B63"/>
+                </a:solidFill>
+                <a:latin typeface="Arial"/>
+              </a:defRPr>
+            </a:pPr>
+            <a:r>
+              <a:t>19</a:t>
             </a:r>
           </a:p>
         </p:txBody>
@@ -11469,7 +11922,7 @@
             <a:avLst/>
           </a:prstGeom>
           <a:solidFill>
-            <a:srgbClr val="EFF5F7"/>
+            <a:srgbClr val="F5F0EA"/>
           </a:solidFill>
           <a:ln>
             <a:noFill/>
@@ -11525,7 +11978,7 @@
               </a:spcAft>
               <a:defRPr sz="2200" b="1">
                 <a:solidFill>
-                  <a:srgbClr val="007F80"/>
+                  <a:srgbClr val="4A6650"/>
                 </a:solidFill>
                 <a:latin typeface="Arial"/>
               </a:defRPr>
@@ -11564,7 +12017,7 @@
               </a:spcAft>
               <a:defRPr sz="2100" b="0">
                 <a:solidFill>
-                  <a:srgbClr val="24394B"/>
+                  <a:srgbClr val="2A2E2A"/>
                 </a:solidFill>
                 <a:latin typeface="Arial"/>
               </a:defRPr>
@@ -11580,7 +12033,7 @@
               </a:spcAft>
               <a:defRPr sz="2100" b="0">
                 <a:solidFill>
-                  <a:srgbClr val="24394B"/>
+                  <a:srgbClr val="2A2E2A"/>
                 </a:solidFill>
                 <a:latin typeface="Arial"/>
               </a:defRPr>
@@ -11596,7 +12049,7 @@
               </a:spcAft>
               <a:defRPr sz="2100" b="0">
                 <a:solidFill>
-                  <a:srgbClr val="24394B"/>
+                  <a:srgbClr val="2A2E2A"/>
                 </a:solidFill>
                 <a:latin typeface="Arial"/>
               </a:defRPr>
@@ -11622,7 +12075,7 @@
             <a:avLst/>
           </a:prstGeom>
           <a:solidFill>
-            <a:srgbClr val="EFF5F7"/>
+            <a:srgbClr val="F5F0EA"/>
           </a:solidFill>
           <a:ln>
             <a:noFill/>
@@ -11678,7 +12131,7 @@
               </a:spcAft>
               <a:defRPr sz="2200" b="1">
                 <a:solidFill>
-                  <a:srgbClr val="007F80"/>
+                  <a:srgbClr val="4A6650"/>
                 </a:solidFill>
                 <a:latin typeface="Arial"/>
               </a:defRPr>
@@ -11717,7 +12170,7 @@
               </a:spcAft>
               <a:defRPr sz="2100" b="0">
                 <a:solidFill>
-                  <a:srgbClr val="24394B"/>
+                  <a:srgbClr val="2A2E2A"/>
                 </a:solidFill>
                 <a:latin typeface="Arial"/>
               </a:defRPr>
@@ -11733,7 +12186,7 @@
               </a:spcAft>
               <a:defRPr sz="2100" b="0">
                 <a:solidFill>
-                  <a:srgbClr val="24394B"/>
+                  <a:srgbClr val="2A2E2A"/>
                 </a:solidFill>
                 <a:latin typeface="Arial"/>
               </a:defRPr>
@@ -11749,7 +12202,7 @@
               </a:spcAft>
               <a:defRPr sz="2100" b="0">
                 <a:solidFill>
-                  <a:srgbClr val="24394B"/>
+                  <a:srgbClr val="2A2E2A"/>
                 </a:solidFill>
                 <a:latin typeface="Arial"/>
               </a:defRPr>
@@ -11760,6 +12213,36 @@
           </a:p>
         </p:txBody>
       </p:sp>
+      <p:pic>
+        <p:nvPicPr>
+          <p:cNvPr id="16" name="PRomop logo" descr="PRomop logo"/>
+          <p:cNvPicPr>
+            <a:picLocks noChangeAspect="1"/>
+          </p:cNvPicPr>
+          <p:nvPr/>
+        </p:nvPicPr>
+        <p:blipFill>
+          <a:blip r:embed="rId5">
+            <a:extLst>
+              <a:ext uri="{96DAC541-7B7A-43D3-8B79-37D633B846F1}">
+                <ns0:svgBlip xmlns:ns0="http://schemas.microsoft.com/office/drawing/2016/SVG/main" r:embed="rId6"/>
+              </a:ext>
+            </a:extLst>
+          </a:blip>
+          <a:stretch>
+            <a:fillRect/>
+          </a:stretch>
+        </p:blipFill>
+        <p:spPr>
+          <a:xfrm>
+            <a:off x="10917936" y="201168"/>
+            <a:ext cx="640080" cy="585919"/>
+          </a:xfrm>
+          <a:prstGeom prst="rect">
+            <a:avLst/>
+          </a:prstGeom>
+        </p:spPr>
+      </p:pic>
     </p:spTree>
   </p:cSld>
   <p:clrMapOvr>
@@ -11801,7 +12284,7 @@
             <a:avLst/>
           </a:prstGeom>
           <a:solidFill>
-            <a:srgbClr val="007F80"/>
+            <a:srgbClr val="4A6650"/>
           </a:solidFill>
           <a:ln>
             <a:noFill/>
@@ -11838,7 +12321,7 @@
         <p:spPr>
           <a:xfrm>
             <a:off x="594360" y="274320"/>
-            <a:ext cx="10972800" cy="274320"/>
+            <a:ext cx="9601200" cy="274320"/>
           </a:xfrm>
           <a:prstGeom prst="rect">
             <a:avLst/>
@@ -11857,7 +12340,7 @@
               </a:spcAft>
               <a:defRPr sz="1100" b="1">
                 <a:solidFill>
-                  <a:srgbClr val="007F80"/>
+                  <a:srgbClr val="4A6650"/>
                 </a:solidFill>
                 <a:latin typeface="Arial"/>
               </a:defRPr>
@@ -11896,7 +12379,7 @@
               </a:spcAft>
               <a:defRPr sz="3100" b="1">
                 <a:solidFill>
-                  <a:srgbClr val="142C43"/>
+                  <a:srgbClr val="2A2E2A"/>
                 </a:solidFill>
                 <a:latin typeface="Arial"/>
               </a:defRPr>
@@ -11922,7 +12405,7 @@
             <a:avLst/>
           </a:prstGeom>
           <a:solidFill>
-            <a:srgbClr val="D7E1E7"/>
+            <a:srgbClr val="C9BFB0"/>
           </a:solidFill>
           <a:ln>
             <a:noFill/>
@@ -11978,7 +12461,7 @@
               </a:spcAft>
               <a:defRPr sz="1000" b="0">
                 <a:solidFill>
-                  <a:srgbClr val="52677A"/>
+                  <a:srgbClr val="656B63"/>
                 </a:solidFill>
                 <a:latin typeface="Arial"/>
               </a:defRPr>
@@ -12017,7 +12500,7 @@
               </a:spcAft>
               <a:defRPr sz="1000" b="0">
                 <a:solidFill>
-                  <a:srgbClr val="007F80"/>
+                  <a:srgbClr val="4A6650"/>
                 </a:solidFill>
                 <a:latin typeface="Arial"/>
               </a:defRPr>
@@ -12059,7 +12542,7 @@
               </a:spcAft>
               <a:defRPr sz="1000" b="0">
                 <a:solidFill>
-                  <a:srgbClr val="007F80"/>
+                  <a:srgbClr val="4A6650"/>
                 </a:solidFill>
                 <a:latin typeface="Arial"/>
               </a:defRPr>
@@ -12101,13 +12584,13 @@
               </a:spcAft>
               <a:defRPr sz="1000" b="0">
                 <a:solidFill>
-                  <a:srgbClr val="52677A"/>
-                </a:solidFill>
-                <a:latin typeface="Arial"/>
-              </a:defRPr>
-            </a:pPr>
-            <a:r>
-              <a:t>18</a:t>
+                  <a:srgbClr val="656B63"/>
+                </a:solidFill>
+                <a:latin typeface="Arial"/>
+              </a:defRPr>
+            </a:pPr>
+            <a:r>
+              <a:t>20</a:t>
             </a:r>
           </a:p>
         </p:txBody>
@@ -12127,7 +12610,7 @@
             <a:avLst/>
           </a:prstGeom>
           <a:solidFill>
-            <a:srgbClr val="EFF5F7"/>
+            <a:srgbClr val="F5F0EA"/>
           </a:solidFill>
           <a:ln>
             <a:noFill/>
@@ -12183,7 +12666,7 @@
               </a:spcAft>
               <a:defRPr sz="1900" b="1">
                 <a:solidFill>
-                  <a:srgbClr val="007F80"/>
+                  <a:srgbClr val="4A6650"/>
                 </a:solidFill>
                 <a:latin typeface="Arial"/>
               </a:defRPr>
@@ -12222,7 +12705,7 @@
               </a:spcAft>
               <a:defRPr sz="1900" b="0">
                 <a:solidFill>
-                  <a:srgbClr val="24394B"/>
+                  <a:srgbClr val="2A2E2A"/>
                 </a:solidFill>
                 <a:latin typeface="Arial"/>
               </a:defRPr>
@@ -12304,7 +12787,7 @@
               </a:spcAft>
               <a:defRPr sz="1900" b="1">
                 <a:solidFill>
-                  <a:srgbClr val="007F80"/>
+                  <a:srgbClr val="4A6650"/>
                 </a:solidFill>
                 <a:latin typeface="Arial"/>
               </a:defRPr>
@@ -12343,7 +12826,7 @@
               </a:spcAft>
               <a:defRPr sz="1900" b="0">
                 <a:solidFill>
-                  <a:srgbClr val="24394B"/>
+                  <a:srgbClr val="2A2E2A"/>
                 </a:solidFill>
                 <a:latin typeface="Arial"/>
               </a:defRPr>
@@ -12369,7 +12852,7 @@
             <a:avLst/>
           </a:prstGeom>
           <a:solidFill>
-            <a:srgbClr val="EFF5F7"/>
+            <a:srgbClr val="F5F0EA"/>
           </a:solidFill>
           <a:ln>
             <a:noFill/>
@@ -12425,7 +12908,7 @@
               </a:spcAft>
               <a:defRPr sz="1900" b="1">
                 <a:solidFill>
-                  <a:srgbClr val="007F80"/>
+                  <a:srgbClr val="4A6650"/>
                 </a:solidFill>
                 <a:latin typeface="Arial"/>
               </a:defRPr>
@@ -12464,7 +12947,7 @@
               </a:spcAft>
               <a:defRPr sz="1900" b="0">
                 <a:solidFill>
-                  <a:srgbClr val="24394B"/>
+                  <a:srgbClr val="2A2E2A"/>
                 </a:solidFill>
                 <a:latin typeface="Arial"/>
               </a:defRPr>
@@ -12546,7 +13029,7 @@
               </a:spcAft>
               <a:defRPr sz="1900" b="1">
                 <a:solidFill>
-                  <a:srgbClr val="007F80"/>
+                  <a:srgbClr val="4A6650"/>
                 </a:solidFill>
                 <a:latin typeface="Arial"/>
               </a:defRPr>
@@ -12585,7 +13068,7 @@
               </a:spcAft>
               <a:defRPr sz="1900" b="0">
                 <a:solidFill>
-                  <a:srgbClr val="24394B"/>
+                  <a:srgbClr val="2A2E2A"/>
                 </a:solidFill>
                 <a:latin typeface="Arial"/>
               </a:defRPr>
@@ -12611,7 +13094,7 @@
             <a:avLst/>
           </a:prstGeom>
           <a:solidFill>
-            <a:srgbClr val="EFF5F7"/>
+            <a:srgbClr val="F5F0EA"/>
           </a:solidFill>
           <a:ln>
             <a:noFill/>
@@ -12667,7 +13150,7 @@
               </a:spcAft>
               <a:defRPr sz="1900" b="1">
                 <a:solidFill>
-                  <a:srgbClr val="007F80"/>
+                  <a:srgbClr val="4A6650"/>
                 </a:solidFill>
                 <a:latin typeface="Arial"/>
               </a:defRPr>
@@ -12706,7 +13189,7 @@
               </a:spcAft>
               <a:defRPr sz="1900" b="0">
                 <a:solidFill>
-                  <a:srgbClr val="24394B"/>
+                  <a:srgbClr val="2A2E2A"/>
                 </a:solidFill>
                 <a:latin typeface="Arial"/>
               </a:defRPr>
@@ -12717,6 +13200,36 @@
           </a:p>
         </p:txBody>
       </p:sp>
+      <p:pic>
+        <p:nvPicPr>
+          <p:cNvPr id="25" name="PRomop logo" descr="PRomop logo"/>
+          <p:cNvPicPr>
+            <a:picLocks noChangeAspect="1"/>
+          </p:cNvPicPr>
+          <p:nvPr/>
+        </p:nvPicPr>
+        <p:blipFill>
+          <a:blip r:embed="rId5">
+            <a:extLst>
+              <a:ext uri="{96DAC541-7B7A-43D3-8B79-37D633B846F1}">
+                <ns0:svgBlip xmlns:ns0="http://schemas.microsoft.com/office/drawing/2016/SVG/main" r:embed="rId6"/>
+              </a:ext>
+            </a:extLst>
+          </a:blip>
+          <a:stretch>
+            <a:fillRect/>
+          </a:stretch>
+        </p:blipFill>
+        <p:spPr>
+          <a:xfrm>
+            <a:off x="10917936" y="201168"/>
+            <a:ext cx="640080" cy="585919"/>
+          </a:xfrm>
+          <a:prstGeom prst="rect">
+            <a:avLst/>
+          </a:prstGeom>
+        </p:spPr>
+      </p:pic>
     </p:spTree>
   </p:cSld>
   <p:clrMapOvr>
@@ -12758,7 +13271,7 @@
             <a:avLst/>
           </a:prstGeom>
           <a:solidFill>
-            <a:srgbClr val="007F80"/>
+            <a:srgbClr val="4A6650"/>
           </a:solidFill>
           <a:ln>
             <a:noFill/>
@@ -12795,7 +13308,7 @@
         <p:spPr>
           <a:xfrm>
             <a:off x="594360" y="274320"/>
-            <a:ext cx="10972800" cy="274320"/>
+            <a:ext cx="9601200" cy="274320"/>
           </a:xfrm>
           <a:prstGeom prst="rect">
             <a:avLst/>
@@ -12814,7 +13327,7 @@
               </a:spcAft>
               <a:defRPr sz="1100" b="1">
                 <a:solidFill>
-                  <a:srgbClr val="007F80"/>
+                  <a:srgbClr val="4A6650"/>
                 </a:solidFill>
                 <a:latin typeface="Arial"/>
               </a:defRPr>
@@ -12853,7 +13366,7 @@
               </a:spcAft>
               <a:defRPr sz="3100" b="1">
                 <a:solidFill>
-                  <a:srgbClr val="142C43"/>
+                  <a:srgbClr val="2A2E2A"/>
                 </a:solidFill>
                 <a:latin typeface="Arial"/>
               </a:defRPr>
@@ -12879,7 +13392,7 @@
             <a:avLst/>
           </a:prstGeom>
           <a:solidFill>
-            <a:srgbClr val="D7E1E7"/>
+            <a:srgbClr val="C9BFB0"/>
           </a:solidFill>
           <a:ln>
             <a:noFill/>
@@ -12935,7 +13448,7 @@
               </a:spcAft>
               <a:defRPr sz="1000" b="0">
                 <a:solidFill>
-                  <a:srgbClr val="52677A"/>
+                  <a:srgbClr val="656B63"/>
                 </a:solidFill>
                 <a:latin typeface="Arial"/>
               </a:defRPr>
@@ -12974,7 +13487,7 @@
               </a:spcAft>
               <a:defRPr sz="1000" b="0">
                 <a:solidFill>
-                  <a:srgbClr val="007F80"/>
+                  <a:srgbClr val="4A6650"/>
                 </a:solidFill>
                 <a:latin typeface="Arial"/>
               </a:defRPr>
@@ -13016,7 +13529,7 @@
               </a:spcAft>
               <a:defRPr sz="1000" b="0">
                 <a:solidFill>
-                  <a:srgbClr val="007F80"/>
+                  <a:srgbClr val="4A6650"/>
                 </a:solidFill>
                 <a:latin typeface="Arial"/>
               </a:defRPr>
@@ -13058,13 +13571,13 @@
               </a:spcAft>
               <a:defRPr sz="1000" b="0">
                 <a:solidFill>
-                  <a:srgbClr val="52677A"/>
-                </a:solidFill>
-                <a:latin typeface="Arial"/>
-              </a:defRPr>
-            </a:pPr>
-            <a:r>
-              <a:t>19</a:t>
+                  <a:srgbClr val="656B63"/>
+                </a:solidFill>
+                <a:latin typeface="Arial"/>
+              </a:defRPr>
+            </a:pPr>
+            <a:r>
+              <a:t>21</a:t>
             </a:r>
           </a:p>
         </p:txBody>
@@ -13084,7 +13597,7 @@
             <a:avLst/>
           </a:prstGeom>
           <a:solidFill>
-            <a:srgbClr val="EFF5F7"/>
+            <a:srgbClr val="F5F0EA"/>
           </a:solidFill>
           <a:ln>
             <a:noFill/>
@@ -13140,7 +13653,7 @@
               </a:spcAft>
               <a:defRPr sz="2200" b="1">
                 <a:solidFill>
-                  <a:srgbClr val="007F80"/>
+                  <a:srgbClr val="4A6650"/>
                 </a:solidFill>
                 <a:latin typeface="Arial"/>
               </a:defRPr>
@@ -13179,7 +13692,7 @@
               </a:spcAft>
               <a:defRPr sz="2100" b="0">
                 <a:solidFill>
-                  <a:srgbClr val="24394B"/>
+                  <a:srgbClr val="2A2E2A"/>
                 </a:solidFill>
                 <a:latin typeface="Arial"/>
               </a:defRPr>
@@ -13195,7 +13708,7 @@
               </a:spcAft>
               <a:defRPr sz="2100" b="0">
                 <a:solidFill>
-                  <a:srgbClr val="24394B"/>
+                  <a:srgbClr val="2A2E2A"/>
                 </a:solidFill>
                 <a:latin typeface="Arial"/>
               </a:defRPr>
@@ -13211,7 +13724,7 @@
               </a:spcAft>
               <a:defRPr sz="2100" b="0">
                 <a:solidFill>
-                  <a:srgbClr val="24394B"/>
+                  <a:srgbClr val="2A2E2A"/>
                 </a:solidFill>
                 <a:latin typeface="Arial"/>
               </a:defRPr>
@@ -13237,7 +13750,7 @@
             <a:avLst/>
           </a:prstGeom>
           <a:solidFill>
-            <a:srgbClr val="EFF5F7"/>
+            <a:srgbClr val="F5F0EA"/>
           </a:solidFill>
           <a:ln>
             <a:noFill/>
@@ -13293,7 +13806,7 @@
               </a:spcAft>
               <a:defRPr sz="2200" b="1">
                 <a:solidFill>
-                  <a:srgbClr val="007F80"/>
+                  <a:srgbClr val="4A6650"/>
                 </a:solidFill>
                 <a:latin typeface="Arial"/>
               </a:defRPr>
@@ -13332,7 +13845,7 @@
               </a:spcAft>
               <a:defRPr sz="2100" b="0">
                 <a:solidFill>
-                  <a:srgbClr val="24394B"/>
+                  <a:srgbClr val="2A2E2A"/>
                 </a:solidFill>
                 <a:latin typeface="Arial"/>
               </a:defRPr>
@@ -13348,7 +13861,7 @@
               </a:spcAft>
               <a:defRPr sz="2100" b="0">
                 <a:solidFill>
-                  <a:srgbClr val="24394B"/>
+                  <a:srgbClr val="2A2E2A"/>
                 </a:solidFill>
                 <a:latin typeface="Arial"/>
               </a:defRPr>
@@ -13364,7 +13877,7 @@
               </a:spcAft>
               <a:defRPr sz="2100" b="0">
                 <a:solidFill>
-                  <a:srgbClr val="24394B"/>
+                  <a:srgbClr val="2A2E2A"/>
                 </a:solidFill>
                 <a:latin typeface="Arial"/>
               </a:defRPr>
@@ -13375,6 +13888,36 @@
           </a:p>
         </p:txBody>
       </p:sp>
+      <p:pic>
+        <p:nvPicPr>
+          <p:cNvPr id="16" name="PRomop logo" descr="PRomop logo"/>
+          <p:cNvPicPr>
+            <a:picLocks noChangeAspect="1"/>
+          </p:cNvPicPr>
+          <p:nvPr/>
+        </p:nvPicPr>
+        <p:blipFill>
+          <a:blip r:embed="rId5">
+            <a:extLst>
+              <a:ext uri="{96DAC541-7B7A-43D3-8B79-37D633B846F1}">
+                <ns0:svgBlip xmlns:ns0="http://schemas.microsoft.com/office/drawing/2016/SVG/main" r:embed="rId6"/>
+              </a:ext>
+            </a:extLst>
+          </a:blip>
+          <a:stretch>
+            <a:fillRect/>
+          </a:stretch>
+        </p:blipFill>
+        <p:spPr>
+          <a:xfrm>
+            <a:off x="10917936" y="201168"/>
+            <a:ext cx="640080" cy="585919"/>
+          </a:xfrm>
+          <a:prstGeom prst="rect">
+            <a:avLst/>
+          </a:prstGeom>
+        </p:spPr>
+      </p:pic>
     </p:spTree>
   </p:cSld>
   <p:clrMapOvr>
@@ -13416,7 +13959,7 @@
             <a:avLst/>
           </a:prstGeom>
           <a:solidFill>
-            <a:srgbClr val="007F80"/>
+            <a:srgbClr val="4A6650"/>
           </a:solidFill>
           <a:ln>
             <a:noFill/>
@@ -13453,7 +13996,7 @@
         <p:spPr>
           <a:xfrm>
             <a:off x="594360" y="274320"/>
-            <a:ext cx="10972800" cy="274320"/>
+            <a:ext cx="9601200" cy="274320"/>
           </a:xfrm>
           <a:prstGeom prst="rect">
             <a:avLst/>
@@ -13472,7 +14015,7 @@
               </a:spcAft>
               <a:defRPr sz="1100" b="1">
                 <a:solidFill>
-                  <a:srgbClr val="007F80"/>
+                  <a:srgbClr val="4A6650"/>
                 </a:solidFill>
                 <a:latin typeface="Arial"/>
               </a:defRPr>
@@ -13511,7 +14054,7 @@
               </a:spcAft>
               <a:defRPr sz="3100" b="1">
                 <a:solidFill>
-                  <a:srgbClr val="142C43"/>
+                  <a:srgbClr val="2A2E2A"/>
                 </a:solidFill>
                 <a:latin typeface="Arial"/>
               </a:defRPr>
@@ -13537,7 +14080,7 @@
             <a:avLst/>
           </a:prstGeom>
           <a:solidFill>
-            <a:srgbClr val="D7E1E7"/>
+            <a:srgbClr val="C9BFB0"/>
           </a:solidFill>
           <a:ln>
             <a:noFill/>
@@ -13593,7 +14136,7 @@
               </a:spcAft>
               <a:defRPr sz="1000" b="0">
                 <a:solidFill>
-                  <a:srgbClr val="52677A"/>
+                  <a:srgbClr val="656B63"/>
                 </a:solidFill>
                 <a:latin typeface="Arial"/>
               </a:defRPr>
@@ -13632,7 +14175,7 @@
               </a:spcAft>
               <a:defRPr sz="1000" b="0">
                 <a:solidFill>
-                  <a:srgbClr val="007F80"/>
+                  <a:srgbClr val="4A6650"/>
                 </a:solidFill>
                 <a:latin typeface="Arial"/>
               </a:defRPr>
@@ -13674,7 +14217,7 @@
               </a:spcAft>
               <a:defRPr sz="1000" b="0">
                 <a:solidFill>
-                  <a:srgbClr val="52677A"/>
+                  <a:srgbClr val="656B63"/>
                 </a:solidFill>
                 <a:latin typeface="Arial"/>
               </a:defRPr>
@@ -13700,7 +14243,7 @@
             <a:avLst/>
           </a:prstGeom>
           <a:solidFill>
-            <a:srgbClr val="EFF5F7"/>
+            <a:srgbClr val="F5F0EA"/>
           </a:solidFill>
           <a:ln>
             <a:noFill/>
@@ -13756,7 +14299,7 @@
               </a:spcAft>
               <a:defRPr sz="2200" b="1">
                 <a:solidFill>
-                  <a:srgbClr val="007F80"/>
+                  <a:srgbClr val="4A6650"/>
                 </a:solidFill>
                 <a:latin typeface="Arial"/>
               </a:defRPr>
@@ -13795,7 +14338,7 @@
               </a:spcAft>
               <a:defRPr sz="2100" b="0">
                 <a:solidFill>
-                  <a:srgbClr val="24394B"/>
+                  <a:srgbClr val="2A2E2A"/>
                 </a:solidFill>
                 <a:latin typeface="Arial"/>
               </a:defRPr>
@@ -13811,7 +14354,7 @@
               </a:spcAft>
               <a:defRPr sz="2100" b="0">
                 <a:solidFill>
-                  <a:srgbClr val="24394B"/>
+                  <a:srgbClr val="2A2E2A"/>
                 </a:solidFill>
                 <a:latin typeface="Arial"/>
               </a:defRPr>
@@ -13827,7 +14370,7 @@
               </a:spcAft>
               <a:defRPr sz="2100" b="0">
                 <a:solidFill>
-                  <a:srgbClr val="24394B"/>
+                  <a:srgbClr val="2A2E2A"/>
                 </a:solidFill>
                 <a:latin typeface="Arial"/>
               </a:defRPr>
@@ -13853,7 +14396,7 @@
             <a:avLst/>
           </a:prstGeom>
           <a:solidFill>
-            <a:srgbClr val="EFF5F7"/>
+            <a:srgbClr val="F5F0EA"/>
           </a:solidFill>
           <a:ln>
             <a:noFill/>
@@ -13909,7 +14452,7 @@
               </a:spcAft>
               <a:defRPr sz="2200" b="1">
                 <a:solidFill>
-                  <a:srgbClr val="007F80"/>
+                  <a:srgbClr val="4A6650"/>
                 </a:solidFill>
                 <a:latin typeface="Arial"/>
               </a:defRPr>
@@ -13948,7 +14491,7 @@
               </a:spcAft>
               <a:defRPr sz="2100" b="0">
                 <a:solidFill>
-                  <a:srgbClr val="24394B"/>
+                  <a:srgbClr val="2A2E2A"/>
                 </a:solidFill>
                 <a:latin typeface="Arial"/>
               </a:defRPr>
@@ -13964,7 +14507,7 @@
               </a:spcAft>
               <a:defRPr sz="2100" b="0">
                 <a:solidFill>
-                  <a:srgbClr val="24394B"/>
+                  <a:srgbClr val="2A2E2A"/>
                 </a:solidFill>
                 <a:latin typeface="Arial"/>
               </a:defRPr>
@@ -13980,7 +14523,7 @@
               </a:spcAft>
               <a:defRPr sz="2100" b="0">
                 <a:solidFill>
-                  <a:srgbClr val="24394B"/>
+                  <a:srgbClr val="2A2E2A"/>
                 </a:solidFill>
                 <a:latin typeface="Arial"/>
               </a:defRPr>
@@ -13991,6 +14534,36 @@
           </a:p>
         </p:txBody>
       </p:sp>
+      <p:pic>
+        <p:nvPicPr>
+          <p:cNvPr id="15" name="PRomop logo" descr="PRomop logo"/>
+          <p:cNvPicPr>
+            <a:picLocks noChangeAspect="1"/>
+          </p:cNvPicPr>
+          <p:nvPr/>
+        </p:nvPicPr>
+        <p:blipFill>
+          <a:blip r:embed="rId4">
+            <a:extLst>
+              <a:ext uri="{96DAC541-7B7A-43D3-8B79-37D633B846F1}">
+                <ns0:svgBlip xmlns:ns0="http://schemas.microsoft.com/office/drawing/2016/SVG/main" r:embed="rId5"/>
+              </a:ext>
+            </a:extLst>
+          </a:blip>
+          <a:stretch>
+            <a:fillRect/>
+          </a:stretch>
+        </p:blipFill>
+        <p:spPr>
+          <a:xfrm>
+            <a:off x="10917936" y="201168"/>
+            <a:ext cx="640080" cy="585919"/>
+          </a:xfrm>
+          <a:prstGeom prst="rect">
+            <a:avLst/>
+          </a:prstGeom>
+        </p:spPr>
+      </p:pic>
     </p:spTree>
   </p:cSld>
   <p:clrMapOvr>
@@ -14032,7 +14605,7 @@
             <a:avLst/>
           </a:prstGeom>
           <a:solidFill>
-            <a:srgbClr val="007F80"/>
+            <a:srgbClr val="4A6650"/>
           </a:solidFill>
           <a:ln>
             <a:noFill/>
@@ -14069,7 +14642,7 @@
         <p:spPr>
           <a:xfrm>
             <a:off x="594360" y="274320"/>
-            <a:ext cx="10972800" cy="274320"/>
+            <a:ext cx="9601200" cy="274320"/>
           </a:xfrm>
           <a:prstGeom prst="rect">
             <a:avLst/>
@@ -14088,7 +14661,7 @@
               </a:spcAft>
               <a:defRPr sz="1100" b="1">
                 <a:solidFill>
-                  <a:srgbClr val="007F80"/>
+                  <a:srgbClr val="4A6650"/>
                 </a:solidFill>
                 <a:latin typeface="Arial"/>
               </a:defRPr>
@@ -14127,7 +14700,7 @@
               </a:spcAft>
               <a:defRPr sz="3100" b="1">
                 <a:solidFill>
-                  <a:srgbClr val="142C43"/>
+                  <a:srgbClr val="2A2E2A"/>
                 </a:solidFill>
                 <a:latin typeface="Arial"/>
               </a:defRPr>
@@ -14153,7 +14726,7 @@
             <a:avLst/>
           </a:prstGeom>
           <a:solidFill>
-            <a:srgbClr val="D7E1E7"/>
+            <a:srgbClr val="C9BFB0"/>
           </a:solidFill>
           <a:ln>
             <a:noFill/>
@@ -14209,7 +14782,7 @@
               </a:spcAft>
               <a:defRPr sz="1000" b="0">
                 <a:solidFill>
-                  <a:srgbClr val="52677A"/>
+                  <a:srgbClr val="656B63"/>
                 </a:solidFill>
                 <a:latin typeface="Arial"/>
               </a:defRPr>
@@ -14248,7 +14821,7 @@
               </a:spcAft>
               <a:defRPr sz="1000" b="0">
                 <a:solidFill>
-                  <a:srgbClr val="007F80"/>
+                  <a:srgbClr val="4A6650"/>
                 </a:solidFill>
                 <a:latin typeface="Arial"/>
               </a:defRPr>
@@ -14290,7 +14863,7 @@
               </a:spcAft>
               <a:defRPr sz="1000" b="0">
                 <a:solidFill>
-                  <a:srgbClr val="007F80"/>
+                  <a:srgbClr val="4A6650"/>
                 </a:solidFill>
                 <a:latin typeface="Arial"/>
               </a:defRPr>
@@ -14332,13 +14905,13 @@
               </a:spcAft>
               <a:defRPr sz="1000" b="0">
                 <a:solidFill>
-                  <a:srgbClr val="52677A"/>
-                </a:solidFill>
-                <a:latin typeface="Arial"/>
-              </a:defRPr>
-            </a:pPr>
-            <a:r>
-              <a:t>20</a:t>
+                  <a:srgbClr val="656B63"/>
+                </a:solidFill>
+                <a:latin typeface="Arial"/>
+              </a:defRPr>
+            </a:pPr>
+            <a:r>
+              <a:t>23</a:t>
             </a:r>
           </a:p>
         </p:txBody>
@@ -14371,7 +14944,7 @@
               </a:spcAft>
               <a:defRPr sz="3200" b="1">
                 <a:solidFill>
-                  <a:srgbClr val="142C43"/>
+                  <a:srgbClr val="2A2E2A"/>
                 </a:solidFill>
                 <a:latin typeface="Arial"/>
               </a:defRPr>
@@ -14387,7 +14960,7 @@
               </a:spcAft>
               <a:defRPr sz="3200" b="1">
                 <a:solidFill>
-                  <a:srgbClr val="142C43"/>
+                  <a:srgbClr val="2A2E2A"/>
                 </a:solidFill>
                 <a:latin typeface="Arial"/>
               </a:defRPr>
@@ -14426,7 +14999,7 @@
               </a:spcAft>
               <a:defRPr sz="2300" b="0">
                 <a:solidFill>
-                  <a:srgbClr val="24394B"/>
+                  <a:srgbClr val="2A2E2A"/>
                 </a:solidFill>
                 <a:latin typeface="Arial"/>
               </a:defRPr>
@@ -14442,7 +15015,7 @@
               </a:spcAft>
               <a:defRPr sz="2300" b="0">
                 <a:solidFill>
-                  <a:srgbClr val="24394B"/>
+                  <a:srgbClr val="2A2E2A"/>
                 </a:solidFill>
                 <a:latin typeface="Arial"/>
               </a:defRPr>
@@ -14455,7 +15028,7 @@
               </a:spcAft>
               <a:defRPr sz="2300" b="0">
                 <a:solidFill>
-                  <a:srgbClr val="24394B"/>
+                  <a:srgbClr val="2A2E2A"/>
                 </a:solidFill>
                 <a:latin typeface="Arial"/>
               </a:defRPr>
@@ -14466,6 +15039,36 @@
           </a:p>
         </p:txBody>
       </p:sp>
+      <p:pic>
+        <p:nvPicPr>
+          <p:cNvPr id="12" name="PRomop logo" descr="PRomop logo"/>
+          <p:cNvPicPr>
+            <a:picLocks noChangeAspect="1"/>
+          </p:cNvPicPr>
+          <p:nvPr/>
+        </p:nvPicPr>
+        <p:blipFill>
+          <a:blip r:embed="rId5">
+            <a:extLst>
+              <a:ext uri="{96DAC541-7B7A-43D3-8B79-37D633B846F1}">
+                <ns0:svgBlip xmlns:ns0="http://schemas.microsoft.com/office/drawing/2016/SVG/main" r:embed="rId6"/>
+              </a:ext>
+            </a:extLst>
+          </a:blip>
+          <a:stretch>
+            <a:fillRect/>
+          </a:stretch>
+        </p:blipFill>
+        <p:spPr>
+          <a:xfrm>
+            <a:off x="10917936" y="201168"/>
+            <a:ext cx="640080" cy="585919"/>
+          </a:xfrm>
+          <a:prstGeom prst="rect">
+            <a:avLst/>
+          </a:prstGeom>
+        </p:spPr>
+      </p:pic>
     </p:spTree>
   </p:cSld>
   <p:clrMapOvr>
@@ -14507,7 +15110,7 @@
             <a:avLst/>
           </a:prstGeom>
           <a:solidFill>
-            <a:srgbClr val="007F80"/>
+            <a:srgbClr val="4A6650"/>
           </a:solidFill>
           <a:ln>
             <a:noFill/>
@@ -14544,7 +15147,7 @@
         <p:spPr>
           <a:xfrm>
             <a:off x="594360" y="274320"/>
-            <a:ext cx="10972800" cy="274320"/>
+            <a:ext cx="9601200" cy="274320"/>
           </a:xfrm>
           <a:prstGeom prst="rect">
             <a:avLst/>
@@ -14563,7 +15166,7 @@
               </a:spcAft>
               <a:defRPr sz="1100" b="1">
                 <a:solidFill>
-                  <a:srgbClr val="007F80"/>
+                  <a:srgbClr val="4A6650"/>
                 </a:solidFill>
                 <a:latin typeface="Arial"/>
               </a:defRPr>
@@ -14602,7 +15205,7 @@
               </a:spcAft>
               <a:defRPr sz="3100" b="1">
                 <a:solidFill>
-                  <a:srgbClr val="142C43"/>
+                  <a:srgbClr val="2A2E2A"/>
                 </a:solidFill>
                 <a:latin typeface="Arial"/>
               </a:defRPr>
@@ -14628,7 +15231,7 @@
             <a:avLst/>
           </a:prstGeom>
           <a:solidFill>
-            <a:srgbClr val="D7E1E7"/>
+            <a:srgbClr val="C9BFB0"/>
           </a:solidFill>
           <a:ln>
             <a:noFill/>
@@ -14684,7 +15287,7 @@
               </a:spcAft>
               <a:defRPr sz="1000" b="0">
                 <a:solidFill>
-                  <a:srgbClr val="52677A"/>
+                  <a:srgbClr val="656B63"/>
                 </a:solidFill>
                 <a:latin typeface="Arial"/>
               </a:defRPr>
@@ -14723,7 +15326,7 @@
               </a:spcAft>
               <a:defRPr sz="1000" b="0">
                 <a:solidFill>
-                  <a:srgbClr val="007F80"/>
+                  <a:srgbClr val="4A6650"/>
                 </a:solidFill>
                 <a:latin typeface="Arial"/>
               </a:defRPr>
@@ -14765,13 +15368,13 @@
               </a:spcAft>
               <a:defRPr sz="1000" b="0">
                 <a:solidFill>
-                  <a:srgbClr val="52677A"/>
-                </a:solidFill>
-                <a:latin typeface="Arial"/>
-              </a:defRPr>
-            </a:pPr>
-            <a:r>
-              <a:t>21</a:t>
+                  <a:srgbClr val="656B63"/>
+                </a:solidFill>
+                <a:latin typeface="Arial"/>
+              </a:defRPr>
+            </a:pPr>
+            <a:r>
+              <a:t>24</a:t>
             </a:r>
           </a:p>
         </p:txBody>
@@ -14791,7 +15394,7 @@
             <a:avLst/>
           </a:prstGeom>
           <a:solidFill>
-            <a:srgbClr val="142C43"/>
+            <a:srgbClr val="2A2E2A"/>
           </a:solidFill>
           <a:ln>
             <a:noFill/>
@@ -15040,7 +15643,7 @@
               </a:spcAft>
               <a:defRPr sz="2200" b="1">
                 <a:solidFill>
-                  <a:srgbClr val="007F80"/>
+                  <a:srgbClr val="4A6650"/>
                 </a:solidFill>
                 <a:latin typeface="Arial"/>
               </a:defRPr>
@@ -15079,7 +15682,7 @@
               </a:spcAft>
               <a:defRPr sz="2000" b="0">
                 <a:solidFill>
-                  <a:srgbClr val="24394B"/>
+                  <a:srgbClr val="2A2E2A"/>
                 </a:solidFill>
                 <a:latin typeface="Arial"/>
               </a:defRPr>
@@ -15095,7 +15698,7 @@
               </a:spcAft>
               <a:defRPr sz="2000" b="0">
                 <a:solidFill>
-                  <a:srgbClr val="24394B"/>
+                  <a:srgbClr val="2A2E2A"/>
                 </a:solidFill>
                 <a:latin typeface="Arial"/>
               </a:defRPr>
@@ -15111,7 +15714,7 @@
               </a:spcAft>
               <a:defRPr sz="2000" b="0">
                 <a:solidFill>
-                  <a:srgbClr val="24394B"/>
+                  <a:srgbClr val="2A2E2A"/>
                 </a:solidFill>
                 <a:latin typeface="Arial"/>
               </a:defRPr>
@@ -15122,6 +15725,36 @@
           </a:p>
         </p:txBody>
       </p:sp>
+      <p:pic>
+        <p:nvPicPr>
+          <p:cNvPr id="13" name="PRomop logo" descr="PRomop logo"/>
+          <p:cNvPicPr>
+            <a:picLocks noChangeAspect="1"/>
+          </p:cNvPicPr>
+          <p:nvPr/>
+        </p:nvPicPr>
+        <p:blipFill>
+          <a:blip r:embed="rId4">
+            <a:extLst>
+              <a:ext uri="{96DAC541-7B7A-43D3-8B79-37D633B846F1}">
+                <ns0:svgBlip xmlns:ns0="http://schemas.microsoft.com/office/drawing/2016/SVG/main" r:embed="rId5"/>
+              </a:ext>
+            </a:extLst>
+          </a:blip>
+          <a:stretch>
+            <a:fillRect/>
+          </a:stretch>
+        </p:blipFill>
+        <p:spPr>
+          <a:xfrm>
+            <a:off x="10917936" y="201168"/>
+            <a:ext cx="640080" cy="585919"/>
+          </a:xfrm>
+          <a:prstGeom prst="rect">
+            <a:avLst/>
+          </a:prstGeom>
+        </p:spPr>
+      </p:pic>
     </p:spTree>
   </p:cSld>
   <p:clrMapOvr>
@@ -15163,7 +15796,7 @@
             <a:avLst/>
           </a:prstGeom>
           <a:solidFill>
-            <a:srgbClr val="007F80"/>
+            <a:srgbClr val="4A6650"/>
           </a:solidFill>
           <a:ln>
             <a:noFill/>
@@ -15200,7 +15833,7 @@
         <p:spPr>
           <a:xfrm>
             <a:off x="594360" y="274320"/>
-            <a:ext cx="10972800" cy="274320"/>
+            <a:ext cx="9601200" cy="274320"/>
           </a:xfrm>
           <a:prstGeom prst="rect">
             <a:avLst/>
@@ -15219,7 +15852,7 @@
               </a:spcAft>
               <a:defRPr sz="1100" b="1">
                 <a:solidFill>
-                  <a:srgbClr val="007F80"/>
+                  <a:srgbClr val="4A6650"/>
                 </a:solidFill>
                 <a:latin typeface="Arial"/>
               </a:defRPr>
@@ -15258,7 +15891,7 @@
               </a:spcAft>
               <a:defRPr sz="3100" b="1">
                 <a:solidFill>
-                  <a:srgbClr val="142C43"/>
+                  <a:srgbClr val="2A2E2A"/>
                 </a:solidFill>
                 <a:latin typeface="Arial"/>
               </a:defRPr>
@@ -15284,7 +15917,7 @@
             <a:avLst/>
           </a:prstGeom>
           <a:solidFill>
-            <a:srgbClr val="D7E1E7"/>
+            <a:srgbClr val="C9BFB0"/>
           </a:solidFill>
           <a:ln>
             <a:noFill/>
@@ -15340,7 +15973,7 @@
               </a:spcAft>
               <a:defRPr sz="1000" b="0">
                 <a:solidFill>
-                  <a:srgbClr val="52677A"/>
+                  <a:srgbClr val="656B63"/>
                 </a:solidFill>
                 <a:latin typeface="Arial"/>
               </a:defRPr>
@@ -15379,7 +16012,7 @@
               </a:spcAft>
               <a:defRPr sz="1000" b="0">
                 <a:solidFill>
-                  <a:srgbClr val="007F80"/>
+                  <a:srgbClr val="4A6650"/>
                 </a:solidFill>
                 <a:latin typeface="Arial"/>
               </a:defRPr>
@@ -15421,7 +16054,7 @@
               </a:spcAft>
               <a:defRPr sz="1000" b="0">
                 <a:solidFill>
-                  <a:srgbClr val="007F80"/>
+                  <a:srgbClr val="4A6650"/>
                 </a:solidFill>
                 <a:latin typeface="Arial"/>
               </a:defRPr>
@@ -15463,13 +16096,13 @@
               </a:spcAft>
               <a:defRPr sz="1000" b="0">
                 <a:solidFill>
-                  <a:srgbClr val="52677A"/>
-                </a:solidFill>
-                <a:latin typeface="Arial"/>
-              </a:defRPr>
-            </a:pPr>
-            <a:r>
-              <a:t>22</a:t>
+                  <a:srgbClr val="656B63"/>
+                </a:solidFill>
+                <a:latin typeface="Arial"/>
+              </a:defRPr>
+            </a:pPr>
+            <a:r>
+              <a:t>25</a:t>
             </a:r>
           </a:p>
         </p:txBody>
@@ -15489,7 +16122,7 @@
             <a:avLst/>
           </a:prstGeom>
           <a:solidFill>
-            <a:srgbClr val="EFF5F7"/>
+            <a:srgbClr val="F5F0EA"/>
           </a:solidFill>
           <a:ln>
             <a:noFill/>
@@ -15545,7 +16178,7 @@
               </a:spcAft>
               <a:defRPr sz="2200" b="1">
                 <a:solidFill>
-                  <a:srgbClr val="007F80"/>
+                  <a:srgbClr val="4A6650"/>
                 </a:solidFill>
                 <a:latin typeface="Arial"/>
               </a:defRPr>
@@ -15584,7 +16217,7 @@
               </a:spcAft>
               <a:defRPr sz="2100" b="0">
                 <a:solidFill>
-                  <a:srgbClr val="24394B"/>
+                  <a:srgbClr val="2A2E2A"/>
                 </a:solidFill>
                 <a:latin typeface="Arial"/>
               </a:defRPr>
@@ -15600,7 +16233,7 @@
               </a:spcAft>
               <a:defRPr sz="2100" b="0">
                 <a:solidFill>
-                  <a:srgbClr val="24394B"/>
+                  <a:srgbClr val="2A2E2A"/>
                 </a:solidFill>
                 <a:latin typeface="Arial"/>
               </a:defRPr>
@@ -15616,7 +16249,7 @@
               </a:spcAft>
               <a:defRPr sz="2100" b="0">
                 <a:solidFill>
-                  <a:srgbClr val="24394B"/>
+                  <a:srgbClr val="2A2E2A"/>
                 </a:solidFill>
                 <a:latin typeface="Arial"/>
               </a:defRPr>
@@ -15642,7 +16275,7 @@
             <a:avLst/>
           </a:prstGeom>
           <a:solidFill>
-            <a:srgbClr val="EFF5F7"/>
+            <a:srgbClr val="F5F0EA"/>
           </a:solidFill>
           <a:ln>
             <a:noFill/>
@@ -15698,7 +16331,7 @@
               </a:spcAft>
               <a:defRPr sz="2200" b="1">
                 <a:solidFill>
-                  <a:srgbClr val="007F80"/>
+                  <a:srgbClr val="4A6650"/>
                 </a:solidFill>
                 <a:latin typeface="Arial"/>
               </a:defRPr>
@@ -15737,7 +16370,7 @@
               </a:spcAft>
               <a:defRPr sz="2100" b="0">
                 <a:solidFill>
-                  <a:srgbClr val="24394B"/>
+                  <a:srgbClr val="2A2E2A"/>
                 </a:solidFill>
                 <a:latin typeface="Arial"/>
               </a:defRPr>
@@ -15753,7 +16386,7 @@
               </a:spcAft>
               <a:defRPr sz="2100" b="0">
                 <a:solidFill>
-                  <a:srgbClr val="24394B"/>
+                  <a:srgbClr val="2A2E2A"/>
                 </a:solidFill>
                 <a:latin typeface="Arial"/>
               </a:defRPr>
@@ -15769,7 +16402,7 @@
               </a:spcAft>
               <a:defRPr sz="2100" b="0">
                 <a:solidFill>
-                  <a:srgbClr val="24394B"/>
+                  <a:srgbClr val="2A2E2A"/>
                 </a:solidFill>
                 <a:latin typeface="Arial"/>
               </a:defRPr>
@@ -15780,6 +16413,36 @@
           </a:p>
         </p:txBody>
       </p:sp>
+      <p:pic>
+        <p:nvPicPr>
+          <p:cNvPr id="16" name="PRomop logo" descr="PRomop logo"/>
+          <p:cNvPicPr>
+            <a:picLocks noChangeAspect="1"/>
+          </p:cNvPicPr>
+          <p:nvPr/>
+        </p:nvPicPr>
+        <p:blipFill>
+          <a:blip r:embed="rId5">
+            <a:extLst>
+              <a:ext uri="{96DAC541-7B7A-43D3-8B79-37D633B846F1}">
+                <ns0:svgBlip xmlns:ns0="http://schemas.microsoft.com/office/drawing/2016/SVG/main" r:embed="rId6"/>
+              </a:ext>
+            </a:extLst>
+          </a:blip>
+          <a:stretch>
+            <a:fillRect/>
+          </a:stretch>
+        </p:blipFill>
+        <p:spPr>
+          <a:xfrm>
+            <a:off x="10917936" y="201168"/>
+            <a:ext cx="640080" cy="585919"/>
+          </a:xfrm>
+          <a:prstGeom prst="rect">
+            <a:avLst/>
+          </a:prstGeom>
+        </p:spPr>
+      </p:pic>
     </p:spTree>
   </p:cSld>
   <p:clrMapOvr>
@@ -15821,7 +16484,7 @@
             <a:avLst/>
           </a:prstGeom>
           <a:solidFill>
-            <a:srgbClr val="007F80"/>
+            <a:srgbClr val="4A6650"/>
           </a:solidFill>
           <a:ln>
             <a:noFill/>
@@ -15858,7 +16521,7 @@
         <p:spPr>
           <a:xfrm>
             <a:off x="594360" y="274320"/>
-            <a:ext cx="10972800" cy="274320"/>
+            <a:ext cx="9601200" cy="274320"/>
           </a:xfrm>
           <a:prstGeom prst="rect">
             <a:avLst/>
@@ -15877,7 +16540,7 @@
               </a:spcAft>
               <a:defRPr sz="1100" b="1">
                 <a:solidFill>
-                  <a:srgbClr val="007F80"/>
+                  <a:srgbClr val="4A6650"/>
                 </a:solidFill>
                 <a:latin typeface="Arial"/>
               </a:defRPr>
@@ -15916,7 +16579,7 @@
               </a:spcAft>
               <a:defRPr sz="3100" b="1">
                 <a:solidFill>
-                  <a:srgbClr val="142C43"/>
+                  <a:srgbClr val="2A2E2A"/>
                 </a:solidFill>
                 <a:latin typeface="Arial"/>
               </a:defRPr>
@@ -15942,7 +16605,7 @@
             <a:avLst/>
           </a:prstGeom>
           <a:solidFill>
-            <a:srgbClr val="D7E1E7"/>
+            <a:srgbClr val="C9BFB0"/>
           </a:solidFill>
           <a:ln>
             <a:noFill/>
@@ -15998,7 +16661,7 @@
               </a:spcAft>
               <a:defRPr sz="1000" b="0">
                 <a:solidFill>
-                  <a:srgbClr val="52677A"/>
+                  <a:srgbClr val="656B63"/>
                 </a:solidFill>
                 <a:latin typeface="Arial"/>
               </a:defRPr>
@@ -16037,7 +16700,7 @@
               </a:spcAft>
               <a:defRPr sz="1000" b="0">
                 <a:solidFill>
-                  <a:srgbClr val="007F80"/>
+                  <a:srgbClr val="4A6650"/>
                 </a:solidFill>
                 <a:latin typeface="Arial"/>
               </a:defRPr>
@@ -16079,7 +16742,7 @@
               </a:spcAft>
               <a:defRPr sz="1000" b="0">
                 <a:solidFill>
-                  <a:srgbClr val="007F80"/>
+                  <a:srgbClr val="4A6650"/>
                 </a:solidFill>
                 <a:latin typeface="Arial"/>
               </a:defRPr>
@@ -16121,13 +16784,13 @@
               </a:spcAft>
               <a:defRPr sz="1000" b="0">
                 <a:solidFill>
-                  <a:srgbClr val="52677A"/>
-                </a:solidFill>
-                <a:latin typeface="Arial"/>
-              </a:defRPr>
-            </a:pPr>
-            <a:r>
-              <a:t>23</a:t>
+                  <a:srgbClr val="656B63"/>
+                </a:solidFill>
+                <a:latin typeface="Arial"/>
+              </a:defRPr>
+            </a:pPr>
+            <a:r>
+              <a:t>26</a:t>
             </a:r>
           </a:p>
         </p:txBody>
@@ -16147,7 +16810,7 @@
             <a:avLst/>
           </a:prstGeom>
           <a:solidFill>
-            <a:srgbClr val="EFF5F7"/>
+            <a:srgbClr val="F5F0EA"/>
           </a:solidFill>
           <a:ln>
             <a:noFill/>
@@ -16203,7 +16866,7 @@
               </a:spcAft>
               <a:defRPr sz="2200" b="1">
                 <a:solidFill>
-                  <a:srgbClr val="007F80"/>
+                  <a:srgbClr val="4A6650"/>
                 </a:solidFill>
                 <a:latin typeface="Arial"/>
               </a:defRPr>
@@ -16242,7 +16905,7 @@
               </a:spcAft>
               <a:defRPr sz="2100" b="0">
                 <a:solidFill>
-                  <a:srgbClr val="24394B"/>
+                  <a:srgbClr val="2A2E2A"/>
                 </a:solidFill>
                 <a:latin typeface="Arial"/>
               </a:defRPr>
@@ -16258,7 +16921,7 @@
               </a:spcAft>
               <a:defRPr sz="2100" b="0">
                 <a:solidFill>
-                  <a:srgbClr val="24394B"/>
+                  <a:srgbClr val="2A2E2A"/>
                 </a:solidFill>
                 <a:latin typeface="Arial"/>
               </a:defRPr>
@@ -16274,7 +16937,7 @@
               </a:spcAft>
               <a:defRPr sz="2100" b="0">
                 <a:solidFill>
-                  <a:srgbClr val="24394B"/>
+                  <a:srgbClr val="2A2E2A"/>
                 </a:solidFill>
                 <a:latin typeface="Arial"/>
               </a:defRPr>
@@ -16290,7 +16953,7 @@
               </a:spcAft>
               <a:defRPr sz="2100" b="0">
                 <a:solidFill>
-                  <a:srgbClr val="24394B"/>
+                  <a:srgbClr val="2A2E2A"/>
                 </a:solidFill>
                 <a:latin typeface="Arial"/>
               </a:defRPr>
@@ -16316,7 +16979,7 @@
             <a:avLst/>
           </a:prstGeom>
           <a:solidFill>
-            <a:srgbClr val="EFF5F7"/>
+            <a:srgbClr val="F5F0EA"/>
           </a:solidFill>
           <a:ln>
             <a:noFill/>
@@ -16372,7 +17035,7 @@
               </a:spcAft>
               <a:defRPr sz="2200" b="1">
                 <a:solidFill>
-                  <a:srgbClr val="007F80"/>
+                  <a:srgbClr val="4A6650"/>
                 </a:solidFill>
                 <a:latin typeface="Arial"/>
               </a:defRPr>
@@ -16411,7 +17074,7 @@
               </a:spcAft>
               <a:defRPr sz="2100" b="0">
                 <a:solidFill>
-                  <a:srgbClr val="24394B"/>
+                  <a:srgbClr val="2A2E2A"/>
                 </a:solidFill>
                 <a:latin typeface="Arial"/>
               </a:defRPr>
@@ -16427,7 +17090,7 @@
               </a:spcAft>
               <a:defRPr sz="2100" b="0">
                 <a:solidFill>
-                  <a:srgbClr val="24394B"/>
+                  <a:srgbClr val="2A2E2A"/>
                 </a:solidFill>
                 <a:latin typeface="Arial"/>
               </a:defRPr>
@@ -16443,7 +17106,7 @@
               </a:spcAft>
               <a:defRPr sz="2100" b="0">
                 <a:solidFill>
-                  <a:srgbClr val="24394B"/>
+                  <a:srgbClr val="2A2E2A"/>
                 </a:solidFill>
                 <a:latin typeface="Arial"/>
               </a:defRPr>
@@ -16454,6 +17117,36 @@
           </a:p>
         </p:txBody>
       </p:sp>
+      <p:pic>
+        <p:nvPicPr>
+          <p:cNvPr id="16" name="PRomop logo" descr="PRomop logo"/>
+          <p:cNvPicPr>
+            <a:picLocks noChangeAspect="1"/>
+          </p:cNvPicPr>
+          <p:nvPr/>
+        </p:nvPicPr>
+        <p:blipFill>
+          <a:blip r:embed="rId5">
+            <a:extLst>
+              <a:ext uri="{96DAC541-7B7A-43D3-8B79-37D633B846F1}">
+                <ns0:svgBlip xmlns:ns0="http://schemas.microsoft.com/office/drawing/2016/SVG/main" r:embed="rId6"/>
+              </a:ext>
+            </a:extLst>
+          </a:blip>
+          <a:stretch>
+            <a:fillRect/>
+          </a:stretch>
+        </p:blipFill>
+        <p:spPr>
+          <a:xfrm>
+            <a:off x="10917936" y="201168"/>
+            <a:ext cx="640080" cy="585919"/>
+          </a:xfrm>
+          <a:prstGeom prst="rect">
+            <a:avLst/>
+          </a:prstGeom>
+        </p:spPr>
+      </p:pic>
     </p:spTree>
   </p:cSld>
   <p:clrMapOvr>
@@ -16495,7 +17188,7 @@
             <a:avLst/>
           </a:prstGeom>
           <a:solidFill>
-            <a:srgbClr val="007F80"/>
+            <a:srgbClr val="4A6650"/>
           </a:solidFill>
           <a:ln>
             <a:noFill/>
@@ -16532,7 +17225,7 @@
         <p:spPr>
           <a:xfrm>
             <a:off x="594360" y="274320"/>
-            <a:ext cx="10972800" cy="274320"/>
+            <a:ext cx="9601200" cy="274320"/>
           </a:xfrm>
           <a:prstGeom prst="rect">
             <a:avLst/>
@@ -16551,7 +17244,7 @@
               </a:spcAft>
               <a:defRPr sz="1100" b="1">
                 <a:solidFill>
-                  <a:srgbClr val="007F80"/>
+                  <a:srgbClr val="4A6650"/>
                 </a:solidFill>
                 <a:latin typeface="Arial"/>
               </a:defRPr>
@@ -16590,7 +17283,7 @@
               </a:spcAft>
               <a:defRPr sz="3100" b="1">
                 <a:solidFill>
-                  <a:srgbClr val="142C43"/>
+                  <a:srgbClr val="2A2E2A"/>
                 </a:solidFill>
                 <a:latin typeface="Arial"/>
               </a:defRPr>
@@ -16616,7 +17309,7 @@
             <a:avLst/>
           </a:prstGeom>
           <a:solidFill>
-            <a:srgbClr val="D7E1E7"/>
+            <a:srgbClr val="C9BFB0"/>
           </a:solidFill>
           <a:ln>
             <a:noFill/>
@@ -16672,7 +17365,7 @@
               </a:spcAft>
               <a:defRPr sz="1000" b="0">
                 <a:solidFill>
-                  <a:srgbClr val="52677A"/>
+                  <a:srgbClr val="656B63"/>
                 </a:solidFill>
                 <a:latin typeface="Arial"/>
               </a:defRPr>
@@ -16711,7 +17404,7 @@
               </a:spcAft>
               <a:defRPr sz="1000" b="0">
                 <a:solidFill>
-                  <a:srgbClr val="007F80"/>
+                  <a:srgbClr val="4A6650"/>
                 </a:solidFill>
                 <a:latin typeface="Arial"/>
               </a:defRPr>
@@ -16753,7 +17446,7 @@
               </a:spcAft>
               <a:defRPr sz="1000" b="0">
                 <a:solidFill>
-                  <a:srgbClr val="007F80"/>
+                  <a:srgbClr val="4A6650"/>
                 </a:solidFill>
                 <a:latin typeface="Arial"/>
               </a:defRPr>
@@ -16795,13 +17488,13 @@
               </a:spcAft>
               <a:defRPr sz="1000" b="0">
                 <a:solidFill>
-                  <a:srgbClr val="52677A"/>
-                </a:solidFill>
-                <a:latin typeface="Arial"/>
-              </a:defRPr>
-            </a:pPr>
-            <a:r>
-              <a:t>24</a:t>
+                  <a:srgbClr val="656B63"/>
+                </a:solidFill>
+                <a:latin typeface="Arial"/>
+              </a:defRPr>
+            </a:pPr>
+            <a:r>
+              <a:t>27</a:t>
             </a:r>
           </a:p>
         </p:txBody>
@@ -16821,7 +17514,7 @@
             <a:avLst/>
           </a:prstGeom>
           <a:solidFill>
-            <a:srgbClr val="142C43"/>
+            <a:srgbClr val="2A2E2A"/>
           </a:solidFill>
           <a:ln>
             <a:noFill/>
@@ -17086,7 +17779,7 @@
               </a:spcAft>
               <a:defRPr sz="2200" b="1">
                 <a:solidFill>
-                  <a:srgbClr val="007F80"/>
+                  <a:srgbClr val="4A6650"/>
                 </a:solidFill>
                 <a:latin typeface="Arial"/>
               </a:defRPr>
@@ -17125,7 +17818,7 @@
               </a:spcAft>
               <a:defRPr sz="2000" b="0">
                 <a:solidFill>
-                  <a:srgbClr val="24394B"/>
+                  <a:srgbClr val="2A2E2A"/>
                 </a:solidFill>
                 <a:latin typeface="Arial"/>
               </a:defRPr>
@@ -17141,7 +17834,7 @@
               </a:spcAft>
               <a:defRPr sz="2000" b="0">
                 <a:solidFill>
-                  <a:srgbClr val="24394B"/>
+                  <a:srgbClr val="2A2E2A"/>
                 </a:solidFill>
                 <a:latin typeface="Arial"/>
               </a:defRPr>
@@ -17157,7 +17850,7 @@
               </a:spcAft>
               <a:defRPr sz="2000" b="0">
                 <a:solidFill>
-                  <a:srgbClr val="24394B"/>
+                  <a:srgbClr val="2A2E2A"/>
                 </a:solidFill>
                 <a:latin typeface="Arial"/>
               </a:defRPr>
@@ -17168,6 +17861,36 @@
           </a:p>
         </p:txBody>
       </p:sp>
+      <p:pic>
+        <p:nvPicPr>
+          <p:cNvPr id="14" name="PRomop logo" descr="PRomop logo"/>
+          <p:cNvPicPr>
+            <a:picLocks noChangeAspect="1"/>
+          </p:cNvPicPr>
+          <p:nvPr/>
+        </p:nvPicPr>
+        <p:blipFill>
+          <a:blip r:embed="rId5">
+            <a:extLst>
+              <a:ext uri="{96DAC541-7B7A-43D3-8B79-37D633B846F1}">
+                <ns0:svgBlip xmlns:ns0="http://schemas.microsoft.com/office/drawing/2016/SVG/main" r:embed="rId6"/>
+              </a:ext>
+            </a:extLst>
+          </a:blip>
+          <a:stretch>
+            <a:fillRect/>
+          </a:stretch>
+        </p:blipFill>
+        <p:spPr>
+          <a:xfrm>
+            <a:off x="10917936" y="201168"/>
+            <a:ext cx="640080" cy="585919"/>
+          </a:xfrm>
+          <a:prstGeom prst="rect">
+            <a:avLst/>
+          </a:prstGeom>
+        </p:spPr>
+      </p:pic>
     </p:spTree>
   </p:cSld>
   <p:clrMapOvr>
@@ -17209,7 +17932,7 @@
             <a:avLst/>
           </a:prstGeom>
           <a:solidFill>
-            <a:srgbClr val="007F80"/>
+            <a:srgbClr val="4A6650"/>
           </a:solidFill>
           <a:ln>
             <a:noFill/>
@@ -17246,7 +17969,7 @@
         <p:spPr>
           <a:xfrm>
             <a:off x="594360" y="274320"/>
-            <a:ext cx="10972800" cy="274320"/>
+            <a:ext cx="9601200" cy="274320"/>
           </a:xfrm>
           <a:prstGeom prst="rect">
             <a:avLst/>
@@ -17265,7 +17988,7 @@
               </a:spcAft>
               <a:defRPr sz="1100" b="1">
                 <a:solidFill>
-                  <a:srgbClr val="007F80"/>
+                  <a:srgbClr val="4A6650"/>
                 </a:solidFill>
                 <a:latin typeface="Arial"/>
               </a:defRPr>
@@ -17304,7 +18027,7 @@
               </a:spcAft>
               <a:defRPr sz="3100" b="1">
                 <a:solidFill>
-                  <a:srgbClr val="142C43"/>
+                  <a:srgbClr val="2A2E2A"/>
                 </a:solidFill>
                 <a:latin typeface="Arial"/>
               </a:defRPr>
@@ -17330,7 +18053,7 @@
             <a:avLst/>
           </a:prstGeom>
           <a:solidFill>
-            <a:srgbClr val="D7E1E7"/>
+            <a:srgbClr val="C9BFB0"/>
           </a:solidFill>
           <a:ln>
             <a:noFill/>
@@ -17386,7 +18109,7 @@
               </a:spcAft>
               <a:defRPr sz="1000" b="0">
                 <a:solidFill>
-                  <a:srgbClr val="52677A"/>
+                  <a:srgbClr val="656B63"/>
                 </a:solidFill>
                 <a:latin typeface="Arial"/>
               </a:defRPr>
@@ -17425,7 +18148,7 @@
               </a:spcAft>
               <a:defRPr sz="1000" b="0">
                 <a:solidFill>
-                  <a:srgbClr val="007F80"/>
+                  <a:srgbClr val="4A6650"/>
                 </a:solidFill>
                 <a:latin typeface="Arial"/>
               </a:defRPr>
@@ -17467,7 +18190,7 @@
               </a:spcAft>
               <a:defRPr sz="1000" b="0">
                 <a:solidFill>
-                  <a:srgbClr val="007F80"/>
+                  <a:srgbClr val="4A6650"/>
                 </a:solidFill>
                 <a:latin typeface="Arial"/>
               </a:defRPr>
@@ -17509,13 +18232,13 @@
               </a:spcAft>
               <a:defRPr sz="1000" b="0">
                 <a:solidFill>
-                  <a:srgbClr val="52677A"/>
-                </a:solidFill>
-                <a:latin typeface="Arial"/>
-              </a:defRPr>
-            </a:pPr>
-            <a:r>
-              <a:t>25</a:t>
+                  <a:srgbClr val="656B63"/>
+                </a:solidFill>
+                <a:latin typeface="Arial"/>
+              </a:defRPr>
+            </a:pPr>
+            <a:r>
+              <a:t>28</a:t>
             </a:r>
           </a:p>
         </p:txBody>
@@ -17535,7 +18258,7 @@
             <a:avLst/>
           </a:prstGeom>
           <a:solidFill>
-            <a:srgbClr val="EFF5F7"/>
+            <a:srgbClr val="F5F0EA"/>
           </a:solidFill>
           <a:ln>
             <a:noFill/>
@@ -17591,7 +18314,7 @@
               </a:spcAft>
               <a:defRPr sz="2200" b="1">
                 <a:solidFill>
-                  <a:srgbClr val="007F80"/>
+                  <a:srgbClr val="4A6650"/>
                 </a:solidFill>
                 <a:latin typeface="Arial"/>
               </a:defRPr>
@@ -17630,7 +18353,7 @@
               </a:spcAft>
               <a:defRPr sz="2100" b="0">
                 <a:solidFill>
-                  <a:srgbClr val="24394B"/>
+                  <a:srgbClr val="2A2E2A"/>
                 </a:solidFill>
                 <a:latin typeface="Arial"/>
               </a:defRPr>
@@ -17646,7 +18369,7 @@
               </a:spcAft>
               <a:defRPr sz="2100" b="0">
                 <a:solidFill>
-                  <a:srgbClr val="24394B"/>
+                  <a:srgbClr val="2A2E2A"/>
                 </a:solidFill>
                 <a:latin typeface="Arial"/>
               </a:defRPr>
@@ -17662,7 +18385,7 @@
               </a:spcAft>
               <a:defRPr sz="2100" b="0">
                 <a:solidFill>
-                  <a:srgbClr val="24394B"/>
+                  <a:srgbClr val="2A2E2A"/>
                 </a:solidFill>
                 <a:latin typeface="Arial"/>
               </a:defRPr>
@@ -17688,7 +18411,7 @@
             <a:avLst/>
           </a:prstGeom>
           <a:solidFill>
-            <a:srgbClr val="EFF5F7"/>
+            <a:srgbClr val="F5F0EA"/>
           </a:solidFill>
           <a:ln>
             <a:noFill/>
@@ -17744,7 +18467,7 @@
               </a:spcAft>
               <a:defRPr sz="2200" b="1">
                 <a:solidFill>
-                  <a:srgbClr val="007F80"/>
+                  <a:srgbClr val="4A6650"/>
                 </a:solidFill>
                 <a:latin typeface="Arial"/>
               </a:defRPr>
@@ -17783,7 +18506,7 @@
               </a:spcAft>
               <a:defRPr sz="2100" b="0">
                 <a:solidFill>
-                  <a:srgbClr val="24394B"/>
+                  <a:srgbClr val="2A2E2A"/>
                 </a:solidFill>
                 <a:latin typeface="Arial"/>
               </a:defRPr>
@@ -17799,7 +18522,7 @@
               </a:spcAft>
               <a:defRPr sz="2100" b="0">
                 <a:solidFill>
-                  <a:srgbClr val="24394B"/>
+                  <a:srgbClr val="2A2E2A"/>
                 </a:solidFill>
                 <a:latin typeface="Arial"/>
               </a:defRPr>
@@ -17815,7 +18538,7 @@
               </a:spcAft>
               <a:defRPr sz="2100" b="0">
                 <a:solidFill>
-                  <a:srgbClr val="24394B"/>
+                  <a:srgbClr val="2A2E2A"/>
                 </a:solidFill>
                 <a:latin typeface="Arial"/>
               </a:defRPr>
@@ -17831,7 +18554,7 @@
               </a:spcAft>
               <a:defRPr sz="2100" b="0">
                 <a:solidFill>
-                  <a:srgbClr val="24394B"/>
+                  <a:srgbClr val="2A2E2A"/>
                 </a:solidFill>
                 <a:latin typeface="Arial"/>
               </a:defRPr>
@@ -17842,6 +18565,36 @@
           </a:p>
         </p:txBody>
       </p:sp>
+      <p:pic>
+        <p:nvPicPr>
+          <p:cNvPr id="16" name="PRomop logo" descr="PRomop logo"/>
+          <p:cNvPicPr>
+            <a:picLocks noChangeAspect="1"/>
+          </p:cNvPicPr>
+          <p:nvPr/>
+        </p:nvPicPr>
+        <p:blipFill>
+          <a:blip r:embed="rId5">
+            <a:extLst>
+              <a:ext uri="{96DAC541-7B7A-43D3-8B79-37D633B846F1}">
+                <ns0:svgBlip xmlns:ns0="http://schemas.microsoft.com/office/drawing/2016/SVG/main" r:embed="rId6"/>
+              </a:ext>
+            </a:extLst>
+          </a:blip>
+          <a:stretch>
+            <a:fillRect/>
+          </a:stretch>
+        </p:blipFill>
+        <p:spPr>
+          <a:xfrm>
+            <a:off x="10917936" y="201168"/>
+            <a:ext cx="640080" cy="585919"/>
+          </a:xfrm>
+          <a:prstGeom prst="rect">
+            <a:avLst/>
+          </a:prstGeom>
+        </p:spPr>
+      </p:pic>
     </p:spTree>
   </p:cSld>
   <p:clrMapOvr>
@@ -17883,7 +18636,7 @@
             <a:avLst/>
           </a:prstGeom>
           <a:solidFill>
-            <a:srgbClr val="007F80"/>
+            <a:srgbClr val="4A6650"/>
           </a:solidFill>
           <a:ln>
             <a:noFill/>
@@ -17920,7 +18673,7 @@
         <p:spPr>
           <a:xfrm>
             <a:off x="594360" y="274320"/>
-            <a:ext cx="10972800" cy="274320"/>
+            <a:ext cx="9601200" cy="274320"/>
           </a:xfrm>
           <a:prstGeom prst="rect">
             <a:avLst/>
@@ -17939,7 +18692,7 @@
               </a:spcAft>
               <a:defRPr sz="1100" b="1">
                 <a:solidFill>
-                  <a:srgbClr val="007F80"/>
+                  <a:srgbClr val="4A6650"/>
                 </a:solidFill>
                 <a:latin typeface="Arial"/>
               </a:defRPr>
@@ -17978,7 +18731,7 @@
               </a:spcAft>
               <a:defRPr sz="3100" b="1">
                 <a:solidFill>
-                  <a:srgbClr val="142C43"/>
+                  <a:srgbClr val="2A2E2A"/>
                 </a:solidFill>
                 <a:latin typeface="Arial"/>
               </a:defRPr>
@@ -18004,7 +18757,7 @@
             <a:avLst/>
           </a:prstGeom>
           <a:solidFill>
-            <a:srgbClr val="D7E1E7"/>
+            <a:srgbClr val="C9BFB0"/>
           </a:solidFill>
           <a:ln>
             <a:noFill/>
@@ -18060,7 +18813,7 @@
               </a:spcAft>
               <a:defRPr sz="1000" b="0">
                 <a:solidFill>
-                  <a:srgbClr val="52677A"/>
+                  <a:srgbClr val="656B63"/>
                 </a:solidFill>
                 <a:latin typeface="Arial"/>
               </a:defRPr>
@@ -18099,7 +18852,7 @@
               </a:spcAft>
               <a:defRPr sz="1000" b="0">
                 <a:solidFill>
-                  <a:srgbClr val="007F80"/>
+                  <a:srgbClr val="4A6650"/>
                 </a:solidFill>
                 <a:latin typeface="Arial"/>
               </a:defRPr>
@@ -18141,7 +18894,7 @@
               </a:spcAft>
               <a:defRPr sz="1000" b="0">
                 <a:solidFill>
-                  <a:srgbClr val="007F80"/>
+                  <a:srgbClr val="4A6650"/>
                 </a:solidFill>
                 <a:latin typeface="Arial"/>
               </a:defRPr>
@@ -18183,13 +18936,13 @@
               </a:spcAft>
               <a:defRPr sz="1000" b="0">
                 <a:solidFill>
-                  <a:srgbClr val="52677A"/>
-                </a:solidFill>
-                <a:latin typeface="Arial"/>
-              </a:defRPr>
-            </a:pPr>
-            <a:r>
-              <a:t>26</a:t>
+                  <a:srgbClr val="656B63"/>
+                </a:solidFill>
+                <a:latin typeface="Arial"/>
+              </a:defRPr>
+            </a:pPr>
+            <a:r>
+              <a:t>29</a:t>
             </a:r>
           </a:p>
         </p:txBody>
@@ -18209,7 +18962,7 @@
             <a:avLst/>
           </a:prstGeom>
           <a:solidFill>
-            <a:srgbClr val="EFF5F7"/>
+            <a:srgbClr val="F5F0EA"/>
           </a:solidFill>
           <a:ln>
             <a:noFill/>
@@ -18265,7 +19018,7 @@
               </a:spcAft>
               <a:defRPr sz="2200" b="1">
                 <a:solidFill>
-                  <a:srgbClr val="007F80"/>
+                  <a:srgbClr val="4A6650"/>
                 </a:solidFill>
                 <a:latin typeface="Arial"/>
               </a:defRPr>
@@ -18304,7 +19057,7 @@
               </a:spcAft>
               <a:defRPr sz="2100" b="0">
                 <a:solidFill>
-                  <a:srgbClr val="24394B"/>
+                  <a:srgbClr val="2A2E2A"/>
                 </a:solidFill>
                 <a:latin typeface="Arial"/>
               </a:defRPr>
@@ -18320,7 +19073,7 @@
               </a:spcAft>
               <a:defRPr sz="2100" b="0">
                 <a:solidFill>
-                  <a:srgbClr val="24394B"/>
+                  <a:srgbClr val="2A2E2A"/>
                 </a:solidFill>
                 <a:latin typeface="Arial"/>
               </a:defRPr>
@@ -18336,7 +19089,7 @@
               </a:spcAft>
               <a:defRPr sz="2100" b="0">
                 <a:solidFill>
-                  <a:srgbClr val="24394B"/>
+                  <a:srgbClr val="2A2E2A"/>
                 </a:solidFill>
                 <a:latin typeface="Arial"/>
               </a:defRPr>
@@ -18352,7 +19105,7 @@
               </a:spcAft>
               <a:defRPr sz="2100" b="0">
                 <a:solidFill>
-                  <a:srgbClr val="24394B"/>
+                  <a:srgbClr val="2A2E2A"/>
                 </a:solidFill>
                 <a:latin typeface="Arial"/>
               </a:defRPr>
@@ -18378,7 +19131,7 @@
             <a:avLst/>
           </a:prstGeom>
           <a:solidFill>
-            <a:srgbClr val="EFF5F7"/>
+            <a:srgbClr val="F5F0EA"/>
           </a:solidFill>
           <a:ln>
             <a:noFill/>
@@ -18434,7 +19187,7 @@
               </a:spcAft>
               <a:defRPr sz="2200" b="1">
                 <a:solidFill>
-                  <a:srgbClr val="007F80"/>
+                  <a:srgbClr val="4A6650"/>
                 </a:solidFill>
                 <a:latin typeface="Arial"/>
               </a:defRPr>
@@ -18473,7 +19226,7 @@
               </a:spcAft>
               <a:defRPr sz="2100" b="0">
                 <a:solidFill>
-                  <a:srgbClr val="24394B"/>
+                  <a:srgbClr val="2A2E2A"/>
                 </a:solidFill>
                 <a:latin typeface="Arial"/>
               </a:defRPr>
@@ -18489,7 +19242,7 @@
               </a:spcAft>
               <a:defRPr sz="2100" b="0">
                 <a:solidFill>
-                  <a:srgbClr val="24394B"/>
+                  <a:srgbClr val="2A2E2A"/>
                 </a:solidFill>
                 <a:latin typeface="Arial"/>
               </a:defRPr>
@@ -18505,7 +19258,7 @@
               </a:spcAft>
               <a:defRPr sz="2100" b="0">
                 <a:solidFill>
-                  <a:srgbClr val="24394B"/>
+                  <a:srgbClr val="2A2E2A"/>
                 </a:solidFill>
                 <a:latin typeface="Arial"/>
               </a:defRPr>
@@ -18521,7 +19274,7 @@
               </a:spcAft>
               <a:defRPr sz="2100" b="0">
                 <a:solidFill>
-                  <a:srgbClr val="24394B"/>
+                  <a:srgbClr val="2A2E2A"/>
                 </a:solidFill>
                 <a:latin typeface="Arial"/>
               </a:defRPr>
@@ -18532,6 +19285,36 @@
           </a:p>
         </p:txBody>
       </p:sp>
+      <p:pic>
+        <p:nvPicPr>
+          <p:cNvPr id="16" name="PRomop logo" descr="PRomop logo"/>
+          <p:cNvPicPr>
+            <a:picLocks noChangeAspect="1"/>
+          </p:cNvPicPr>
+          <p:nvPr/>
+        </p:nvPicPr>
+        <p:blipFill>
+          <a:blip r:embed="rId5">
+            <a:extLst>
+              <a:ext uri="{96DAC541-7B7A-43D3-8B79-37D633B846F1}">
+                <ns0:svgBlip xmlns:ns0="http://schemas.microsoft.com/office/drawing/2016/SVG/main" r:embed="rId6"/>
+              </a:ext>
+            </a:extLst>
+          </a:blip>
+          <a:stretch>
+            <a:fillRect/>
+          </a:stretch>
+        </p:blipFill>
+        <p:spPr>
+          <a:xfrm>
+            <a:off x="10917936" y="201168"/>
+            <a:ext cx="640080" cy="585919"/>
+          </a:xfrm>
+          <a:prstGeom prst="rect">
+            <a:avLst/>
+          </a:prstGeom>
+        </p:spPr>
+      </p:pic>
     </p:spTree>
   </p:cSld>
   <p:clrMapOvr>
@@ -18573,7 +19356,7 @@
             <a:avLst/>
           </a:prstGeom>
           <a:solidFill>
-            <a:srgbClr val="007F80"/>
+            <a:srgbClr val="4A6650"/>
           </a:solidFill>
           <a:ln>
             <a:noFill/>
@@ -18610,7 +19393,7 @@
         <p:spPr>
           <a:xfrm>
             <a:off x="594360" y="274320"/>
-            <a:ext cx="10972800" cy="274320"/>
+            <a:ext cx="9601200" cy="274320"/>
           </a:xfrm>
           <a:prstGeom prst="rect">
             <a:avLst/>
@@ -18629,7 +19412,7 @@
               </a:spcAft>
               <a:defRPr sz="1100" b="1">
                 <a:solidFill>
-                  <a:srgbClr val="007F80"/>
+                  <a:srgbClr val="4A6650"/>
                 </a:solidFill>
                 <a:latin typeface="Arial"/>
               </a:defRPr>
@@ -18668,7 +19451,7 @@
               </a:spcAft>
               <a:defRPr sz="3100" b="1">
                 <a:solidFill>
-                  <a:srgbClr val="142C43"/>
+                  <a:srgbClr val="2A2E2A"/>
                 </a:solidFill>
                 <a:latin typeface="Arial"/>
               </a:defRPr>
@@ -18694,7 +19477,7 @@
             <a:avLst/>
           </a:prstGeom>
           <a:solidFill>
-            <a:srgbClr val="D7E1E7"/>
+            <a:srgbClr val="C9BFB0"/>
           </a:solidFill>
           <a:ln>
             <a:noFill/>
@@ -18750,7 +19533,7 @@
               </a:spcAft>
               <a:defRPr sz="1000" b="0">
                 <a:solidFill>
-                  <a:srgbClr val="52677A"/>
+                  <a:srgbClr val="656B63"/>
                 </a:solidFill>
                 <a:latin typeface="Arial"/>
               </a:defRPr>
@@ -18789,7 +19572,7 @@
               </a:spcAft>
               <a:defRPr sz="1000" b="0">
                 <a:solidFill>
-                  <a:srgbClr val="007F80"/>
+                  <a:srgbClr val="4A6650"/>
                 </a:solidFill>
                 <a:latin typeface="Arial"/>
               </a:defRPr>
@@ -18831,7 +19614,7 @@
               </a:spcAft>
               <a:defRPr sz="1000" b="0">
                 <a:solidFill>
-                  <a:srgbClr val="007F80"/>
+                  <a:srgbClr val="4A6650"/>
                 </a:solidFill>
                 <a:latin typeface="Arial"/>
               </a:defRPr>
@@ -18873,13 +19656,13 @@
               </a:spcAft>
               <a:defRPr sz="1000" b="0">
                 <a:solidFill>
-                  <a:srgbClr val="52677A"/>
-                </a:solidFill>
-                <a:latin typeface="Arial"/>
-              </a:defRPr>
-            </a:pPr>
-            <a:r>
-              <a:t>27</a:t>
+                  <a:srgbClr val="656B63"/>
+                </a:solidFill>
+                <a:latin typeface="Arial"/>
+              </a:defRPr>
+            </a:pPr>
+            <a:r>
+              <a:t>30</a:t>
             </a:r>
           </a:p>
         </p:txBody>
@@ -18899,7 +19682,7 @@
             <a:avLst/>
           </a:prstGeom>
           <a:solidFill>
-            <a:srgbClr val="EFF5F7"/>
+            <a:srgbClr val="F5F0EA"/>
           </a:solidFill>
           <a:ln>
             <a:noFill/>
@@ -18955,7 +19738,7 @@
               </a:spcAft>
               <a:defRPr sz="2200" b="1">
                 <a:solidFill>
-                  <a:srgbClr val="007F80"/>
+                  <a:srgbClr val="4A6650"/>
                 </a:solidFill>
                 <a:latin typeface="Arial"/>
               </a:defRPr>
@@ -18994,7 +19777,7 @@
               </a:spcAft>
               <a:defRPr sz="2100" b="0">
                 <a:solidFill>
-                  <a:srgbClr val="24394B"/>
+                  <a:srgbClr val="2A2E2A"/>
                 </a:solidFill>
                 <a:latin typeface="Arial"/>
               </a:defRPr>
@@ -19010,7 +19793,7 @@
               </a:spcAft>
               <a:defRPr sz="2100" b="0">
                 <a:solidFill>
-                  <a:srgbClr val="24394B"/>
+                  <a:srgbClr val="2A2E2A"/>
                 </a:solidFill>
                 <a:latin typeface="Arial"/>
               </a:defRPr>
@@ -19026,7 +19809,7 @@
               </a:spcAft>
               <a:defRPr sz="2100" b="0">
                 <a:solidFill>
-                  <a:srgbClr val="24394B"/>
+                  <a:srgbClr val="2A2E2A"/>
                 </a:solidFill>
                 <a:latin typeface="Arial"/>
               </a:defRPr>
@@ -19042,7 +19825,7 @@
               </a:spcAft>
               <a:defRPr sz="2100" b="0">
                 <a:solidFill>
-                  <a:srgbClr val="24394B"/>
+                  <a:srgbClr val="2A2E2A"/>
                 </a:solidFill>
                 <a:latin typeface="Arial"/>
               </a:defRPr>
@@ -19068,7 +19851,7 @@
             <a:avLst/>
           </a:prstGeom>
           <a:solidFill>
-            <a:srgbClr val="EFF5F7"/>
+            <a:srgbClr val="F5F0EA"/>
           </a:solidFill>
           <a:ln>
             <a:noFill/>
@@ -19124,7 +19907,7 @@
               </a:spcAft>
               <a:defRPr sz="2200" b="1">
                 <a:solidFill>
-                  <a:srgbClr val="007F80"/>
+                  <a:srgbClr val="4A6650"/>
                 </a:solidFill>
                 <a:latin typeface="Arial"/>
               </a:defRPr>
@@ -19163,7 +19946,7 @@
               </a:spcAft>
               <a:defRPr sz="2100" b="0">
                 <a:solidFill>
-                  <a:srgbClr val="24394B"/>
+                  <a:srgbClr val="2A2E2A"/>
                 </a:solidFill>
                 <a:latin typeface="Arial"/>
               </a:defRPr>
@@ -19179,7 +19962,7 @@
               </a:spcAft>
               <a:defRPr sz="2100" b="0">
                 <a:solidFill>
-                  <a:srgbClr val="24394B"/>
+                  <a:srgbClr val="2A2E2A"/>
                 </a:solidFill>
                 <a:latin typeface="Arial"/>
               </a:defRPr>
@@ -19195,7 +19978,7 @@
               </a:spcAft>
               <a:defRPr sz="2100" b="0">
                 <a:solidFill>
-                  <a:srgbClr val="24394B"/>
+                  <a:srgbClr val="2A2E2A"/>
                 </a:solidFill>
                 <a:latin typeface="Arial"/>
               </a:defRPr>
@@ -19211,7 +19994,7 @@
               </a:spcAft>
               <a:defRPr sz="2100" b="0">
                 <a:solidFill>
-                  <a:srgbClr val="24394B"/>
+                  <a:srgbClr val="2A2E2A"/>
                 </a:solidFill>
                 <a:latin typeface="Arial"/>
               </a:defRPr>
@@ -19227,7 +20010,7 @@
               </a:spcAft>
               <a:defRPr sz="2100" b="0">
                 <a:solidFill>
-                  <a:srgbClr val="24394B"/>
+                  <a:srgbClr val="2A2E2A"/>
                 </a:solidFill>
                 <a:latin typeface="Arial"/>
               </a:defRPr>
@@ -19238,6 +20021,996 @@
           </a:p>
         </p:txBody>
       </p:sp>
+      <p:pic>
+        <p:nvPicPr>
+          <p:cNvPr id="16" name="PRomop logo" descr="PRomop logo"/>
+          <p:cNvPicPr>
+            <a:picLocks noChangeAspect="1"/>
+          </p:cNvPicPr>
+          <p:nvPr/>
+        </p:nvPicPr>
+        <p:blipFill>
+          <a:blip r:embed="rId5">
+            <a:extLst>
+              <a:ext uri="{96DAC541-7B7A-43D3-8B79-37D633B846F1}">
+                <ns0:svgBlip xmlns:ns0="http://schemas.microsoft.com/office/drawing/2016/SVG/main" r:embed="rId6"/>
+              </a:ext>
+            </a:extLst>
+          </a:blip>
+          <a:stretch>
+            <a:fillRect/>
+          </a:stretch>
+        </p:blipFill>
+        <p:spPr>
+          <a:xfrm>
+            <a:off x="10917936" y="201168"/>
+            <a:ext cx="640080" cy="585919"/>
+          </a:xfrm>
+          <a:prstGeom prst="rect">
+            <a:avLst/>
+          </a:prstGeom>
+        </p:spPr>
+      </p:pic>
+    </p:spTree>
+  </p:cSld>
+  <p:clrMapOvr>
+    <a:masterClrMapping/>
+  </p:clrMapOvr>
+</p:sld>
+</file>
+
+<file path=ppt/slides/slide28.xml><?xml version="1.0" encoding="utf-8"?>
+<p:sld xmlns:a="http://schemas.openxmlformats.org/drawingml/2006/main" xmlns:p="http://schemas.openxmlformats.org/presentationml/2006/main" xmlns:r="http://schemas.openxmlformats.org/officeDocument/2006/relationships">
+  <p:cSld>
+    <p:bg>
+      <p:bgPr>
+        <a:solidFill>
+          <a:srgbClr val="FFFFFF"/>
+        </a:solidFill>
+        <a:effectLst/>
+      </p:bgPr>
+    </p:bg>
+    <p:spTree>
+      <p:nvGrpSpPr>
+        <p:cNvPr id="1" name=""/>
+        <p:cNvGrpSpPr/>
+        <p:nvPr/>
+      </p:nvGrpSpPr>
+      <p:grpSpPr/>
+      <p:sp>
+        <p:nvSpPr>
+          <p:cNvPr id="2" name="Rectangle 1"/>
+          <p:cNvSpPr/>
+          <p:nvPr/>
+        </p:nvSpPr>
+        <p:spPr>
+          <a:xfrm>
+            <a:off x="0" y="0"/>
+            <a:ext cx="12191695" cy="91440"/>
+          </a:xfrm>
+          <a:prstGeom prst="rect">
+            <a:avLst/>
+          </a:prstGeom>
+          <a:solidFill>
+            <a:srgbClr val="4A6650"/>
+          </a:solidFill>
+          <a:ln>
+            <a:noFill/>
+          </a:ln>
+        </p:spPr>
+        <p:style>
+          <a:lnRef idx="1">
+            <a:schemeClr val="accent1"/>
+          </a:lnRef>
+          <a:fillRef idx="3">
+            <a:schemeClr val="accent1"/>
+          </a:fillRef>
+          <a:effectRef idx="2">
+            <a:schemeClr val="accent1"/>
+          </a:effectRef>
+          <a:fontRef idx="minor">
+            <a:schemeClr val="lt1"/>
+          </a:fontRef>
+        </p:style>
+        <p:txBody>
+          <a:bodyPr rtlCol="0" anchor="ctr"/>
+          <a:lstStyle/>
+          <a:p>
+            <a:pPr algn="ctr"/>
+          </a:p>
+        </p:txBody>
+      </p:sp>
+      <p:sp>
+        <p:nvSpPr>
+          <p:cNvPr id="3" name="TextBox 2"/>
+          <p:cNvSpPr txBox="1"/>
+          <p:nvPr/>
+        </p:nvSpPr>
+        <p:spPr>
+          <a:xfrm>
+            <a:off x="594360" y="274320"/>
+            <a:ext cx="9601200" cy="274320"/>
+          </a:xfrm>
+          <a:prstGeom prst="rect">
+            <a:avLst/>
+          </a:prstGeom>
+          <a:noFill/>
+        </p:spPr>
+        <p:txBody>
+          <a:bodyPr wrap="square" lIns="18288" rIns="18288" tIns="18288" bIns="18288">
+            <a:spAutoFit/>
+          </a:bodyPr>
+          <a:lstStyle/>
+          <a:p>
+            <a:pPr>
+              <a:spcAft>
+                <a:spcPts val="1000"/>
+              </a:spcAft>
+              <a:defRPr sz="1100" b="1">
+                <a:solidFill>
+                  <a:srgbClr val="4A6650"/>
+                </a:solidFill>
+                <a:latin typeface="Arial"/>
+              </a:defRPr>
+            </a:pPr>
+            <a:r>
+              <a:t>ARCHITECTURE / PHRAME</a:t>
+            </a:r>
+          </a:p>
+        </p:txBody>
+      </p:sp>
+      <p:sp>
+        <p:nvSpPr>
+          <p:cNvPr id="4" name="TextBox 3"/>
+          <p:cNvSpPr txBox="1"/>
+          <p:nvPr/>
+        </p:nvSpPr>
+        <p:spPr>
+          <a:xfrm>
+            <a:off x="594360" y="777240"/>
+            <a:ext cx="10972800" cy="914400"/>
+          </a:xfrm>
+          <a:prstGeom prst="rect">
+            <a:avLst/>
+          </a:prstGeom>
+          <a:noFill/>
+        </p:spPr>
+        <p:txBody>
+          <a:bodyPr wrap="square" lIns="18288" rIns="18288" tIns="18288" bIns="18288">
+            <a:spAutoFit/>
+          </a:bodyPr>
+          <a:lstStyle/>
+          <a:p>
+            <a:pPr>
+              <a:spcAft>
+                <a:spcPts val="1000"/>
+              </a:spcAft>
+              <a:defRPr sz="3100" b="1">
+                <a:solidFill>
+                  <a:srgbClr val="2A2E2A"/>
+                </a:solidFill>
+                <a:latin typeface="Arial"/>
+              </a:defRPr>
+            </a:pPr>
+            <a:r>
+              <a:t>Where PRomop fits in PHRAME</a:t>
+            </a:r>
+          </a:p>
+        </p:txBody>
+      </p:sp>
+      <p:sp>
+        <p:nvSpPr>
+          <p:cNvPr id="5" name="Rectangle 4"/>
+          <p:cNvSpPr/>
+          <p:nvPr/>
+        </p:nvSpPr>
+        <p:spPr>
+          <a:xfrm>
+            <a:off x="594360" y="6327648"/>
+            <a:ext cx="10972800" cy="10972"/>
+          </a:xfrm>
+          <a:prstGeom prst="rect">
+            <a:avLst/>
+          </a:prstGeom>
+          <a:solidFill>
+            <a:srgbClr val="C9BFB0"/>
+          </a:solidFill>
+          <a:ln>
+            <a:noFill/>
+          </a:ln>
+        </p:spPr>
+        <p:style>
+          <a:lnRef idx="1">
+            <a:schemeClr val="accent1"/>
+          </a:lnRef>
+          <a:fillRef idx="3">
+            <a:schemeClr val="accent1"/>
+          </a:fillRef>
+          <a:effectRef idx="2">
+            <a:schemeClr val="accent1"/>
+          </a:effectRef>
+          <a:fontRef idx="minor">
+            <a:schemeClr val="lt1"/>
+          </a:fontRef>
+        </p:style>
+        <p:txBody>
+          <a:bodyPr rtlCol="0" anchor="ctr"/>
+          <a:lstStyle/>
+          <a:p>
+            <a:pPr algn="ctr"/>
+          </a:p>
+        </p:txBody>
+      </p:sp>
+      <p:sp>
+        <p:nvSpPr>
+          <p:cNvPr id="6" name="TextBox 5"/>
+          <p:cNvSpPr txBox="1"/>
+          <p:nvPr/>
+        </p:nvSpPr>
+        <p:spPr>
+          <a:xfrm>
+            <a:off x="594360" y="6455664"/>
+            <a:ext cx="2743200" cy="182880"/>
+          </a:xfrm>
+          <a:prstGeom prst="rect">
+            <a:avLst/>
+          </a:prstGeom>
+          <a:noFill/>
+        </p:spPr>
+        <p:txBody>
+          <a:bodyPr wrap="square" lIns="18288" rIns="18288" tIns="18288" bIns="18288">
+            <a:spAutoFit/>
+          </a:bodyPr>
+          <a:lstStyle/>
+          <a:p>
+            <a:pPr>
+              <a:spcAft>
+                <a:spcPts val="1000"/>
+              </a:spcAft>
+              <a:defRPr sz="1000" b="0">
+                <a:solidFill>
+                  <a:srgbClr val="656B63"/>
+                </a:solidFill>
+                <a:latin typeface="Arial"/>
+              </a:defRPr>
+            </a:pPr>
+            <a:r>
+              <a:t>PRomop  /  Developer guide</a:t>
+            </a:r>
+          </a:p>
+        </p:txBody>
+      </p:sp>
+      <p:sp>
+        <p:nvSpPr>
+          <p:cNvPr id="8" name="TextBox 7"/>
+          <p:cNvSpPr txBox="1"/>
+          <p:nvPr/>
+        </p:nvSpPr>
+        <p:spPr>
+          <a:xfrm>
+            <a:off x="11018520" y="6446520"/>
+            <a:ext cx="548640" cy="228600"/>
+          </a:xfrm>
+          <a:prstGeom prst="rect">
+            <a:avLst/>
+          </a:prstGeom>
+          <a:noFill/>
+        </p:spPr>
+        <p:txBody>
+          <a:bodyPr wrap="square" lIns="18288" rIns="18288" tIns="18288" bIns="18288">
+            <a:spAutoFit/>
+          </a:bodyPr>
+          <a:lstStyle/>
+          <a:p>
+            <a:pPr>
+              <a:spcAft>
+                <a:spcPts val="1000"/>
+              </a:spcAft>
+              <a:defRPr sz="1000" b="0">
+                <a:solidFill>
+                  <a:srgbClr val="656B63"/>
+                </a:solidFill>
+                <a:latin typeface="Arial"/>
+              </a:defRPr>
+            </a:pPr>
+            <a:r>
+              <a:t>03</a:t>
+            </a:r>
+          </a:p>
+        </p:txBody>
+      </p:sp>
+      <p:sp>
+        <p:nvSpPr>
+          <p:cNvPr id="9" name="TextBox 8"/>
+          <p:cNvSpPr txBox="1"/>
+          <p:nvPr/>
+        </p:nvSpPr>
+        <p:spPr>
+          <a:xfrm>
+            <a:off x="3383280" y="6455664"/>
+            <a:ext cx="6949440" cy="210312"/>
+          </a:xfrm>
+          <a:prstGeom prst="rect">
+            <a:avLst/>
+          </a:prstGeom>
+          <a:noFill/>
+        </p:spPr>
+        <p:txBody>
+          <a:bodyPr wrap="square" lIns="0" rIns="0" tIns="0" bIns="0">
+            <a:spAutoFit/>
+          </a:bodyPr>
+          <a:lstStyle/>
+          <a:p>
+            <a:pPr>
+              <a:spcAft>
+                <a:spcPts val="1200"/>
+              </a:spcAft>
+              <a:defRPr sz="1000" b="0">
+                <a:solidFill>
+                  <a:srgbClr val="4A6650"/>
+                </a:solidFill>
+                <a:latin typeface="Arial"/>
+              </a:defRPr>
+            </a:pPr>
+            <a:r>
+              <a:rPr>
+                <a:hlinkClick r:id="rId2"/>
+              </a:rPr>
+              <a:t>Diagram: phrame.org / architecture</a:t>
+            </a:r>
+          </a:p>
+        </p:txBody>
+      </p:sp>
+      <p:pic>
+        <p:nvPicPr>
+          <p:cNvPr id="10" name="PHRAME architecture: ingest, ETL, PRomop store, and consuming applications" descr="PHRAME architecture: ingest, ETL, PRomop store, and consuming applications"/>
+          <p:cNvPicPr>
+            <a:picLocks noChangeAspect="1"/>
+          </p:cNvPicPr>
+          <p:nvPr/>
+        </p:nvPicPr>
+        <p:blipFill>
+          <a:blip r:embed="rId4">
+            <a:extLst>
+              <a:ext uri="{96DAC541-7B7A-43D3-8B79-37D633B846F1}">
+                <ns0:svgBlip xmlns:ns0="http://schemas.microsoft.com/office/drawing/2016/SVG/main" r:embed="rId5"/>
+              </a:ext>
+            </a:extLst>
+          </a:blip>
+          <a:stretch>
+            <a:fillRect/>
+          </a:stretch>
+        </p:blipFill>
+        <p:spPr>
+          <a:xfrm>
+            <a:off x="594360" y="1490472"/>
+            <a:ext cx="8229600" cy="4788130"/>
+          </a:xfrm>
+          <a:prstGeom prst="rect">
+            <a:avLst/>
+          </a:prstGeom>
+        </p:spPr>
+      </p:pic>
+      <p:sp>
+        <p:nvSpPr>
+          <p:cNvPr id="11" name="TextBox 10"/>
+          <p:cNvSpPr txBox="1"/>
+          <p:nvPr/>
+        </p:nvSpPr>
+        <p:spPr>
+          <a:xfrm>
+            <a:off x="9098280" y="1828800"/>
+            <a:ext cx="2468880" cy="365760"/>
+          </a:xfrm>
+          <a:prstGeom prst="rect">
+            <a:avLst/>
+          </a:prstGeom>
+          <a:noFill/>
+        </p:spPr>
+        <p:txBody>
+          <a:bodyPr wrap="square" lIns="0" rIns="0" tIns="0" bIns="0">
+            <a:spAutoFit/>
+          </a:bodyPr>
+          <a:lstStyle/>
+          <a:p>
+            <a:pPr>
+              <a:spcAft>
+                <a:spcPts val="1200"/>
+              </a:spcAft>
+              <a:defRPr sz="1400" b="1">
+                <a:solidFill>
+                  <a:srgbClr val="4A6650"/>
+                </a:solidFill>
+                <a:latin typeface="Arial"/>
+              </a:defRPr>
+            </a:pPr>
+            <a:r>
+              <a:t>READ BOTTOM TO TOP</a:t>
+            </a:r>
+          </a:p>
+        </p:txBody>
+      </p:sp>
+      <p:sp>
+        <p:nvSpPr>
+          <p:cNvPr id="12" name="TextBox 11"/>
+          <p:cNvSpPr txBox="1"/>
+          <p:nvPr/>
+        </p:nvSpPr>
+        <p:spPr>
+          <a:xfrm>
+            <a:off x="9098280" y="2377440"/>
+            <a:ext cx="2468880" cy="2651760"/>
+          </a:xfrm>
+          <a:prstGeom prst="rect">
+            <a:avLst/>
+          </a:prstGeom>
+          <a:noFill/>
+        </p:spPr>
+        <p:txBody>
+          <a:bodyPr wrap="square" lIns="0" rIns="0" tIns="0" bIns="0">
+            <a:spAutoFit/>
+          </a:bodyPr>
+          <a:lstStyle/>
+          <a:p>
+            <a:pPr>
+              <a:spcAft>
+                <a:spcPts val="1200"/>
+              </a:spcAft>
+              <a:defRPr sz="1800" b="0">
+                <a:solidFill>
+                  <a:srgbClr val="2A2E2A"/>
+                </a:solidFill>
+                <a:latin typeface="Arial"/>
+              </a:defRPr>
+            </a:pPr>
+            <a:r>
+              <a:t>1  Ingest source records.</a:t>
+            </a:r>
+          </a:p>
+          <a:p>
+            <a:pPr>
+              <a:spcAft>
+                <a:spcPts val="1200"/>
+              </a:spcAft>
+              <a:defRPr sz="1800" b="0">
+                <a:solidFill>
+                  <a:srgbClr val="2A2E2A"/>
+                </a:solidFill>
+                <a:latin typeface="Arial"/>
+              </a:defRPr>
+            </a:pPr>
+            <a:r>
+              <a:t>2  Map source codes.</a:t>
+            </a:r>
+          </a:p>
+          <a:p>
+            <a:pPr>
+              <a:spcAft>
+                <a:spcPts val="1200"/>
+              </a:spcAft>
+              <a:defRPr sz="1800" b="0">
+                <a:solidFill>
+                  <a:srgbClr val="2A2E2A"/>
+                </a:solidFill>
+                <a:latin typeface="Arial"/>
+              </a:defRPr>
+            </a:pPr>
+            <a:r>
+              <a:t>3  Store dated OMOP facts.</a:t>
+            </a:r>
+          </a:p>
+          <a:p>
+            <a:pPr>
+              <a:spcAft>
+                <a:spcPts val="1200"/>
+              </a:spcAft>
+              <a:defRPr sz="1800" b="0">
+                <a:solidFill>
+                  <a:srgbClr val="2A2E2A"/>
+                </a:solidFill>
+                <a:latin typeface="Arial"/>
+              </a:defRPr>
+            </a:pPr>
+            <a:r>
+              <a:t>4  Serve application views.</a:t>
+            </a:r>
+          </a:p>
+        </p:txBody>
+      </p:sp>
+      <p:sp>
+        <p:nvSpPr>
+          <p:cNvPr id="13" name="TextBox 12"/>
+          <p:cNvSpPr txBox="1"/>
+          <p:nvPr/>
+        </p:nvSpPr>
+        <p:spPr>
+          <a:xfrm>
+            <a:off x="9098280" y="5120640"/>
+            <a:ext cx="2468880" cy="914400"/>
+          </a:xfrm>
+          <a:prstGeom prst="rect">
+            <a:avLst/>
+          </a:prstGeom>
+          <a:noFill/>
+        </p:spPr>
+        <p:txBody>
+          <a:bodyPr wrap="square" lIns="0" rIns="0" tIns="0" bIns="0">
+            <a:spAutoFit/>
+          </a:bodyPr>
+          <a:lstStyle/>
+          <a:p>
+            <a:pPr>
+              <a:spcAft>
+                <a:spcPts val="1200"/>
+              </a:spcAft>
+              <a:defRPr sz="1500" b="0">
+                <a:solidFill>
+                  <a:srgbClr val="656B63"/>
+                </a:solidFill>
+                <a:latin typeface="Arial"/>
+              </a:defRPr>
+            </a:pPr>
+            <a:r>
+              <a:t>This guide follows the PRomop integration path through the wider PHRAME stack.</a:t>
+            </a:r>
+          </a:p>
+        </p:txBody>
+      </p:sp>
+      <p:pic>
+        <p:nvPicPr>
+          <p:cNvPr id="14" name="PRomop logo" descr="PRomop logo"/>
+          <p:cNvPicPr>
+            <a:picLocks noChangeAspect="1"/>
+          </p:cNvPicPr>
+          <p:nvPr/>
+        </p:nvPicPr>
+        <p:blipFill>
+          <a:blip r:embed="rId6">
+            <a:extLst>
+              <a:ext uri="{96DAC541-7B7A-43D3-8B79-37D633B846F1}">
+                <ns1:svgBlip xmlns:ns1="http://schemas.microsoft.com/office/drawing/2016/SVG/main" r:embed="rId7"/>
+              </a:ext>
+            </a:extLst>
+          </a:blip>
+          <a:stretch>
+            <a:fillRect/>
+          </a:stretch>
+        </p:blipFill>
+        <p:spPr>
+          <a:xfrm>
+            <a:off x="10917936" y="201168"/>
+            <a:ext cx="640080" cy="585919"/>
+          </a:xfrm>
+          <a:prstGeom prst="rect">
+            <a:avLst/>
+          </a:prstGeom>
+        </p:spPr>
+      </p:pic>
+    </p:spTree>
+  </p:cSld>
+  <p:clrMapOvr>
+    <a:masterClrMapping/>
+  </p:clrMapOvr>
+</p:sld>
+</file>
+
+<file path=ppt/slides/slide29.xml><?xml version="1.0" encoding="utf-8"?>
+<p:sld xmlns:a="http://schemas.openxmlformats.org/drawingml/2006/main" xmlns:p="http://schemas.openxmlformats.org/presentationml/2006/main" xmlns:r="http://schemas.openxmlformats.org/officeDocument/2006/relationships">
+  <p:cSld>
+    <p:bg>
+      <p:bgPr>
+        <a:solidFill>
+          <a:srgbClr val="FFFFFF"/>
+        </a:solidFill>
+        <a:effectLst/>
+      </p:bgPr>
+    </p:bg>
+    <p:spTree>
+      <p:nvGrpSpPr>
+        <p:cNvPr id="1" name=""/>
+        <p:cNvGrpSpPr/>
+        <p:nvPr/>
+      </p:nvGrpSpPr>
+      <p:grpSpPr/>
+      <p:sp>
+        <p:nvSpPr>
+          <p:cNvPr id="2" name="Rectangle 1"/>
+          <p:cNvSpPr/>
+          <p:nvPr/>
+        </p:nvSpPr>
+        <p:spPr>
+          <a:xfrm>
+            <a:off x="0" y="0"/>
+            <a:ext cx="12191695" cy="91440"/>
+          </a:xfrm>
+          <a:prstGeom prst="rect">
+            <a:avLst/>
+          </a:prstGeom>
+          <a:solidFill>
+            <a:srgbClr val="4A6650"/>
+          </a:solidFill>
+          <a:ln>
+            <a:noFill/>
+          </a:ln>
+        </p:spPr>
+        <p:style>
+          <a:lnRef idx="1">
+            <a:schemeClr val="accent1"/>
+          </a:lnRef>
+          <a:fillRef idx="3">
+            <a:schemeClr val="accent1"/>
+          </a:fillRef>
+          <a:effectRef idx="2">
+            <a:schemeClr val="accent1"/>
+          </a:effectRef>
+          <a:fontRef idx="minor">
+            <a:schemeClr val="lt1"/>
+          </a:fontRef>
+        </p:style>
+        <p:txBody>
+          <a:bodyPr rtlCol="0" anchor="ctr"/>
+          <a:lstStyle/>
+          <a:p>
+            <a:pPr algn="ctr"/>
+          </a:p>
+        </p:txBody>
+      </p:sp>
+      <p:sp>
+        <p:nvSpPr>
+          <p:cNvPr id="3" name="TextBox 2"/>
+          <p:cNvSpPr txBox="1"/>
+          <p:nvPr/>
+        </p:nvSpPr>
+        <p:spPr>
+          <a:xfrm>
+            <a:off x="594360" y="274320"/>
+            <a:ext cx="9601200" cy="274320"/>
+          </a:xfrm>
+          <a:prstGeom prst="rect">
+            <a:avLst/>
+          </a:prstGeom>
+          <a:noFill/>
+        </p:spPr>
+        <p:txBody>
+          <a:bodyPr wrap="square" lIns="18288" rIns="18288" tIns="18288" bIns="18288">
+            <a:spAutoFit/>
+          </a:bodyPr>
+          <a:lstStyle/>
+          <a:p>
+            <a:pPr>
+              <a:spcAft>
+                <a:spcPts val="1000"/>
+              </a:spcAft>
+              <a:defRPr sz="1100" b="1">
+                <a:solidFill>
+                  <a:srgbClr val="4A6650"/>
+                </a:solidFill>
+                <a:latin typeface="Arial"/>
+              </a:defRPr>
+            </a:pPr>
+            <a:r>
+              <a:t>ARCHITECTURE / PHRAME</a:t>
+            </a:r>
+          </a:p>
+        </p:txBody>
+      </p:sp>
+      <p:sp>
+        <p:nvSpPr>
+          <p:cNvPr id="4" name="TextBox 3"/>
+          <p:cNvSpPr txBox="1"/>
+          <p:nvPr/>
+        </p:nvSpPr>
+        <p:spPr>
+          <a:xfrm>
+            <a:off x="594360" y="777240"/>
+            <a:ext cx="10972800" cy="914400"/>
+          </a:xfrm>
+          <a:prstGeom prst="rect">
+            <a:avLst/>
+          </a:prstGeom>
+          <a:noFill/>
+        </p:spPr>
+        <p:txBody>
+          <a:bodyPr wrap="square" lIns="18288" rIns="18288" tIns="18288" bIns="18288">
+            <a:spAutoFit/>
+          </a:bodyPr>
+          <a:lstStyle/>
+          <a:p>
+            <a:pPr>
+              <a:spcAft>
+                <a:spcPts val="1000"/>
+              </a:spcAft>
+              <a:defRPr sz="3100" b="1">
+                <a:solidFill>
+                  <a:srgbClr val="2A2E2A"/>
+                </a:solidFill>
+                <a:latin typeface="Arial"/>
+              </a:defRPr>
+            </a:pPr>
+            <a:r>
+              <a:t>From stored facts to application views</a:t>
+            </a:r>
+          </a:p>
+        </p:txBody>
+      </p:sp>
+      <p:sp>
+        <p:nvSpPr>
+          <p:cNvPr id="5" name="Rectangle 4"/>
+          <p:cNvSpPr/>
+          <p:nvPr/>
+        </p:nvSpPr>
+        <p:spPr>
+          <a:xfrm>
+            <a:off x="594360" y="6327648"/>
+            <a:ext cx="10972800" cy="10972"/>
+          </a:xfrm>
+          <a:prstGeom prst="rect">
+            <a:avLst/>
+          </a:prstGeom>
+          <a:solidFill>
+            <a:srgbClr val="C9BFB0"/>
+          </a:solidFill>
+          <a:ln>
+            <a:noFill/>
+          </a:ln>
+        </p:spPr>
+        <p:style>
+          <a:lnRef idx="1">
+            <a:schemeClr val="accent1"/>
+          </a:lnRef>
+          <a:fillRef idx="3">
+            <a:schemeClr val="accent1"/>
+          </a:fillRef>
+          <a:effectRef idx="2">
+            <a:schemeClr val="accent1"/>
+          </a:effectRef>
+          <a:fontRef idx="minor">
+            <a:schemeClr val="lt1"/>
+          </a:fontRef>
+        </p:style>
+        <p:txBody>
+          <a:bodyPr rtlCol="0" anchor="ctr"/>
+          <a:lstStyle/>
+          <a:p>
+            <a:pPr algn="ctr"/>
+          </a:p>
+        </p:txBody>
+      </p:sp>
+      <p:sp>
+        <p:nvSpPr>
+          <p:cNvPr id="6" name="TextBox 5"/>
+          <p:cNvSpPr txBox="1"/>
+          <p:nvPr/>
+        </p:nvSpPr>
+        <p:spPr>
+          <a:xfrm>
+            <a:off x="594360" y="6455664"/>
+            <a:ext cx="2743200" cy="182880"/>
+          </a:xfrm>
+          <a:prstGeom prst="rect">
+            <a:avLst/>
+          </a:prstGeom>
+          <a:noFill/>
+        </p:spPr>
+        <p:txBody>
+          <a:bodyPr wrap="square" lIns="18288" rIns="18288" tIns="18288" bIns="18288">
+            <a:spAutoFit/>
+          </a:bodyPr>
+          <a:lstStyle/>
+          <a:p>
+            <a:pPr>
+              <a:spcAft>
+                <a:spcPts val="1000"/>
+              </a:spcAft>
+              <a:defRPr sz="1000" b="0">
+                <a:solidFill>
+                  <a:srgbClr val="656B63"/>
+                </a:solidFill>
+                <a:latin typeface="Arial"/>
+              </a:defRPr>
+            </a:pPr>
+            <a:r>
+              <a:t>PRomop  /  Developer guide</a:t>
+            </a:r>
+          </a:p>
+        </p:txBody>
+      </p:sp>
+      <p:sp>
+        <p:nvSpPr>
+          <p:cNvPr id="8" name="TextBox 7"/>
+          <p:cNvSpPr txBox="1"/>
+          <p:nvPr/>
+        </p:nvSpPr>
+        <p:spPr>
+          <a:xfrm>
+            <a:off x="11018520" y="6446520"/>
+            <a:ext cx="548640" cy="228600"/>
+          </a:xfrm>
+          <a:prstGeom prst="rect">
+            <a:avLst/>
+          </a:prstGeom>
+          <a:noFill/>
+        </p:spPr>
+        <p:txBody>
+          <a:bodyPr wrap="square" lIns="18288" rIns="18288" tIns="18288" bIns="18288">
+            <a:spAutoFit/>
+          </a:bodyPr>
+          <a:lstStyle/>
+          <a:p>
+            <a:pPr>
+              <a:spcAft>
+                <a:spcPts val="1000"/>
+              </a:spcAft>
+              <a:defRPr sz="1000" b="0">
+                <a:solidFill>
+                  <a:srgbClr val="656B63"/>
+                </a:solidFill>
+                <a:latin typeface="Arial"/>
+              </a:defRPr>
+            </a:pPr>
+            <a:r>
+              <a:t>15</a:t>
+            </a:r>
+          </a:p>
+        </p:txBody>
+      </p:sp>
+      <p:sp>
+        <p:nvSpPr>
+          <p:cNvPr id="9" name="TextBox 8"/>
+          <p:cNvSpPr txBox="1"/>
+          <p:nvPr/>
+        </p:nvSpPr>
+        <p:spPr>
+          <a:xfrm>
+            <a:off x="3383280" y="6455664"/>
+            <a:ext cx="6949440" cy="210312"/>
+          </a:xfrm>
+          <a:prstGeom prst="rect">
+            <a:avLst/>
+          </a:prstGeom>
+          <a:noFill/>
+        </p:spPr>
+        <p:txBody>
+          <a:bodyPr wrap="square" lIns="0" rIns="0" tIns="0" bIns="0">
+            <a:spAutoFit/>
+          </a:bodyPr>
+          <a:lstStyle/>
+          <a:p>
+            <a:pPr>
+              <a:spcAft>
+                <a:spcPts val="1200"/>
+              </a:spcAft>
+              <a:defRPr sz="1000" b="0">
+                <a:solidFill>
+                  <a:srgbClr val="4A6650"/>
+                </a:solidFill>
+                <a:latin typeface="Arial"/>
+              </a:defRPr>
+            </a:pPr>
+            <a:r>
+              <a:rPr>
+                <a:hlinkClick r:id="rId2"/>
+              </a:rPr>
+              <a:t>Diagram: phrame.org / architecture</a:t>
+            </a:r>
+          </a:p>
+        </p:txBody>
+      </p:sp>
+      <p:pic>
+        <p:nvPicPr>
+          <p:cNvPr id="10" name="PHRAME store and serve tiers: OMOP evidence, PatientRecord projection, and applications" descr="PHRAME store and serve tiers: OMOP evidence, PatientRecord projection, and applications"/>
+          <p:cNvPicPr>
+            <a:picLocks noChangeAspect="1"/>
+          </p:cNvPicPr>
+          <p:nvPr/>
+        </p:nvPicPr>
+        <p:blipFill>
+          <a:blip r:embed="rId4">
+            <a:extLst>
+              <a:ext uri="{96DAC541-7B7A-43D3-8B79-37D633B846F1}">
+                <ns0:svgBlip xmlns:ns0="http://schemas.microsoft.com/office/drawing/2016/SVG/main" r:embed="rId5"/>
+              </a:ext>
+            </a:extLst>
+          </a:blip>
+          <a:stretch>
+            <a:fillRect/>
+          </a:stretch>
+        </p:blipFill>
+        <p:spPr>
+          <a:xfrm>
+            <a:off x="594360" y="1600200"/>
+            <a:ext cx="10972800" cy="3940232"/>
+          </a:xfrm>
+          <a:prstGeom prst="rect">
+            <a:avLst/>
+          </a:prstGeom>
+        </p:spPr>
+      </p:pic>
+      <p:sp>
+        <p:nvSpPr>
+          <p:cNvPr id="11" name="TextBox 10"/>
+          <p:cNvSpPr txBox="1"/>
+          <p:nvPr/>
+        </p:nvSpPr>
+        <p:spPr>
+          <a:xfrm>
+            <a:off x="777240" y="5641848"/>
+            <a:ext cx="10698480" cy="594360"/>
+          </a:xfrm>
+          <a:prstGeom prst="rect">
+            <a:avLst/>
+          </a:prstGeom>
+          <a:noFill/>
+        </p:spPr>
+        <p:txBody>
+          <a:bodyPr wrap="square" lIns="0" rIns="0" tIns="0" bIns="0">
+            <a:spAutoFit/>
+          </a:bodyPr>
+          <a:lstStyle/>
+          <a:p>
+            <a:pPr>
+              <a:spcAft>
+                <a:spcPts val="1200"/>
+              </a:spcAft>
+              <a:defRPr sz="1500" b="0">
+                <a:solidFill>
+                  <a:srgbClr val="2A2E2A"/>
+                </a:solidFill>
+                <a:latin typeface="Arial"/>
+              </a:defRPr>
+            </a:pPr>
+            <a:r>
+              <a:t>OMOP retains the dated evidence. PatientRecord provides selected and derived values.</a:t>
+            </a:r>
+          </a:p>
+          <a:p>
+            <a:pPr>
+              <a:spcAft>
+                <a:spcPts val="1200"/>
+              </a:spcAft>
+              <a:defRPr sz="1500" b="0">
+                <a:solidFill>
+                  <a:srgbClr val="2A2E2A"/>
+                </a:solidFill>
+                <a:latin typeface="Arial"/>
+              </a:defRPr>
+            </a:pPr>
+            <a:r>
+              <a:t>Next: discover writable fields and save authorized interactive edits through PatientRecord PATCH.</a:t>
+            </a:r>
+          </a:p>
+        </p:txBody>
+      </p:sp>
+      <p:pic>
+        <p:nvPicPr>
+          <p:cNvPr id="12" name="PRomop logo" descr="PRomop logo"/>
+          <p:cNvPicPr>
+            <a:picLocks noChangeAspect="1"/>
+          </p:cNvPicPr>
+          <p:nvPr/>
+        </p:nvPicPr>
+        <p:blipFill>
+          <a:blip r:embed="rId6">
+            <a:extLst>
+              <a:ext uri="{96DAC541-7B7A-43D3-8B79-37D633B846F1}">
+                <ns1:svgBlip xmlns:ns1="http://schemas.microsoft.com/office/drawing/2016/SVG/main" r:embed="rId7"/>
+              </a:ext>
+            </a:extLst>
+          </a:blip>
+          <a:stretch>
+            <a:fillRect/>
+          </a:stretch>
+        </p:blipFill>
+        <p:spPr>
+          <a:xfrm>
+            <a:off x="10917936" y="201168"/>
+            <a:ext cx="640080" cy="585919"/>
+          </a:xfrm>
+          <a:prstGeom prst="rect">
+            <a:avLst/>
+          </a:prstGeom>
+        </p:spPr>
+      </p:pic>
     </p:spTree>
   </p:cSld>
   <p:clrMapOvr>
@@ -19279,7 +21052,7 @@
             <a:avLst/>
           </a:prstGeom>
           <a:solidFill>
-            <a:srgbClr val="007F80"/>
+            <a:srgbClr val="4A6650"/>
           </a:solidFill>
           <a:ln>
             <a:noFill/>
@@ -19316,7 +21089,7 @@
         <p:spPr>
           <a:xfrm>
             <a:off x="594360" y="274320"/>
-            <a:ext cx="10972800" cy="274320"/>
+            <a:ext cx="9601200" cy="274320"/>
           </a:xfrm>
           <a:prstGeom prst="rect">
             <a:avLst/>
@@ -19335,7 +21108,7 @@
               </a:spcAft>
               <a:defRPr sz="1100" b="1">
                 <a:solidFill>
-                  <a:srgbClr val="007F80"/>
+                  <a:srgbClr val="4A6650"/>
                 </a:solidFill>
                 <a:latin typeface="Arial"/>
               </a:defRPr>
@@ -19374,7 +21147,7 @@
               </a:spcAft>
               <a:defRPr sz="3100" b="1">
                 <a:solidFill>
-                  <a:srgbClr val="142C43"/>
+                  <a:srgbClr val="2A2E2A"/>
                 </a:solidFill>
                 <a:latin typeface="Arial"/>
               </a:defRPr>
@@ -19400,7 +21173,7 @@
             <a:avLst/>
           </a:prstGeom>
           <a:solidFill>
-            <a:srgbClr val="D7E1E7"/>
+            <a:srgbClr val="C9BFB0"/>
           </a:solidFill>
           <a:ln>
             <a:noFill/>
@@ -19456,7 +21229,7 @@
               </a:spcAft>
               <a:defRPr sz="1000" b="0">
                 <a:solidFill>
-                  <a:srgbClr val="52677A"/>
+                  <a:srgbClr val="656B63"/>
                 </a:solidFill>
                 <a:latin typeface="Arial"/>
               </a:defRPr>
@@ -19495,7 +21268,7 @@
               </a:spcAft>
               <a:defRPr sz="1000" b="0">
                 <a:solidFill>
-                  <a:srgbClr val="007F80"/>
+                  <a:srgbClr val="4A6650"/>
                 </a:solidFill>
                 <a:latin typeface="Arial"/>
               </a:defRPr>
@@ -19537,7 +21310,7 @@
               </a:spcAft>
               <a:defRPr sz="1000" b="0">
                 <a:solidFill>
-                  <a:srgbClr val="007F80"/>
+                  <a:srgbClr val="4A6650"/>
                 </a:solidFill>
                 <a:latin typeface="Arial"/>
               </a:defRPr>
@@ -19579,13 +21352,13 @@
               </a:spcAft>
               <a:defRPr sz="1000" b="0">
                 <a:solidFill>
-                  <a:srgbClr val="52677A"/>
-                </a:solidFill>
-                <a:latin typeface="Arial"/>
-              </a:defRPr>
-            </a:pPr>
-            <a:r>
-              <a:t>03</a:t>
+                  <a:srgbClr val="656B63"/>
+                </a:solidFill>
+                <a:latin typeface="Arial"/>
+              </a:defRPr>
+            </a:pPr>
+            <a:r>
+              <a:t>04</a:t>
             </a:r>
           </a:p>
         </p:txBody>
@@ -19605,7 +21378,7 @@
             <a:avLst/>
           </a:prstGeom>
           <a:solidFill>
-            <a:srgbClr val="EFF5F7"/>
+            <a:srgbClr val="F5F0EA"/>
           </a:solidFill>
           <a:ln>
             <a:noFill/>
@@ -19661,7 +21434,7 @@
               </a:spcAft>
               <a:defRPr sz="2200" b="1">
                 <a:solidFill>
-                  <a:srgbClr val="007F80"/>
+                  <a:srgbClr val="4A6650"/>
                 </a:solidFill>
                 <a:latin typeface="Arial"/>
               </a:defRPr>
@@ -19700,7 +21473,7 @@
               </a:spcAft>
               <a:defRPr sz="2100" b="0">
                 <a:solidFill>
-                  <a:srgbClr val="24394B"/>
+                  <a:srgbClr val="2A2E2A"/>
                 </a:solidFill>
                 <a:latin typeface="Arial"/>
               </a:defRPr>
@@ -19716,7 +21489,7 @@
               </a:spcAft>
               <a:defRPr sz="2100" b="0">
                 <a:solidFill>
-                  <a:srgbClr val="24394B"/>
+                  <a:srgbClr val="2A2E2A"/>
                 </a:solidFill>
                 <a:latin typeface="Arial"/>
               </a:defRPr>
@@ -19732,7 +21505,7 @@
               </a:spcAft>
               <a:defRPr sz="2100" b="0">
                 <a:solidFill>
-                  <a:srgbClr val="24394B"/>
+                  <a:srgbClr val="2A2E2A"/>
                 </a:solidFill>
                 <a:latin typeface="Arial"/>
               </a:defRPr>
@@ -19748,7 +21521,7 @@
               </a:spcAft>
               <a:defRPr sz="2100" b="0">
                 <a:solidFill>
-                  <a:srgbClr val="24394B"/>
+                  <a:srgbClr val="2A2E2A"/>
                 </a:solidFill>
                 <a:latin typeface="Arial"/>
               </a:defRPr>
@@ -19764,7 +21537,7 @@
               </a:spcAft>
               <a:defRPr sz="2100" b="0">
                 <a:solidFill>
-                  <a:srgbClr val="24394B"/>
+                  <a:srgbClr val="2A2E2A"/>
                 </a:solidFill>
                 <a:latin typeface="Arial"/>
               </a:defRPr>
@@ -19790,7 +21563,7 @@
             <a:avLst/>
           </a:prstGeom>
           <a:solidFill>
-            <a:srgbClr val="EFF5F7"/>
+            <a:srgbClr val="F5F0EA"/>
           </a:solidFill>
           <a:ln>
             <a:noFill/>
@@ -19846,7 +21619,7 @@
               </a:spcAft>
               <a:defRPr sz="2200" b="1">
                 <a:solidFill>
-                  <a:srgbClr val="007F80"/>
+                  <a:srgbClr val="4A6650"/>
                 </a:solidFill>
                 <a:latin typeface="Arial"/>
               </a:defRPr>
@@ -19885,7 +21658,7 @@
               </a:spcAft>
               <a:defRPr sz="2100" b="0">
                 <a:solidFill>
-                  <a:srgbClr val="24394B"/>
+                  <a:srgbClr val="2A2E2A"/>
                 </a:solidFill>
                 <a:latin typeface="Arial"/>
               </a:defRPr>
@@ -19901,7 +21674,7 @@
               </a:spcAft>
               <a:defRPr sz="2100" b="0">
                 <a:solidFill>
-                  <a:srgbClr val="24394B"/>
+                  <a:srgbClr val="2A2E2A"/>
                 </a:solidFill>
                 <a:latin typeface="Arial"/>
               </a:defRPr>
@@ -19917,7 +21690,7 @@
               </a:spcAft>
               <a:defRPr sz="2100" b="0">
                 <a:solidFill>
-                  <a:srgbClr val="24394B"/>
+                  <a:srgbClr val="2A2E2A"/>
                 </a:solidFill>
                 <a:latin typeface="Arial"/>
               </a:defRPr>
@@ -19933,7 +21706,7 @@
               </a:spcAft>
               <a:defRPr sz="2100" b="0">
                 <a:solidFill>
-                  <a:srgbClr val="24394B"/>
+                  <a:srgbClr val="2A2E2A"/>
                 </a:solidFill>
                 <a:latin typeface="Arial"/>
               </a:defRPr>
@@ -19949,7 +21722,7 @@
               </a:spcAft>
               <a:defRPr sz="2100" b="0">
                 <a:solidFill>
-                  <a:srgbClr val="24394B"/>
+                  <a:srgbClr val="2A2E2A"/>
                 </a:solidFill>
                 <a:latin typeface="Arial"/>
               </a:defRPr>
@@ -19965,7 +21738,7 @@
               </a:spcAft>
               <a:defRPr sz="2100" b="0">
                 <a:solidFill>
-                  <a:srgbClr val="24394B"/>
+                  <a:srgbClr val="2A2E2A"/>
                 </a:solidFill>
                 <a:latin typeface="Arial"/>
               </a:defRPr>
@@ -19976,6 +21749,461 @@
           </a:p>
         </p:txBody>
       </p:sp>
+      <p:pic>
+        <p:nvPicPr>
+          <p:cNvPr id="16" name="PRomop logo" descr="PRomop logo"/>
+          <p:cNvPicPr>
+            <a:picLocks noChangeAspect="1"/>
+          </p:cNvPicPr>
+          <p:nvPr/>
+        </p:nvPicPr>
+        <p:blipFill>
+          <a:blip r:embed="rId5">
+            <a:extLst>
+              <a:ext uri="{96DAC541-7B7A-43D3-8B79-37D633B846F1}">
+                <ns0:svgBlip xmlns:ns0="http://schemas.microsoft.com/office/drawing/2016/SVG/main" r:embed="rId6"/>
+              </a:ext>
+            </a:extLst>
+          </a:blip>
+          <a:stretch>
+            <a:fillRect/>
+          </a:stretch>
+        </p:blipFill>
+        <p:spPr>
+          <a:xfrm>
+            <a:off x="10917936" y="201168"/>
+            <a:ext cx="640080" cy="585919"/>
+          </a:xfrm>
+          <a:prstGeom prst="rect">
+            <a:avLst/>
+          </a:prstGeom>
+        </p:spPr>
+      </p:pic>
+    </p:spTree>
+  </p:cSld>
+  <p:clrMapOvr>
+    <a:masterClrMapping/>
+  </p:clrMapOvr>
+</p:sld>
+</file>
+
+<file path=ppt/slides/slide30.xml><?xml version="1.0" encoding="utf-8"?>
+<p:sld xmlns:a="http://schemas.openxmlformats.org/drawingml/2006/main" xmlns:p="http://schemas.openxmlformats.org/presentationml/2006/main" xmlns:r="http://schemas.openxmlformats.org/officeDocument/2006/relationships">
+  <p:cSld>
+    <p:bg>
+      <p:bgPr>
+        <a:solidFill>
+          <a:srgbClr val="FFFFFF"/>
+        </a:solidFill>
+        <a:effectLst/>
+      </p:bgPr>
+    </p:bg>
+    <p:spTree>
+      <p:nvGrpSpPr>
+        <p:cNvPr id="1" name=""/>
+        <p:cNvGrpSpPr/>
+        <p:nvPr/>
+      </p:nvGrpSpPr>
+      <p:grpSpPr/>
+      <p:sp>
+        <p:nvSpPr>
+          <p:cNvPr id="2" name="Rectangle 1"/>
+          <p:cNvSpPr/>
+          <p:nvPr/>
+        </p:nvSpPr>
+        <p:spPr>
+          <a:xfrm>
+            <a:off x="0" y="0"/>
+            <a:ext cx="12191695" cy="91440"/>
+          </a:xfrm>
+          <a:prstGeom prst="rect">
+            <a:avLst/>
+          </a:prstGeom>
+          <a:solidFill>
+            <a:srgbClr val="4A6650"/>
+          </a:solidFill>
+          <a:ln>
+            <a:noFill/>
+          </a:ln>
+        </p:spPr>
+        <p:style>
+          <a:lnRef idx="1">
+            <a:schemeClr val="accent1"/>
+          </a:lnRef>
+          <a:fillRef idx="3">
+            <a:schemeClr val="accent1"/>
+          </a:fillRef>
+          <a:effectRef idx="2">
+            <a:schemeClr val="accent1"/>
+          </a:effectRef>
+          <a:fontRef idx="minor">
+            <a:schemeClr val="lt1"/>
+          </a:fontRef>
+        </p:style>
+        <p:txBody>
+          <a:bodyPr rtlCol="0" anchor="ctr"/>
+          <a:lstStyle/>
+          <a:p>
+            <a:pPr algn="ctr"/>
+          </a:p>
+        </p:txBody>
+      </p:sp>
+      <p:sp>
+        <p:nvSpPr>
+          <p:cNvPr id="3" name="TextBox 2"/>
+          <p:cNvSpPr txBox="1"/>
+          <p:nvPr/>
+        </p:nvSpPr>
+        <p:spPr>
+          <a:xfrm>
+            <a:off x="594360" y="274320"/>
+            <a:ext cx="9601200" cy="274320"/>
+          </a:xfrm>
+          <a:prstGeom prst="rect">
+            <a:avLst/>
+          </a:prstGeom>
+          <a:noFill/>
+        </p:spPr>
+        <p:txBody>
+          <a:bodyPr wrap="square" lIns="18288" rIns="18288" tIns="18288" bIns="18288">
+            <a:spAutoFit/>
+          </a:bodyPr>
+          <a:lstStyle/>
+          <a:p>
+            <a:pPr>
+              <a:spcAft>
+                <a:spcPts val="1000"/>
+              </a:spcAft>
+              <a:defRPr sz="1100" b="1">
+                <a:solidFill>
+                  <a:srgbClr val="4A6650"/>
+                </a:solidFill>
+                <a:latin typeface="Arial"/>
+              </a:defRPr>
+            </a:pPr>
+            <a:r>
+              <a:t>ARCHITECTURE / PHRAME</a:t>
+            </a:r>
+          </a:p>
+        </p:txBody>
+      </p:sp>
+      <p:sp>
+        <p:nvSpPr>
+          <p:cNvPr id="4" name="TextBox 3"/>
+          <p:cNvSpPr txBox="1"/>
+          <p:nvPr/>
+        </p:nvSpPr>
+        <p:spPr>
+          <a:xfrm>
+            <a:off x="594360" y="777240"/>
+            <a:ext cx="10972800" cy="914400"/>
+          </a:xfrm>
+          <a:prstGeom prst="rect">
+            <a:avLst/>
+          </a:prstGeom>
+          <a:noFill/>
+        </p:spPr>
+        <p:txBody>
+          <a:bodyPr wrap="square" lIns="18288" rIns="18288" tIns="18288" bIns="18288">
+            <a:spAutoFit/>
+          </a:bodyPr>
+          <a:lstStyle/>
+          <a:p>
+            <a:pPr>
+              <a:spcAft>
+                <a:spcPts val="1000"/>
+              </a:spcAft>
+              <a:defRPr sz="3100" b="1">
+                <a:solidFill>
+                  <a:srgbClr val="2A2E2A"/>
+                </a:solidFill>
+                <a:latin typeface="Arial"/>
+              </a:defRPr>
+            </a:pPr>
+            <a:r>
+              <a:t>Where wearable adapters enter the stack</a:t>
+            </a:r>
+          </a:p>
+        </p:txBody>
+      </p:sp>
+      <p:sp>
+        <p:nvSpPr>
+          <p:cNvPr id="5" name="Rectangle 4"/>
+          <p:cNvSpPr/>
+          <p:nvPr/>
+        </p:nvSpPr>
+        <p:spPr>
+          <a:xfrm>
+            <a:off x="594360" y="6327648"/>
+            <a:ext cx="10972800" cy="10972"/>
+          </a:xfrm>
+          <a:prstGeom prst="rect">
+            <a:avLst/>
+          </a:prstGeom>
+          <a:solidFill>
+            <a:srgbClr val="C9BFB0"/>
+          </a:solidFill>
+          <a:ln>
+            <a:noFill/>
+          </a:ln>
+        </p:spPr>
+        <p:style>
+          <a:lnRef idx="1">
+            <a:schemeClr val="accent1"/>
+          </a:lnRef>
+          <a:fillRef idx="3">
+            <a:schemeClr val="accent1"/>
+          </a:fillRef>
+          <a:effectRef idx="2">
+            <a:schemeClr val="accent1"/>
+          </a:effectRef>
+          <a:fontRef idx="minor">
+            <a:schemeClr val="lt1"/>
+          </a:fontRef>
+        </p:style>
+        <p:txBody>
+          <a:bodyPr rtlCol="0" anchor="ctr"/>
+          <a:lstStyle/>
+          <a:p>
+            <a:pPr algn="ctr"/>
+          </a:p>
+        </p:txBody>
+      </p:sp>
+      <p:sp>
+        <p:nvSpPr>
+          <p:cNvPr id="6" name="TextBox 5"/>
+          <p:cNvSpPr txBox="1"/>
+          <p:nvPr/>
+        </p:nvSpPr>
+        <p:spPr>
+          <a:xfrm>
+            <a:off x="594360" y="6455664"/>
+            <a:ext cx="2743200" cy="182880"/>
+          </a:xfrm>
+          <a:prstGeom prst="rect">
+            <a:avLst/>
+          </a:prstGeom>
+          <a:noFill/>
+        </p:spPr>
+        <p:txBody>
+          <a:bodyPr wrap="square" lIns="18288" rIns="18288" tIns="18288" bIns="18288">
+            <a:spAutoFit/>
+          </a:bodyPr>
+          <a:lstStyle/>
+          <a:p>
+            <a:pPr>
+              <a:spcAft>
+                <a:spcPts val="1000"/>
+              </a:spcAft>
+              <a:defRPr sz="1000" b="0">
+                <a:solidFill>
+                  <a:srgbClr val="656B63"/>
+                </a:solidFill>
+                <a:latin typeface="Arial"/>
+              </a:defRPr>
+            </a:pPr>
+            <a:r>
+              <a:t>PRomop  /  Developer guide</a:t>
+            </a:r>
+          </a:p>
+        </p:txBody>
+      </p:sp>
+      <p:sp>
+        <p:nvSpPr>
+          <p:cNvPr id="8" name="TextBox 7"/>
+          <p:cNvSpPr txBox="1"/>
+          <p:nvPr/>
+        </p:nvSpPr>
+        <p:spPr>
+          <a:xfrm>
+            <a:off x="11018520" y="6446520"/>
+            <a:ext cx="548640" cy="228600"/>
+          </a:xfrm>
+          <a:prstGeom prst="rect">
+            <a:avLst/>
+          </a:prstGeom>
+          <a:noFill/>
+        </p:spPr>
+        <p:txBody>
+          <a:bodyPr wrap="square" lIns="18288" rIns="18288" tIns="18288" bIns="18288">
+            <a:spAutoFit/>
+          </a:bodyPr>
+          <a:lstStyle/>
+          <a:p>
+            <a:pPr>
+              <a:spcAft>
+                <a:spcPts val="1000"/>
+              </a:spcAft>
+              <a:defRPr sz="1000" b="0">
+                <a:solidFill>
+                  <a:srgbClr val="656B63"/>
+                </a:solidFill>
+                <a:latin typeface="Arial"/>
+              </a:defRPr>
+            </a:pPr>
+            <a:r>
+              <a:t>22</a:t>
+            </a:r>
+          </a:p>
+        </p:txBody>
+      </p:sp>
+      <p:sp>
+        <p:nvSpPr>
+          <p:cNvPr id="9" name="TextBox 8"/>
+          <p:cNvSpPr txBox="1"/>
+          <p:nvPr/>
+        </p:nvSpPr>
+        <p:spPr>
+          <a:xfrm>
+            <a:off x="3383280" y="6455664"/>
+            <a:ext cx="6949440" cy="210312"/>
+          </a:xfrm>
+          <a:prstGeom prst="rect">
+            <a:avLst/>
+          </a:prstGeom>
+          <a:noFill/>
+        </p:spPr>
+        <p:txBody>
+          <a:bodyPr wrap="square" lIns="0" rIns="0" tIns="0" bIns="0">
+            <a:spAutoFit/>
+          </a:bodyPr>
+          <a:lstStyle/>
+          <a:p>
+            <a:pPr>
+              <a:spcAft>
+                <a:spcPts val="1200"/>
+              </a:spcAft>
+              <a:defRPr sz="1000" b="0">
+                <a:solidFill>
+                  <a:srgbClr val="4A6650"/>
+                </a:solidFill>
+                <a:latin typeface="Arial"/>
+              </a:defRPr>
+            </a:pPr>
+            <a:r>
+              <a:rPr>
+                <a:hlinkClick r:id="rId2"/>
+              </a:rPr>
+              <a:t>Diagram: phrame.org / architecture</a:t>
+            </a:r>
+          </a:p>
+        </p:txBody>
+      </p:sp>
+      <p:pic>
+        <p:nvPicPr>
+          <p:cNvPr id="10" name="PHRAME ingest and ETL tiers feeding the PRomop longitudinal store" descr="PHRAME ingest and ETL tiers feeding the PRomop longitudinal store"/>
+          <p:cNvPicPr>
+            <a:picLocks noChangeAspect="1"/>
+          </p:cNvPicPr>
+          <p:nvPr/>
+        </p:nvPicPr>
+        <p:blipFill>
+          <a:blip r:embed="rId4">
+            <a:extLst>
+              <a:ext uri="{96DAC541-7B7A-43D3-8B79-37D633B846F1}">
+                <ns0:svgBlip xmlns:ns0="http://schemas.microsoft.com/office/drawing/2016/SVG/main" r:embed="rId5"/>
+              </a:ext>
+            </a:extLst>
+          </a:blip>
+          <a:stretch>
+            <a:fillRect/>
+          </a:stretch>
+        </p:blipFill>
+        <p:spPr>
+          <a:xfrm>
+            <a:off x="594360" y="1572768"/>
+            <a:ext cx="10972800" cy="4149713"/>
+          </a:xfrm>
+          <a:prstGeom prst="rect">
+            <a:avLst/>
+          </a:prstGeom>
+        </p:spPr>
+      </p:pic>
+      <p:sp>
+        <p:nvSpPr>
+          <p:cNvPr id="11" name="TextBox 10"/>
+          <p:cNvSpPr txBox="1"/>
+          <p:nvPr/>
+        </p:nvSpPr>
+        <p:spPr>
+          <a:xfrm>
+            <a:off x="777240" y="5797296"/>
+            <a:ext cx="10698480" cy="484632"/>
+          </a:xfrm>
+          <a:prstGeom prst="rect">
+            <a:avLst/>
+          </a:prstGeom>
+          <a:noFill/>
+        </p:spPr>
+        <p:txBody>
+          <a:bodyPr wrap="square" lIns="0" rIns="0" tIns="0" bIns="0">
+            <a:spAutoFit/>
+          </a:bodyPr>
+          <a:lstStyle/>
+          <a:p>
+            <a:pPr>
+              <a:spcAft>
+                <a:spcPts val="1200"/>
+              </a:spcAft>
+              <a:defRPr sz="1400" b="0">
+                <a:solidFill>
+                  <a:srgbClr val="2A2E2A"/>
+                </a:solidFill>
+                <a:latin typeface="Arial"/>
+              </a:defRPr>
+            </a:pPr>
+            <a:r>
+              <a:t>Adapter → daily samples → approved source-code mappings → dated OMOP facts.</a:t>
+            </a:r>
+          </a:p>
+          <a:p>
+            <a:pPr>
+              <a:spcAft>
+                <a:spcPts val="1200"/>
+              </a:spcAft>
+              <a:defRPr sz="1400" b="0">
+                <a:solidFill>
+                  <a:srgbClr val="2A2E2A"/>
+                </a:solidFill>
+                <a:latin typeface="Arial"/>
+              </a:defRPr>
+            </a:pPr>
+            <a:r>
+              <a:t>Next: use supported uploads or extend the parser; query evidence and derived summaries.</a:t>
+            </a:r>
+          </a:p>
+        </p:txBody>
+      </p:sp>
+      <p:pic>
+        <p:nvPicPr>
+          <p:cNvPr id="12" name="PRomop logo" descr="PRomop logo"/>
+          <p:cNvPicPr>
+            <a:picLocks noChangeAspect="1"/>
+          </p:cNvPicPr>
+          <p:nvPr/>
+        </p:nvPicPr>
+        <p:blipFill>
+          <a:blip r:embed="rId6">
+            <a:extLst>
+              <a:ext uri="{96DAC541-7B7A-43D3-8B79-37D633B846F1}">
+                <ns1:svgBlip xmlns:ns1="http://schemas.microsoft.com/office/drawing/2016/SVG/main" r:embed="rId7"/>
+              </a:ext>
+            </a:extLst>
+          </a:blip>
+          <a:stretch>
+            <a:fillRect/>
+          </a:stretch>
+        </p:blipFill>
+        <p:spPr>
+          <a:xfrm>
+            <a:off x="10917936" y="201168"/>
+            <a:ext cx="640080" cy="585919"/>
+          </a:xfrm>
+          <a:prstGeom prst="rect">
+            <a:avLst/>
+          </a:prstGeom>
+        </p:spPr>
+      </p:pic>
     </p:spTree>
   </p:cSld>
   <p:clrMapOvr>
@@ -20017,7 +22245,7 @@
             <a:avLst/>
           </a:prstGeom>
           <a:solidFill>
-            <a:srgbClr val="007F80"/>
+            <a:srgbClr val="4A6650"/>
           </a:solidFill>
           <a:ln>
             <a:noFill/>
@@ -20054,7 +22282,7 @@
         <p:spPr>
           <a:xfrm>
             <a:off x="594360" y="274320"/>
-            <a:ext cx="10972800" cy="274320"/>
+            <a:ext cx="9601200" cy="274320"/>
           </a:xfrm>
           <a:prstGeom prst="rect">
             <a:avLst/>
@@ -20073,7 +22301,7 @@
               </a:spcAft>
               <a:defRPr sz="1100" b="1">
                 <a:solidFill>
-                  <a:srgbClr val="007F80"/>
+                  <a:srgbClr val="4A6650"/>
                 </a:solidFill>
                 <a:latin typeface="Arial"/>
               </a:defRPr>
@@ -20112,7 +22340,7 @@
               </a:spcAft>
               <a:defRPr sz="3100" b="1">
                 <a:solidFill>
-                  <a:srgbClr val="142C43"/>
+                  <a:srgbClr val="2A2E2A"/>
                 </a:solidFill>
                 <a:latin typeface="Arial"/>
               </a:defRPr>
@@ -20138,7 +22366,7 @@
             <a:avLst/>
           </a:prstGeom>
           <a:solidFill>
-            <a:srgbClr val="D7E1E7"/>
+            <a:srgbClr val="C9BFB0"/>
           </a:solidFill>
           <a:ln>
             <a:noFill/>
@@ -20194,7 +22422,7 @@
               </a:spcAft>
               <a:defRPr sz="1000" b="0">
                 <a:solidFill>
-                  <a:srgbClr val="52677A"/>
+                  <a:srgbClr val="656B63"/>
                 </a:solidFill>
                 <a:latin typeface="Arial"/>
               </a:defRPr>
@@ -20233,7 +22461,7 @@
               </a:spcAft>
               <a:defRPr sz="1000" b="0">
                 <a:solidFill>
-                  <a:srgbClr val="007F80"/>
+                  <a:srgbClr val="4A6650"/>
                 </a:solidFill>
                 <a:latin typeface="Arial"/>
               </a:defRPr>
@@ -20275,7 +22503,7 @@
               </a:spcAft>
               <a:defRPr sz="1000" b="0">
                 <a:solidFill>
-                  <a:srgbClr val="007F80"/>
+                  <a:srgbClr val="4A6650"/>
                 </a:solidFill>
                 <a:latin typeface="Arial"/>
               </a:defRPr>
@@ -20317,13 +22545,13 @@
               </a:spcAft>
               <a:defRPr sz="1000" b="0">
                 <a:solidFill>
-                  <a:srgbClr val="52677A"/>
-                </a:solidFill>
-                <a:latin typeface="Arial"/>
-              </a:defRPr>
-            </a:pPr>
-            <a:r>
-              <a:t>04</a:t>
+                  <a:srgbClr val="656B63"/>
+                </a:solidFill>
+                <a:latin typeface="Arial"/>
+              </a:defRPr>
+            </a:pPr>
+            <a:r>
+              <a:t>05</a:t>
             </a:r>
           </a:p>
         </p:txBody>
@@ -20343,7 +22571,7 @@
             <a:avLst/>
           </a:prstGeom>
           <a:solidFill>
-            <a:srgbClr val="EFF5F7"/>
+            <a:srgbClr val="F5F0EA"/>
           </a:solidFill>
           <a:ln>
             <a:noFill/>
@@ -20399,7 +22627,7 @@
               </a:spcAft>
               <a:defRPr sz="2200" b="1">
                 <a:solidFill>
-                  <a:srgbClr val="007F80"/>
+                  <a:srgbClr val="4A6650"/>
                 </a:solidFill>
                 <a:latin typeface="Arial"/>
               </a:defRPr>
@@ -20438,7 +22666,7 @@
               </a:spcAft>
               <a:defRPr sz="2100" b="0">
                 <a:solidFill>
-                  <a:srgbClr val="24394B"/>
+                  <a:srgbClr val="2A2E2A"/>
                 </a:solidFill>
                 <a:latin typeface="Arial"/>
               </a:defRPr>
@@ -20454,7 +22682,7 @@
               </a:spcAft>
               <a:defRPr sz="2100" b="0">
                 <a:solidFill>
-                  <a:srgbClr val="24394B"/>
+                  <a:srgbClr val="2A2E2A"/>
                 </a:solidFill>
                 <a:latin typeface="Arial"/>
               </a:defRPr>
@@ -20470,7 +22698,7 @@
               </a:spcAft>
               <a:defRPr sz="2100" b="0">
                 <a:solidFill>
-                  <a:srgbClr val="24394B"/>
+                  <a:srgbClr val="2A2E2A"/>
                 </a:solidFill>
                 <a:latin typeface="Arial"/>
               </a:defRPr>
@@ -20496,7 +22724,7 @@
             <a:avLst/>
           </a:prstGeom>
           <a:solidFill>
-            <a:srgbClr val="EFF5F7"/>
+            <a:srgbClr val="F5F0EA"/>
           </a:solidFill>
           <a:ln>
             <a:noFill/>
@@ -20552,7 +22780,7 @@
               </a:spcAft>
               <a:defRPr sz="2200" b="1">
                 <a:solidFill>
-                  <a:srgbClr val="007F80"/>
+                  <a:srgbClr val="4A6650"/>
                 </a:solidFill>
                 <a:latin typeface="Arial"/>
               </a:defRPr>
@@ -20591,7 +22819,7 @@
               </a:spcAft>
               <a:defRPr sz="2100" b="0">
                 <a:solidFill>
-                  <a:srgbClr val="24394B"/>
+                  <a:srgbClr val="2A2E2A"/>
                 </a:solidFill>
                 <a:latin typeface="Arial"/>
               </a:defRPr>
@@ -20607,7 +22835,7 @@
               </a:spcAft>
               <a:defRPr sz="2100" b="0">
                 <a:solidFill>
-                  <a:srgbClr val="24394B"/>
+                  <a:srgbClr val="2A2E2A"/>
                 </a:solidFill>
                 <a:latin typeface="Arial"/>
               </a:defRPr>
@@ -20623,7 +22851,7 @@
               </a:spcAft>
               <a:defRPr sz="2100" b="0">
                 <a:solidFill>
-                  <a:srgbClr val="24394B"/>
+                  <a:srgbClr val="2A2E2A"/>
                 </a:solidFill>
                 <a:latin typeface="Arial"/>
               </a:defRPr>
@@ -20634,6 +22862,36 @@
           </a:p>
         </p:txBody>
       </p:sp>
+      <p:pic>
+        <p:nvPicPr>
+          <p:cNvPr id="16" name="PRomop logo" descr="PRomop logo"/>
+          <p:cNvPicPr>
+            <a:picLocks noChangeAspect="1"/>
+          </p:cNvPicPr>
+          <p:nvPr/>
+        </p:nvPicPr>
+        <p:blipFill>
+          <a:blip r:embed="rId5">
+            <a:extLst>
+              <a:ext uri="{96DAC541-7B7A-43D3-8B79-37D633B846F1}">
+                <ns0:svgBlip xmlns:ns0="http://schemas.microsoft.com/office/drawing/2016/SVG/main" r:embed="rId6"/>
+              </a:ext>
+            </a:extLst>
+          </a:blip>
+          <a:stretch>
+            <a:fillRect/>
+          </a:stretch>
+        </p:blipFill>
+        <p:spPr>
+          <a:xfrm>
+            <a:off x="10917936" y="201168"/>
+            <a:ext cx="640080" cy="585919"/>
+          </a:xfrm>
+          <a:prstGeom prst="rect">
+            <a:avLst/>
+          </a:prstGeom>
+        </p:spPr>
+      </p:pic>
     </p:spTree>
   </p:cSld>
   <p:clrMapOvr>
@@ -20675,7 +22933,7 @@
             <a:avLst/>
           </a:prstGeom>
           <a:solidFill>
-            <a:srgbClr val="007F80"/>
+            <a:srgbClr val="4A6650"/>
           </a:solidFill>
           <a:ln>
             <a:noFill/>
@@ -20712,7 +22970,7 @@
         <p:spPr>
           <a:xfrm>
             <a:off x="594360" y="274320"/>
-            <a:ext cx="10972800" cy="274320"/>
+            <a:ext cx="9601200" cy="274320"/>
           </a:xfrm>
           <a:prstGeom prst="rect">
             <a:avLst/>
@@ -20731,7 +22989,7 @@
               </a:spcAft>
               <a:defRPr sz="1100" b="1">
                 <a:solidFill>
-                  <a:srgbClr val="007F80"/>
+                  <a:srgbClr val="4A6650"/>
                 </a:solidFill>
                 <a:latin typeface="Arial"/>
               </a:defRPr>
@@ -20770,7 +23028,7 @@
               </a:spcAft>
               <a:defRPr sz="3100" b="1">
                 <a:solidFill>
-                  <a:srgbClr val="142C43"/>
+                  <a:srgbClr val="2A2E2A"/>
                 </a:solidFill>
                 <a:latin typeface="Arial"/>
               </a:defRPr>
@@ -20796,7 +23054,7 @@
             <a:avLst/>
           </a:prstGeom>
           <a:solidFill>
-            <a:srgbClr val="D7E1E7"/>
+            <a:srgbClr val="C9BFB0"/>
           </a:solidFill>
           <a:ln>
             <a:noFill/>
@@ -20852,7 +23110,7 @@
               </a:spcAft>
               <a:defRPr sz="1000" b="0">
                 <a:solidFill>
-                  <a:srgbClr val="52677A"/>
+                  <a:srgbClr val="656B63"/>
                 </a:solidFill>
                 <a:latin typeface="Arial"/>
               </a:defRPr>
@@ -20891,7 +23149,7 @@
               </a:spcAft>
               <a:defRPr sz="1000" b="0">
                 <a:solidFill>
-                  <a:srgbClr val="007F80"/>
+                  <a:srgbClr val="4A6650"/>
                 </a:solidFill>
                 <a:latin typeface="Arial"/>
               </a:defRPr>
@@ -20933,13 +23191,13 @@
               </a:spcAft>
               <a:defRPr sz="1000" b="0">
                 <a:solidFill>
-                  <a:srgbClr val="52677A"/>
-                </a:solidFill>
-                <a:latin typeface="Arial"/>
-              </a:defRPr>
-            </a:pPr>
-            <a:r>
-              <a:t>05</a:t>
+                  <a:srgbClr val="656B63"/>
+                </a:solidFill>
+                <a:latin typeface="Arial"/>
+              </a:defRPr>
+            </a:pPr>
+            <a:r>
+              <a:t>06</a:t>
             </a:r>
           </a:p>
         </p:txBody>
@@ -20959,7 +23217,7 @@
             <a:avLst/>
           </a:prstGeom>
           <a:solidFill>
-            <a:srgbClr val="142C43"/>
+            <a:srgbClr val="2A2E2A"/>
           </a:solidFill>
           <a:ln>
             <a:noFill/>
@@ -21196,6 +23454,36 @@
           </a:p>
         </p:txBody>
       </p:sp>
+      <p:pic>
+        <p:nvPicPr>
+          <p:cNvPr id="11" name="PRomop logo" descr="PRomop logo"/>
+          <p:cNvPicPr>
+            <a:picLocks noChangeAspect="1"/>
+          </p:cNvPicPr>
+          <p:nvPr/>
+        </p:nvPicPr>
+        <p:blipFill>
+          <a:blip r:embed="rId4">
+            <a:extLst>
+              <a:ext uri="{96DAC541-7B7A-43D3-8B79-37D633B846F1}">
+                <ns0:svgBlip xmlns:ns0="http://schemas.microsoft.com/office/drawing/2016/SVG/main" r:embed="rId5"/>
+              </a:ext>
+            </a:extLst>
+          </a:blip>
+          <a:stretch>
+            <a:fillRect/>
+          </a:stretch>
+        </p:blipFill>
+        <p:spPr>
+          <a:xfrm>
+            <a:off x="10917936" y="201168"/>
+            <a:ext cx="640080" cy="585919"/>
+          </a:xfrm>
+          <a:prstGeom prst="rect">
+            <a:avLst/>
+          </a:prstGeom>
+        </p:spPr>
+      </p:pic>
     </p:spTree>
   </p:cSld>
   <p:clrMapOvr>
@@ -21237,7 +23525,7 @@
             <a:avLst/>
           </a:prstGeom>
           <a:solidFill>
-            <a:srgbClr val="007F80"/>
+            <a:srgbClr val="4A6650"/>
           </a:solidFill>
           <a:ln>
             <a:noFill/>
@@ -21274,7 +23562,7 @@
         <p:spPr>
           <a:xfrm>
             <a:off x="594360" y="274320"/>
-            <a:ext cx="10972800" cy="274320"/>
+            <a:ext cx="9601200" cy="274320"/>
           </a:xfrm>
           <a:prstGeom prst="rect">
             <a:avLst/>
@@ -21293,7 +23581,7 @@
               </a:spcAft>
               <a:defRPr sz="1100" b="1">
                 <a:solidFill>
-                  <a:srgbClr val="007F80"/>
+                  <a:srgbClr val="4A6650"/>
                 </a:solidFill>
                 <a:latin typeface="Arial"/>
               </a:defRPr>
@@ -21332,7 +23620,7 @@
               </a:spcAft>
               <a:defRPr sz="3100" b="1">
                 <a:solidFill>
-                  <a:srgbClr val="142C43"/>
+                  <a:srgbClr val="2A2E2A"/>
                 </a:solidFill>
                 <a:latin typeface="Arial"/>
               </a:defRPr>
@@ -21358,7 +23646,7 @@
             <a:avLst/>
           </a:prstGeom>
           <a:solidFill>
-            <a:srgbClr val="D7E1E7"/>
+            <a:srgbClr val="C9BFB0"/>
           </a:solidFill>
           <a:ln>
             <a:noFill/>
@@ -21414,7 +23702,7 @@
               </a:spcAft>
               <a:defRPr sz="1000" b="0">
                 <a:solidFill>
-                  <a:srgbClr val="52677A"/>
+                  <a:srgbClr val="656B63"/>
                 </a:solidFill>
                 <a:latin typeface="Arial"/>
               </a:defRPr>
@@ -21453,7 +23741,7 @@
               </a:spcAft>
               <a:defRPr sz="1000" b="0">
                 <a:solidFill>
-                  <a:srgbClr val="007F80"/>
+                  <a:srgbClr val="4A6650"/>
                 </a:solidFill>
                 <a:latin typeface="Arial"/>
               </a:defRPr>
@@ -21495,7 +23783,7 @@
               </a:spcAft>
               <a:defRPr sz="1000" b="0">
                 <a:solidFill>
-                  <a:srgbClr val="007F80"/>
+                  <a:srgbClr val="4A6650"/>
                 </a:solidFill>
                 <a:latin typeface="Arial"/>
               </a:defRPr>
@@ -21537,13 +23825,13 @@
               </a:spcAft>
               <a:defRPr sz="1000" b="0">
                 <a:solidFill>
-                  <a:srgbClr val="52677A"/>
-                </a:solidFill>
-                <a:latin typeface="Arial"/>
-              </a:defRPr>
-            </a:pPr>
-            <a:r>
-              <a:t>06</a:t>
+                  <a:srgbClr val="656B63"/>
+                </a:solidFill>
+                <a:latin typeface="Arial"/>
+              </a:defRPr>
+            </a:pPr>
+            <a:r>
+              <a:t>07</a:t>
             </a:r>
           </a:p>
         </p:txBody>
@@ -21563,7 +23851,7 @@
             <a:avLst/>
           </a:prstGeom>
           <a:solidFill>
-            <a:srgbClr val="EFF5F7"/>
+            <a:srgbClr val="F5F0EA"/>
           </a:solidFill>
           <a:ln>
             <a:noFill/>
@@ -21619,7 +23907,7 @@
               </a:spcAft>
               <a:defRPr sz="2200" b="1">
                 <a:solidFill>
-                  <a:srgbClr val="007F80"/>
+                  <a:srgbClr val="4A6650"/>
                 </a:solidFill>
                 <a:latin typeface="Arial"/>
               </a:defRPr>
@@ -21658,7 +23946,7 @@
               </a:spcAft>
               <a:defRPr sz="2100" b="0">
                 <a:solidFill>
-                  <a:srgbClr val="24394B"/>
+                  <a:srgbClr val="2A2E2A"/>
                 </a:solidFill>
                 <a:latin typeface="Arial"/>
               </a:defRPr>
@@ -21674,7 +23962,7 @@
               </a:spcAft>
               <a:defRPr sz="2100" b="0">
                 <a:solidFill>
-                  <a:srgbClr val="24394B"/>
+                  <a:srgbClr val="2A2E2A"/>
                 </a:solidFill>
                 <a:latin typeface="Arial"/>
               </a:defRPr>
@@ -21690,7 +23978,7 @@
               </a:spcAft>
               <a:defRPr sz="2100" b="0">
                 <a:solidFill>
-                  <a:srgbClr val="24394B"/>
+                  <a:srgbClr val="2A2E2A"/>
                 </a:solidFill>
                 <a:latin typeface="Arial"/>
               </a:defRPr>
@@ -21716,7 +24004,7 @@
             <a:avLst/>
           </a:prstGeom>
           <a:solidFill>
-            <a:srgbClr val="EFF5F7"/>
+            <a:srgbClr val="F5F0EA"/>
           </a:solidFill>
           <a:ln>
             <a:noFill/>
@@ -21772,7 +24060,7 @@
               </a:spcAft>
               <a:defRPr sz="2200" b="1">
                 <a:solidFill>
-                  <a:srgbClr val="007F80"/>
+                  <a:srgbClr val="4A6650"/>
                 </a:solidFill>
                 <a:latin typeface="Arial"/>
               </a:defRPr>
@@ -21811,7 +24099,7 @@
               </a:spcAft>
               <a:defRPr sz="2100" b="0">
                 <a:solidFill>
-                  <a:srgbClr val="24394B"/>
+                  <a:srgbClr val="2A2E2A"/>
                 </a:solidFill>
                 <a:latin typeface="Arial"/>
               </a:defRPr>
@@ -21827,7 +24115,7 @@
               </a:spcAft>
               <a:defRPr sz="2100" b="0">
                 <a:solidFill>
-                  <a:srgbClr val="24394B"/>
+                  <a:srgbClr val="2A2E2A"/>
                 </a:solidFill>
                 <a:latin typeface="Arial"/>
               </a:defRPr>
@@ -21843,7 +24131,7 @@
               </a:spcAft>
               <a:defRPr sz="2100" b="0">
                 <a:solidFill>
-                  <a:srgbClr val="24394B"/>
+                  <a:srgbClr val="2A2E2A"/>
                 </a:solidFill>
                 <a:latin typeface="Arial"/>
               </a:defRPr>
@@ -21854,6 +24142,36 @@
           </a:p>
         </p:txBody>
       </p:sp>
+      <p:pic>
+        <p:nvPicPr>
+          <p:cNvPr id="16" name="PRomop logo" descr="PRomop logo"/>
+          <p:cNvPicPr>
+            <a:picLocks noChangeAspect="1"/>
+          </p:cNvPicPr>
+          <p:nvPr/>
+        </p:nvPicPr>
+        <p:blipFill>
+          <a:blip r:embed="rId5">
+            <a:extLst>
+              <a:ext uri="{96DAC541-7B7A-43D3-8B79-37D633B846F1}">
+                <ns0:svgBlip xmlns:ns0="http://schemas.microsoft.com/office/drawing/2016/SVG/main" r:embed="rId6"/>
+              </a:ext>
+            </a:extLst>
+          </a:blip>
+          <a:stretch>
+            <a:fillRect/>
+          </a:stretch>
+        </p:blipFill>
+        <p:spPr>
+          <a:xfrm>
+            <a:off x="10917936" y="201168"/>
+            <a:ext cx="640080" cy="585919"/>
+          </a:xfrm>
+          <a:prstGeom prst="rect">
+            <a:avLst/>
+          </a:prstGeom>
+        </p:spPr>
+      </p:pic>
     </p:spTree>
   </p:cSld>
   <p:clrMapOvr>
@@ -21895,7 +24213,7 @@
             <a:avLst/>
           </a:prstGeom>
           <a:solidFill>
-            <a:srgbClr val="007F80"/>
+            <a:srgbClr val="4A6650"/>
           </a:solidFill>
           <a:ln>
             <a:noFill/>
@@ -21932,7 +24250,7 @@
         <p:spPr>
           <a:xfrm>
             <a:off x="594360" y="274320"/>
-            <a:ext cx="10972800" cy="274320"/>
+            <a:ext cx="9601200" cy="274320"/>
           </a:xfrm>
           <a:prstGeom prst="rect">
             <a:avLst/>
@@ -21951,7 +24269,7 @@
               </a:spcAft>
               <a:defRPr sz="1100" b="1">
                 <a:solidFill>
-                  <a:srgbClr val="007F80"/>
+                  <a:srgbClr val="4A6650"/>
                 </a:solidFill>
                 <a:latin typeface="Arial"/>
               </a:defRPr>
@@ -21990,7 +24308,7 @@
               </a:spcAft>
               <a:defRPr sz="3100" b="1">
                 <a:solidFill>
-                  <a:srgbClr val="142C43"/>
+                  <a:srgbClr val="2A2E2A"/>
                 </a:solidFill>
                 <a:latin typeface="Arial"/>
               </a:defRPr>
@@ -22016,7 +24334,7 @@
             <a:avLst/>
           </a:prstGeom>
           <a:solidFill>
-            <a:srgbClr val="D7E1E7"/>
+            <a:srgbClr val="C9BFB0"/>
           </a:solidFill>
           <a:ln>
             <a:noFill/>
@@ -22072,7 +24390,7 @@
               </a:spcAft>
               <a:defRPr sz="1000" b="0">
                 <a:solidFill>
-                  <a:srgbClr val="52677A"/>
+                  <a:srgbClr val="656B63"/>
                 </a:solidFill>
                 <a:latin typeface="Arial"/>
               </a:defRPr>
@@ -22111,7 +24429,7 @@
               </a:spcAft>
               <a:defRPr sz="1000" b="0">
                 <a:solidFill>
-                  <a:srgbClr val="007F80"/>
+                  <a:srgbClr val="4A6650"/>
                 </a:solidFill>
                 <a:latin typeface="Arial"/>
               </a:defRPr>
@@ -22153,13 +24471,13 @@
               </a:spcAft>
               <a:defRPr sz="1000" b="0">
                 <a:solidFill>
-                  <a:srgbClr val="52677A"/>
-                </a:solidFill>
-                <a:latin typeface="Arial"/>
-              </a:defRPr>
-            </a:pPr>
-            <a:r>
-              <a:t>07</a:t>
+                  <a:srgbClr val="656B63"/>
+                </a:solidFill>
+                <a:latin typeface="Arial"/>
+              </a:defRPr>
+            </a:pPr>
+            <a:r>
+              <a:t>08</a:t>
             </a:r>
           </a:p>
         </p:txBody>
@@ -22179,7 +24497,7 @@
             <a:avLst/>
           </a:prstGeom>
           <a:solidFill>
-            <a:srgbClr val="142C43"/>
+            <a:srgbClr val="2A2E2A"/>
           </a:solidFill>
           <a:ln>
             <a:noFill/>
@@ -22431,7 +24749,7 @@
               </a:spcAft>
               <a:defRPr sz="2200" b="1">
                 <a:solidFill>
-                  <a:srgbClr val="007F80"/>
+                  <a:srgbClr val="4A6650"/>
                 </a:solidFill>
                 <a:latin typeface="Arial"/>
               </a:defRPr>
@@ -22470,7 +24788,7 @@
               </a:spcAft>
               <a:defRPr sz="2000" b="0">
                 <a:solidFill>
-                  <a:srgbClr val="24394B"/>
+                  <a:srgbClr val="2A2E2A"/>
                 </a:solidFill>
                 <a:latin typeface="Arial"/>
               </a:defRPr>
@@ -22486,7 +24804,7 @@
               </a:spcAft>
               <a:defRPr sz="2000" b="0">
                 <a:solidFill>
-                  <a:srgbClr val="24394B"/>
+                  <a:srgbClr val="2A2E2A"/>
                 </a:solidFill>
                 <a:latin typeface="Arial"/>
               </a:defRPr>
@@ -22502,7 +24820,7 @@
               </a:spcAft>
               <a:defRPr sz="2000" b="0">
                 <a:solidFill>
-                  <a:srgbClr val="24394B"/>
+                  <a:srgbClr val="2A2E2A"/>
                 </a:solidFill>
                 <a:latin typeface="Arial"/>
               </a:defRPr>
@@ -22513,6 +24831,36 @@
           </a:p>
         </p:txBody>
       </p:sp>
+      <p:pic>
+        <p:nvPicPr>
+          <p:cNvPr id="13" name="PRomop logo" descr="PRomop logo"/>
+          <p:cNvPicPr>
+            <a:picLocks noChangeAspect="1"/>
+          </p:cNvPicPr>
+          <p:nvPr/>
+        </p:nvPicPr>
+        <p:blipFill>
+          <a:blip r:embed="rId4">
+            <a:extLst>
+              <a:ext uri="{96DAC541-7B7A-43D3-8B79-37D633B846F1}">
+                <ns0:svgBlip xmlns:ns0="http://schemas.microsoft.com/office/drawing/2016/SVG/main" r:embed="rId5"/>
+              </a:ext>
+            </a:extLst>
+          </a:blip>
+          <a:stretch>
+            <a:fillRect/>
+          </a:stretch>
+        </p:blipFill>
+        <p:spPr>
+          <a:xfrm>
+            <a:off x="10917936" y="201168"/>
+            <a:ext cx="640080" cy="585919"/>
+          </a:xfrm>
+          <a:prstGeom prst="rect">
+            <a:avLst/>
+          </a:prstGeom>
+        </p:spPr>
+      </p:pic>
     </p:spTree>
   </p:cSld>
   <p:clrMapOvr>
@@ -22554,7 +24902,7 @@
             <a:avLst/>
           </a:prstGeom>
           <a:solidFill>
-            <a:srgbClr val="007F80"/>
+            <a:srgbClr val="4A6650"/>
           </a:solidFill>
           <a:ln>
             <a:noFill/>
@@ -22591,7 +24939,7 @@
         <p:spPr>
           <a:xfrm>
             <a:off x="594360" y="274320"/>
-            <a:ext cx="10972800" cy="274320"/>
+            <a:ext cx="9601200" cy="274320"/>
           </a:xfrm>
           <a:prstGeom prst="rect">
             <a:avLst/>
@@ -22610,7 +24958,7 @@
               </a:spcAft>
               <a:defRPr sz="1100" b="1">
                 <a:solidFill>
-                  <a:srgbClr val="007F80"/>
+                  <a:srgbClr val="4A6650"/>
                 </a:solidFill>
                 <a:latin typeface="Arial"/>
               </a:defRPr>
@@ -22649,7 +24997,7 @@
               </a:spcAft>
               <a:defRPr sz="3100" b="1">
                 <a:solidFill>
-                  <a:srgbClr val="142C43"/>
+                  <a:srgbClr val="2A2E2A"/>
                 </a:solidFill>
                 <a:latin typeface="Arial"/>
               </a:defRPr>
@@ -22675,7 +25023,7 @@
             <a:avLst/>
           </a:prstGeom>
           <a:solidFill>
-            <a:srgbClr val="D7E1E7"/>
+            <a:srgbClr val="C9BFB0"/>
           </a:solidFill>
           <a:ln>
             <a:noFill/>
@@ -22731,7 +25079,7 @@
               </a:spcAft>
               <a:defRPr sz="1000" b="0">
                 <a:solidFill>
-                  <a:srgbClr val="52677A"/>
+                  <a:srgbClr val="656B63"/>
                 </a:solidFill>
                 <a:latin typeface="Arial"/>
               </a:defRPr>
@@ -22770,7 +25118,7 @@
               </a:spcAft>
               <a:defRPr sz="1000" b="0">
                 <a:solidFill>
-                  <a:srgbClr val="007F80"/>
+                  <a:srgbClr val="4A6650"/>
                 </a:solidFill>
                 <a:latin typeface="Arial"/>
               </a:defRPr>
@@ -22812,7 +25160,7 @@
               </a:spcAft>
               <a:defRPr sz="1000" b="0">
                 <a:solidFill>
-                  <a:srgbClr val="007F80"/>
+                  <a:srgbClr val="4A6650"/>
                 </a:solidFill>
                 <a:latin typeface="Arial"/>
               </a:defRPr>
@@ -22854,13 +25202,13 @@
               </a:spcAft>
               <a:defRPr sz="1000" b="0">
                 <a:solidFill>
-                  <a:srgbClr val="52677A"/>
-                </a:solidFill>
-                <a:latin typeface="Arial"/>
-              </a:defRPr>
-            </a:pPr>
-            <a:r>
-              <a:t>08</a:t>
+                  <a:srgbClr val="656B63"/>
+                </a:solidFill>
+                <a:latin typeface="Arial"/>
+              </a:defRPr>
+            </a:pPr>
+            <a:r>
+              <a:t>09</a:t>
             </a:r>
           </a:p>
         </p:txBody>
@@ -22880,7 +25228,7 @@
             <a:avLst/>
           </a:prstGeom>
           <a:solidFill>
-            <a:srgbClr val="142C43"/>
+            <a:srgbClr val="2A2E2A"/>
           </a:solidFill>
           <a:ln>
             <a:noFill/>
@@ -23180,7 +25528,7 @@
               </a:spcAft>
               <a:defRPr sz="2200" b="1">
                 <a:solidFill>
-                  <a:srgbClr val="007F80"/>
+                  <a:srgbClr val="4A6650"/>
                 </a:solidFill>
                 <a:latin typeface="Arial"/>
               </a:defRPr>
@@ -23219,7 +25567,7 @@
               </a:spcAft>
               <a:defRPr sz="2000" b="0">
                 <a:solidFill>
-                  <a:srgbClr val="24394B"/>
+                  <a:srgbClr val="2A2E2A"/>
                 </a:solidFill>
                 <a:latin typeface="Arial"/>
               </a:defRPr>
@@ -23235,7 +25583,7 @@
               </a:spcAft>
               <a:defRPr sz="2000" b="0">
                 <a:solidFill>
-                  <a:srgbClr val="24394B"/>
+                  <a:srgbClr val="2A2E2A"/>
                 </a:solidFill>
                 <a:latin typeface="Arial"/>
               </a:defRPr>
@@ -23251,7 +25599,7 @@
               </a:spcAft>
               <a:defRPr sz="2000" b="0">
                 <a:solidFill>
-                  <a:srgbClr val="24394B"/>
+                  <a:srgbClr val="2A2E2A"/>
                 </a:solidFill>
                 <a:latin typeface="Arial"/>
               </a:defRPr>
@@ -23262,6 +25610,36 @@
           </a:p>
         </p:txBody>
       </p:sp>
+      <p:pic>
+        <p:nvPicPr>
+          <p:cNvPr id="14" name="PRomop logo" descr="PRomop logo"/>
+          <p:cNvPicPr>
+            <a:picLocks noChangeAspect="1"/>
+          </p:cNvPicPr>
+          <p:nvPr/>
+        </p:nvPicPr>
+        <p:blipFill>
+          <a:blip r:embed="rId5">
+            <a:extLst>
+              <a:ext uri="{96DAC541-7B7A-43D3-8B79-37D633B846F1}">
+                <ns0:svgBlip xmlns:ns0="http://schemas.microsoft.com/office/drawing/2016/SVG/main" r:embed="rId6"/>
+              </a:ext>
+            </a:extLst>
+          </a:blip>
+          <a:stretch>
+            <a:fillRect/>
+          </a:stretch>
+        </p:blipFill>
+        <p:spPr>
+          <a:xfrm>
+            <a:off x="10917936" y="201168"/>
+            <a:ext cx="640080" cy="585919"/>
+          </a:xfrm>
+          <a:prstGeom prst="rect">
+            <a:avLst/>
+          </a:prstGeom>
+        </p:spPr>
+      </p:pic>
     </p:spTree>
   </p:cSld>
   <p:clrMapOvr>
@@ -23303,7 +25681,7 @@
             <a:avLst/>
           </a:prstGeom>
           <a:solidFill>
-            <a:srgbClr val="007F80"/>
+            <a:srgbClr val="4A6650"/>
           </a:solidFill>
           <a:ln>
             <a:noFill/>
@@ -23340,7 +25718,7 @@
         <p:spPr>
           <a:xfrm>
             <a:off x="594360" y="274320"/>
-            <a:ext cx="10972800" cy="274320"/>
+            <a:ext cx="9601200" cy="274320"/>
           </a:xfrm>
           <a:prstGeom prst="rect">
             <a:avLst/>
@@ -23359,7 +25737,7 @@
               </a:spcAft>
               <a:defRPr sz="1100" b="1">
                 <a:solidFill>
-                  <a:srgbClr val="007F80"/>
+                  <a:srgbClr val="4A6650"/>
                 </a:solidFill>
                 <a:latin typeface="Arial"/>
               </a:defRPr>
@@ -23398,7 +25776,7 @@
               </a:spcAft>
               <a:defRPr sz="3100" b="1">
                 <a:solidFill>
-                  <a:srgbClr val="142C43"/>
+                  <a:srgbClr val="2A2E2A"/>
                 </a:solidFill>
                 <a:latin typeface="Arial"/>
               </a:defRPr>
@@ -23424,7 +25802,7 @@
             <a:avLst/>
           </a:prstGeom>
           <a:solidFill>
-            <a:srgbClr val="D7E1E7"/>
+            <a:srgbClr val="C9BFB0"/>
           </a:solidFill>
           <a:ln>
             <a:noFill/>
@@ -23480,7 +25858,7 @@
               </a:spcAft>
               <a:defRPr sz="1000" b="0">
                 <a:solidFill>
-                  <a:srgbClr val="52677A"/>
+                  <a:srgbClr val="656B63"/>
                 </a:solidFill>
                 <a:latin typeface="Arial"/>
               </a:defRPr>
@@ -23519,7 +25897,7 @@
               </a:spcAft>
               <a:defRPr sz="1000" b="0">
                 <a:solidFill>
-                  <a:srgbClr val="007F80"/>
+                  <a:srgbClr val="4A6650"/>
                 </a:solidFill>
                 <a:latin typeface="Arial"/>
               </a:defRPr>
@@ -23561,13 +25939,13 @@
               </a:spcAft>
               <a:defRPr sz="1000" b="0">
                 <a:solidFill>
-                  <a:srgbClr val="52677A"/>
-                </a:solidFill>
-                <a:latin typeface="Arial"/>
-              </a:defRPr>
-            </a:pPr>
-            <a:r>
-              <a:t>09</a:t>
+                  <a:srgbClr val="656B63"/>
+                </a:solidFill>
+                <a:latin typeface="Arial"/>
+              </a:defRPr>
+            </a:pPr>
+            <a:r>
+              <a:t>10</a:t>
             </a:r>
           </a:p>
         </p:txBody>
@@ -23587,7 +25965,7 @@
             <a:avLst/>
           </a:prstGeom>
           <a:solidFill>
-            <a:srgbClr val="142C43"/>
+            <a:srgbClr val="2A2E2A"/>
           </a:solidFill>
           <a:ln>
             <a:noFill/>
@@ -23884,7 +26262,7 @@
               </a:spcAft>
               <a:defRPr sz="2200" b="1">
                 <a:solidFill>
-                  <a:srgbClr val="007F80"/>
+                  <a:srgbClr val="4A6650"/>
                 </a:solidFill>
                 <a:latin typeface="Arial"/>
               </a:defRPr>
@@ -23923,7 +26301,7 @@
               </a:spcAft>
               <a:defRPr sz="2000" b="0">
                 <a:solidFill>
-                  <a:srgbClr val="24394B"/>
+                  <a:srgbClr val="2A2E2A"/>
                 </a:solidFill>
                 <a:latin typeface="Arial"/>
               </a:defRPr>
@@ -23939,7 +26317,7 @@
               </a:spcAft>
               <a:defRPr sz="2000" b="0">
                 <a:solidFill>
-                  <a:srgbClr val="24394B"/>
+                  <a:srgbClr val="2A2E2A"/>
                 </a:solidFill>
                 <a:latin typeface="Arial"/>
               </a:defRPr>
@@ -23955,7 +26333,7 @@
               </a:spcAft>
               <a:defRPr sz="2000" b="0">
                 <a:solidFill>
-                  <a:srgbClr val="24394B"/>
+                  <a:srgbClr val="2A2E2A"/>
                 </a:solidFill>
                 <a:latin typeface="Arial"/>
               </a:defRPr>
@@ -23966,6 +26344,36 @@
           </a:p>
         </p:txBody>
       </p:sp>
+      <p:pic>
+        <p:nvPicPr>
+          <p:cNvPr id="13" name="PRomop logo" descr="PRomop logo"/>
+          <p:cNvPicPr>
+            <a:picLocks noChangeAspect="1"/>
+          </p:cNvPicPr>
+          <p:nvPr/>
+        </p:nvPicPr>
+        <p:blipFill>
+          <a:blip r:embed="rId4">
+            <a:extLst>
+              <a:ext uri="{96DAC541-7B7A-43D3-8B79-37D633B846F1}">
+                <ns0:svgBlip xmlns:ns0="http://schemas.microsoft.com/office/drawing/2016/SVG/main" r:embed="rId5"/>
+              </a:ext>
+            </a:extLst>
+          </a:blip>
+          <a:stretch>
+            <a:fillRect/>
+          </a:stretch>
+        </p:blipFill>
+        <p:spPr>
+          <a:xfrm>
+            <a:off x="10917936" y="201168"/>
+            <a:ext cx="640080" cy="585919"/>
+          </a:xfrm>
+          <a:prstGeom prst="rect">
+            <a:avLst/>
+          </a:prstGeom>
+        </p:spPr>
+      </p:pic>
     </p:spTree>
   </p:cSld>
   <p:clrMapOvr>
